--- a/scripts/flowchart_scripts.pptx
+++ b/scripts/flowchart_scripts.pptx
@@ -7,11 +7,14 @@
   <p:sldIdLst>
     <p:sldId id="256" r:id="rId2"/>
     <p:sldId id="257" r:id="rId3"/>
-    <p:sldId id="258" r:id="rId4"/>
-    <p:sldId id="261" r:id="rId5"/>
-    <p:sldId id="262" r:id="rId6"/>
-    <p:sldId id="259" r:id="rId7"/>
-    <p:sldId id="260" r:id="rId8"/>
+    <p:sldId id="265" r:id="rId4"/>
+    <p:sldId id="264" r:id="rId5"/>
+    <p:sldId id="267" r:id="rId6"/>
+    <p:sldId id="261" r:id="rId7"/>
+    <p:sldId id="268" r:id="rId8"/>
+    <p:sldId id="266" r:id="rId9"/>
+    <p:sldId id="259" r:id="rId10"/>
+    <p:sldId id="260" r:id="rId11"/>
   </p:sldIdLst>
   <p:sldSz cx="7772400" cy="10058400"/>
   <p:notesSz cx="6858000" cy="9144000"/>
@@ -249,7 +252,7 @@
           <a:p>
             <a:fld id="{F061670A-77DF-43D8-9A1C-6CBADEEB7971}" type="datetimeFigureOut">
               <a:rPr lang="en-US" smtClean="0"/>
-              <a:t>3/19/2024</a:t>
+              <a:t>5/16/2025</a:t>
             </a:fld>
             <a:endParaRPr lang="en-US"/>
           </a:p>
@@ -419,7 +422,7 @@
           <a:p>
             <a:fld id="{F061670A-77DF-43D8-9A1C-6CBADEEB7971}" type="datetimeFigureOut">
               <a:rPr lang="en-US" smtClean="0"/>
-              <a:t>3/19/2024</a:t>
+              <a:t>5/16/2025</a:t>
             </a:fld>
             <a:endParaRPr lang="en-US"/>
           </a:p>
@@ -599,7 +602,7 @@
           <a:p>
             <a:fld id="{F061670A-77DF-43D8-9A1C-6CBADEEB7971}" type="datetimeFigureOut">
               <a:rPr lang="en-US" smtClean="0"/>
-              <a:t>3/19/2024</a:t>
+              <a:t>5/16/2025</a:t>
             </a:fld>
             <a:endParaRPr lang="en-US"/>
           </a:p>
@@ -769,7 +772,7 @@
           <a:p>
             <a:fld id="{F061670A-77DF-43D8-9A1C-6CBADEEB7971}" type="datetimeFigureOut">
               <a:rPr lang="en-US" smtClean="0"/>
-              <a:t>3/19/2024</a:t>
+              <a:t>5/16/2025</a:t>
             </a:fld>
             <a:endParaRPr lang="en-US"/>
           </a:p>
@@ -1013,7 +1016,7 @@
           <a:p>
             <a:fld id="{F061670A-77DF-43D8-9A1C-6CBADEEB7971}" type="datetimeFigureOut">
               <a:rPr lang="en-US" smtClean="0"/>
-              <a:t>3/19/2024</a:t>
+              <a:t>5/16/2025</a:t>
             </a:fld>
             <a:endParaRPr lang="en-US"/>
           </a:p>
@@ -1245,7 +1248,7 @@
           <a:p>
             <a:fld id="{F061670A-77DF-43D8-9A1C-6CBADEEB7971}" type="datetimeFigureOut">
               <a:rPr lang="en-US" smtClean="0"/>
-              <a:t>3/19/2024</a:t>
+              <a:t>5/16/2025</a:t>
             </a:fld>
             <a:endParaRPr lang="en-US"/>
           </a:p>
@@ -1612,7 +1615,7 @@
           <a:p>
             <a:fld id="{F061670A-77DF-43D8-9A1C-6CBADEEB7971}" type="datetimeFigureOut">
               <a:rPr lang="en-US" smtClean="0"/>
-              <a:t>3/19/2024</a:t>
+              <a:t>5/16/2025</a:t>
             </a:fld>
             <a:endParaRPr lang="en-US"/>
           </a:p>
@@ -1730,7 +1733,7 @@
           <a:p>
             <a:fld id="{F061670A-77DF-43D8-9A1C-6CBADEEB7971}" type="datetimeFigureOut">
               <a:rPr lang="en-US" smtClean="0"/>
-              <a:t>3/19/2024</a:t>
+              <a:t>5/16/2025</a:t>
             </a:fld>
             <a:endParaRPr lang="en-US"/>
           </a:p>
@@ -1825,7 +1828,7 @@
           <a:p>
             <a:fld id="{F061670A-77DF-43D8-9A1C-6CBADEEB7971}" type="datetimeFigureOut">
               <a:rPr lang="en-US" smtClean="0"/>
-              <a:t>3/19/2024</a:t>
+              <a:t>5/16/2025</a:t>
             </a:fld>
             <a:endParaRPr lang="en-US"/>
           </a:p>
@@ -2102,7 +2105,7 @@
           <a:p>
             <a:fld id="{F061670A-77DF-43D8-9A1C-6CBADEEB7971}" type="datetimeFigureOut">
               <a:rPr lang="en-US" smtClean="0"/>
-              <a:t>3/19/2024</a:t>
+              <a:t>5/16/2025</a:t>
             </a:fld>
             <a:endParaRPr lang="en-US"/>
           </a:p>
@@ -2359,7 +2362,7 @@
           <a:p>
             <a:fld id="{F061670A-77DF-43D8-9A1C-6CBADEEB7971}" type="datetimeFigureOut">
               <a:rPr lang="en-US" smtClean="0"/>
-              <a:t>3/19/2024</a:t>
+              <a:t>5/16/2025</a:t>
             </a:fld>
             <a:endParaRPr lang="en-US"/>
           </a:p>
@@ -2572,7 +2575,7 @@
           <a:p>
             <a:fld id="{F061670A-77DF-43D8-9A1C-6CBADEEB7971}" type="datetimeFigureOut">
               <a:rPr lang="en-US" smtClean="0"/>
-              <a:t>3/19/2024</a:t>
+              <a:t>5/16/2025</a:t>
             </a:fld>
             <a:endParaRPr lang="en-US"/>
           </a:p>
@@ -3031,6 +3034,12 @@
               <a:t>Flowchart of input, scripts, output</a:t>
             </a:r>
           </a:p>
+          <a:p>
+            <a:r>
+              <a:rPr lang="en-US" dirty="0"/>
+              <a:t>Inputs can be scripts that are sourced</a:t>
+            </a:r>
+          </a:p>
         </p:txBody>
       </p:sp>
       <p:sp>
@@ -3175,7 +3184,64 @@
             <a:pPr algn="ctr"/>
             <a:r>
               <a:rPr lang="en-US" dirty="0"/>
-              <a:t>Output</a:t>
+              <a:t>Output: </a:t>
+            </a:r>
+            <a:r>
+              <a:rPr lang="en-US" dirty="0" err="1"/>
+              <a:t>dataframe</a:t>
+            </a:r>
+            <a:r>
+              <a:rPr lang="en-US" dirty="0"/>
+              <a:t>, csv, xlsx</a:t>
+            </a:r>
+          </a:p>
+        </p:txBody>
+      </p:sp>
+      <p:sp>
+        <p:nvSpPr>
+          <p:cNvPr id="7" name="Rectangle: Rounded Corners 6">
+            <a:extLst>
+              <a:ext uri="{FF2B5EF4-FFF2-40B4-BE49-F238E27FC236}">
+                <a16:creationId xmlns:a16="http://schemas.microsoft.com/office/drawing/2014/main" id="{2B4B16C6-A427-A43E-9745-7C6E0660064A}"/>
+              </a:ext>
+            </a:extLst>
+          </p:cNvPr>
+          <p:cNvSpPr/>
+          <p:nvPr/>
+        </p:nvSpPr>
+        <p:spPr>
+          <a:xfrm>
+            <a:off x="5197985" y="9223650"/>
+            <a:ext cx="1433447" cy="688446"/>
+          </a:xfrm>
+          <a:prstGeom prst="roundRect">
+            <a:avLst/>
+          </a:prstGeom>
+        </p:spPr>
+        <p:style>
+          <a:lnRef idx="2">
+            <a:schemeClr val="accent4">
+              <a:shade val="15000"/>
+            </a:schemeClr>
+          </a:lnRef>
+          <a:fillRef idx="1">
+            <a:schemeClr val="accent4"/>
+          </a:fillRef>
+          <a:effectRef idx="0">
+            <a:schemeClr val="accent4"/>
+          </a:effectRef>
+          <a:fontRef idx="minor">
+            <a:schemeClr val="lt1"/>
+          </a:fontRef>
+        </p:style>
+        <p:txBody>
+          <a:bodyPr rtlCol="0" anchor="ctr"/>
+          <a:lstStyle/>
+          <a:p>
+            <a:pPr algn="ctr"/>
+            <a:r>
+              <a:rPr lang="en-US" dirty="0"/>
+              <a:t>Output: figure</a:t>
             </a:r>
           </a:p>
         </p:txBody>
@@ -3184,6 +3250,86 @@
     <p:extLst>
       <p:ext uri="{BB962C8B-B14F-4D97-AF65-F5344CB8AC3E}">
         <p14:creationId xmlns:p14="http://schemas.microsoft.com/office/powerpoint/2010/main" val="3050133624"/>
+      </p:ext>
+    </p:extLst>
+  </p:cSld>
+  <p:clrMapOvr>
+    <a:masterClrMapping/>
+  </p:clrMapOvr>
+</p:sld>
+</file>
+
+<file path=ppt/slides/slide10.xml><?xml version="1.0" encoding="utf-8"?>
+<p:sld xmlns:a="http://schemas.openxmlformats.org/drawingml/2006/main" xmlns:r="http://schemas.openxmlformats.org/officeDocument/2006/relationships" xmlns:p="http://schemas.openxmlformats.org/presentationml/2006/main">
+  <p:cSld>
+    <p:spTree>
+      <p:nvGrpSpPr>
+        <p:cNvPr id="1" name=""/>
+        <p:cNvGrpSpPr/>
+        <p:nvPr/>
+      </p:nvGrpSpPr>
+      <p:grpSpPr>
+        <a:xfrm>
+          <a:off x="0" y="0"/>
+          <a:ext cx="0" cy="0"/>
+          <a:chOff x="0" y="0"/>
+          <a:chExt cx="0" cy="0"/>
+        </a:xfrm>
+      </p:grpSpPr>
+      <p:sp>
+        <p:nvSpPr>
+          <p:cNvPr id="2" name="Title 1">
+            <a:extLst>
+              <a:ext uri="{FF2B5EF4-FFF2-40B4-BE49-F238E27FC236}">
+                <a16:creationId xmlns:a16="http://schemas.microsoft.com/office/drawing/2014/main" id="{0D917AAE-D2A4-0A4A-E78C-316D167473D5}"/>
+              </a:ext>
+            </a:extLst>
+          </p:cNvPr>
+          <p:cNvSpPr>
+            <a:spLocks noGrp="1"/>
+          </p:cNvSpPr>
+          <p:nvPr>
+            <p:ph type="title"/>
+          </p:nvPr>
+        </p:nvSpPr>
+        <p:spPr/>
+        <p:txBody>
+          <a:bodyPr/>
+          <a:lstStyle/>
+          <a:p>
+            <a:endParaRPr lang="en-US"/>
+          </a:p>
+        </p:txBody>
+      </p:sp>
+      <p:sp>
+        <p:nvSpPr>
+          <p:cNvPr id="3" name="Content Placeholder 2">
+            <a:extLst>
+              <a:ext uri="{FF2B5EF4-FFF2-40B4-BE49-F238E27FC236}">
+                <a16:creationId xmlns:a16="http://schemas.microsoft.com/office/drawing/2014/main" id="{962E2BFF-6E89-CAB3-EF8D-28142CFA455C}"/>
+              </a:ext>
+            </a:extLst>
+          </p:cNvPr>
+          <p:cNvSpPr>
+            <a:spLocks noGrp="1"/>
+          </p:cNvSpPr>
+          <p:nvPr>
+            <p:ph idx="1"/>
+          </p:nvPr>
+        </p:nvSpPr>
+        <p:spPr/>
+        <p:txBody>
+          <a:bodyPr/>
+          <a:lstStyle/>
+          <a:p>
+            <a:endParaRPr lang="en-US"/>
+          </a:p>
+        </p:txBody>
+      </p:sp>
+    </p:spTree>
+    <p:extLst>
+      <p:ext uri="{BB962C8B-B14F-4D97-AF65-F5344CB8AC3E}">
+        <p14:creationId xmlns:p14="http://schemas.microsoft.com/office/powerpoint/2010/main" val="3200785684"/>
       </p:ext>
     </p:extLst>
   </p:cSld>
@@ -4015,7 +4161,13 @@
   <p:cSld>
     <p:spTree>
       <p:nvGrpSpPr>
-        <p:cNvPr id="1" name=""/>
+        <p:cNvPr id="1" name="">
+          <a:extLst>
+            <a:ext uri="{FF2B5EF4-FFF2-40B4-BE49-F238E27FC236}">
+              <a16:creationId xmlns:a16="http://schemas.microsoft.com/office/drawing/2014/main" id="{21BAD4D6-94C0-70B9-0052-688951A90290}"/>
+            </a:ext>
+          </a:extLst>
+        </p:cNvPr>
         <p:cNvGrpSpPr/>
         <p:nvPr/>
       </p:nvGrpSpPr>
@@ -4029,10 +4181,10 @@
       </p:grpSpPr>
       <p:sp>
         <p:nvSpPr>
-          <p:cNvPr id="10" name="Rectangle: Rounded Corners 9">
-            <a:extLst>
-              <a:ext uri="{FF2B5EF4-FFF2-40B4-BE49-F238E27FC236}">
-                <a16:creationId xmlns:a16="http://schemas.microsoft.com/office/drawing/2014/main" id="{D737E575-F2DD-3F22-BF17-22BAEE3E5AE5}"/>
+          <p:cNvPr id="11" name="Rectangle: Rounded Corners 10">
+            <a:extLst>
+              <a:ext uri="{FF2B5EF4-FFF2-40B4-BE49-F238E27FC236}">
+                <a16:creationId xmlns:a16="http://schemas.microsoft.com/office/drawing/2014/main" id="{4676CCE7-8082-B35B-8FDF-78863A44A564}"/>
               </a:ext>
             </a:extLst>
           </p:cNvPr>
@@ -4041,7 +4193,7 @@
         </p:nvSpPr>
         <p:spPr>
           <a:xfrm>
-            <a:off x="3282950" y="9165510"/>
+            <a:off x="508295" y="2619400"/>
             <a:ext cx="1828800" cy="457200"/>
           </a:xfrm>
           <a:prstGeom prst="roundRect">
@@ -4071,7 +4223,7 @@
             <a:pPr algn="ctr"/>
             <a:r>
               <a:rPr lang="en-US" sz="1200" b="1" dirty="0" err="1"/>
-              <a:t>wrangle_arcgis.R</a:t>
+              <a:t>wrangle_cas_data.R</a:t>
             </a:r>
             <a:endParaRPr lang="en-US" sz="1200" b="1" dirty="0"/>
           </a:p>
@@ -4079,10 +4231,10 @@
       </p:sp>
       <p:sp>
         <p:nvSpPr>
-          <p:cNvPr id="11" name="Rectangle: Rounded Corners 10">
-            <a:extLst>
-              <a:ext uri="{FF2B5EF4-FFF2-40B4-BE49-F238E27FC236}">
-                <a16:creationId xmlns:a16="http://schemas.microsoft.com/office/drawing/2014/main" id="{111909DF-EE82-E882-21E3-803BF6C62F9A}"/>
+          <p:cNvPr id="12" name="Rectangle: Rounded Corners 11">
+            <a:extLst>
+              <a:ext uri="{FF2B5EF4-FFF2-40B4-BE49-F238E27FC236}">
+                <a16:creationId xmlns:a16="http://schemas.microsoft.com/office/drawing/2014/main" id="{D398518A-CC0A-BE7F-8281-53DC5597F392}"/>
               </a:ext>
             </a:extLst>
           </p:cNvPr>
@@ -4091,7 +4243,7 @@
         </p:nvSpPr>
         <p:spPr>
           <a:xfrm>
-            <a:off x="3282950" y="4567097"/>
+            <a:off x="508295" y="1521324"/>
             <a:ext cx="1828800" cy="457200"/>
           </a:xfrm>
           <a:prstGeom prst="roundRect">
@@ -4121,7 +4273,7 @@
             <a:pPr algn="ctr"/>
             <a:r>
               <a:rPr lang="en-US" sz="1200" b="1" dirty="0" err="1"/>
-              <a:t>wrangle_cas_data.R</a:t>
+              <a:t>wrangleStationData_SI.R</a:t>
             </a:r>
             <a:endParaRPr lang="en-US" sz="1200" b="1" dirty="0"/>
           </a:p>
@@ -4129,10 +4281,10 @@
       </p:sp>
       <p:sp>
         <p:nvSpPr>
-          <p:cNvPr id="12" name="Rectangle: Rounded Corners 11">
-            <a:extLst>
-              <a:ext uri="{FF2B5EF4-FFF2-40B4-BE49-F238E27FC236}">
-                <a16:creationId xmlns:a16="http://schemas.microsoft.com/office/drawing/2014/main" id="{F8233055-3E4B-7D86-0AA2-255CDE3DC270}"/>
+          <p:cNvPr id="13" name="Rectangle: Rounded Corners 12">
+            <a:extLst>
+              <a:ext uri="{FF2B5EF4-FFF2-40B4-BE49-F238E27FC236}">
+                <a16:creationId xmlns:a16="http://schemas.microsoft.com/office/drawing/2014/main" id="{B0047FE2-A82F-6093-318C-2CC061F95EAF}"/>
               </a:ext>
             </a:extLst>
           </p:cNvPr>
@@ -4141,8 +4293,8 @@
         </p:nvSpPr>
         <p:spPr>
           <a:xfrm>
-            <a:off x="3282950" y="1501487"/>
-            <a:ext cx="1828800" cy="457200"/>
+            <a:off x="1104900" y="7467"/>
+            <a:ext cx="5372100" cy="1059333"/>
           </a:xfrm>
           <a:prstGeom prst="roundRect">
             <a:avLst/>
@@ -4170,19 +4322,19 @@
           <a:p>
             <a:pPr algn="ctr"/>
             <a:r>
-              <a:rPr lang="en-US" sz="1200" b="1" dirty="0" err="1"/>
-              <a:t>wrangleStationData_SI.R</a:t>
-            </a:r>
-            <a:endParaRPr lang="en-US" sz="1200" b="1" dirty="0"/>
-          </a:p>
-        </p:txBody>
-      </p:sp>
-      <p:sp>
-        <p:nvSpPr>
-          <p:cNvPr id="13" name="Rectangle: Rounded Corners 12">
-            <a:extLst>
-              <a:ext uri="{FF2B5EF4-FFF2-40B4-BE49-F238E27FC236}">
-                <a16:creationId xmlns:a16="http://schemas.microsoft.com/office/drawing/2014/main" id="{4EAD1516-111C-AE3C-0503-992AE73B9E6E}"/>
+              <a:rPr lang="en-US" sz="3600" b="1" dirty="0" err="1"/>
+              <a:t>wrangle_cas_si_su_data.R</a:t>
+            </a:r>
+            <a:endParaRPr lang="en-US" sz="3600" b="1" dirty="0"/>
+          </a:p>
+        </p:txBody>
+      </p:sp>
+      <p:sp>
+        <p:nvSpPr>
+          <p:cNvPr id="14" name="Rectangle: Rounded Corners 13">
+            <a:extLst>
+              <a:ext uri="{FF2B5EF4-FFF2-40B4-BE49-F238E27FC236}">
+                <a16:creationId xmlns:a16="http://schemas.microsoft.com/office/drawing/2014/main" id="{AAD9DCD6-6595-C31A-4DDA-5737DDECA6A4}"/>
               </a:ext>
             </a:extLst>
           </p:cNvPr>
@@ -4191,8 +4343,8 @@
         </p:nvSpPr>
         <p:spPr>
           <a:xfrm>
-            <a:off x="1104900" y="215479"/>
-            <a:ext cx="5372100" cy="851321"/>
+            <a:off x="508295" y="2070362"/>
+            <a:ext cx="1828800" cy="457200"/>
           </a:xfrm>
           <a:prstGeom prst="roundRect">
             <a:avLst/>
@@ -4220,19 +4372,54 @@
           <a:p>
             <a:pPr algn="ctr"/>
             <a:r>
-              <a:rPr lang="en-US" sz="3600" dirty="0" err="1"/>
-              <a:t>wrangle_cas_si_su_data.R</a:t>
-            </a:r>
-            <a:endParaRPr lang="en-US" sz="3600" dirty="0"/>
-          </a:p>
-        </p:txBody>
-      </p:sp>
-      <p:sp>
-        <p:nvSpPr>
-          <p:cNvPr id="14" name="Rectangle: Rounded Corners 13">
-            <a:extLst>
-              <a:ext uri="{FF2B5EF4-FFF2-40B4-BE49-F238E27FC236}">
-                <a16:creationId xmlns:a16="http://schemas.microsoft.com/office/drawing/2014/main" id="{600BB368-7EFF-8F1A-2975-1356952FE833}"/>
+              <a:rPr lang="en-US" sz="1200" b="1" dirty="0" err="1"/>
+              <a:t>wrangle_SU-SI_DuplicatesNewData.R</a:t>
+            </a:r>
+            <a:endParaRPr lang="en-US" sz="1200" b="1" dirty="0"/>
+          </a:p>
+        </p:txBody>
+      </p:sp>
+      <p:sp>
+        <p:nvSpPr>
+          <p:cNvPr id="2" name="TextBox 1">
+            <a:extLst>
+              <a:ext uri="{FF2B5EF4-FFF2-40B4-BE49-F238E27FC236}">
+                <a16:creationId xmlns:a16="http://schemas.microsoft.com/office/drawing/2014/main" id="{927C2231-5420-AFFE-76C5-ADE3FE639C79}"/>
+              </a:ext>
+            </a:extLst>
+          </p:cNvPr>
+          <p:cNvSpPr txBox="1"/>
+          <p:nvPr/>
+        </p:nvSpPr>
+        <p:spPr>
+          <a:xfrm>
+            <a:off x="3643352" y="1087352"/>
+            <a:ext cx="1107996" cy="461665"/>
+          </a:xfrm>
+          <a:prstGeom prst="rect">
+            <a:avLst/>
+          </a:prstGeom>
+          <a:noFill/>
+        </p:spPr>
+        <p:txBody>
+          <a:bodyPr wrap="none" rtlCol="0">
+            <a:spAutoFit/>
+          </a:bodyPr>
+          <a:lstStyle/>
+          <a:p>
+            <a:r>
+              <a:rPr lang="en-US" sz="2400" dirty="0"/>
+              <a:t>SCRIPT	</a:t>
+            </a:r>
+          </a:p>
+        </p:txBody>
+      </p:sp>
+      <p:sp>
+        <p:nvSpPr>
+          <p:cNvPr id="3" name="Rectangle: Rounded Corners 2">
+            <a:extLst>
+              <a:ext uri="{FF2B5EF4-FFF2-40B4-BE49-F238E27FC236}">
+                <a16:creationId xmlns:a16="http://schemas.microsoft.com/office/drawing/2014/main" id="{F760FBEE-ACD0-907E-6BF4-E86FF89C73FE}"/>
               </a:ext>
             </a:extLst>
           </p:cNvPr>
@@ -4241,7 +4428,127 @@
         </p:nvSpPr>
         <p:spPr>
           <a:xfrm>
-            <a:off x="3282950" y="3034292"/>
+            <a:off x="5152196" y="1501487"/>
+            <a:ext cx="2603500" cy="228600"/>
+          </a:xfrm>
+          <a:prstGeom prst="roundRect">
+            <a:avLst/>
+          </a:prstGeom>
+        </p:spPr>
+        <p:style>
+          <a:lnRef idx="2">
+            <a:schemeClr val="accent6">
+              <a:shade val="50000"/>
+            </a:schemeClr>
+          </a:lnRef>
+          <a:fillRef idx="1">
+            <a:schemeClr val="accent6"/>
+          </a:fillRef>
+          <a:effectRef idx="0">
+            <a:schemeClr val="accent6"/>
+          </a:effectRef>
+          <a:fontRef idx="minor">
+            <a:schemeClr val="lt1"/>
+          </a:fontRef>
+        </p:style>
+        <p:txBody>
+          <a:bodyPr rtlCol="0" anchor="ctr"/>
+          <a:lstStyle/>
+          <a:p>
+            <a:pPr algn="ctr"/>
+            <a:r>
+              <a:rPr lang="it-IT" sz="1200" b="1" dirty="0"/>
+              <a:t>data_cas_si_su_mpa_pop</a:t>
+            </a:r>
+            <a:endParaRPr lang="en-US" sz="1200" b="1" dirty="0"/>
+          </a:p>
+        </p:txBody>
+      </p:sp>
+      <p:sp>
+        <p:nvSpPr>
+          <p:cNvPr id="4" name="TextBox 3">
+            <a:extLst>
+              <a:ext uri="{FF2B5EF4-FFF2-40B4-BE49-F238E27FC236}">
+                <a16:creationId xmlns:a16="http://schemas.microsoft.com/office/drawing/2014/main" id="{EECC5E1B-5BDA-63E7-90D5-77453253067B}"/>
+              </a:ext>
+            </a:extLst>
+          </p:cNvPr>
+          <p:cNvSpPr txBox="1"/>
+          <p:nvPr/>
+        </p:nvSpPr>
+        <p:spPr>
+          <a:xfrm>
+            <a:off x="6057605" y="1087284"/>
+            <a:ext cx="1242648" cy="461665"/>
+          </a:xfrm>
+          <a:prstGeom prst="rect">
+            <a:avLst/>
+          </a:prstGeom>
+          <a:noFill/>
+        </p:spPr>
+        <p:txBody>
+          <a:bodyPr wrap="none" rtlCol="0">
+            <a:spAutoFit/>
+          </a:bodyPr>
+          <a:lstStyle/>
+          <a:p>
+            <a:r>
+              <a:rPr lang="en-US" sz="2400" dirty="0"/>
+              <a:t>OUTPUT</a:t>
+            </a:r>
+          </a:p>
+        </p:txBody>
+      </p:sp>
+      <p:sp>
+        <p:nvSpPr>
+          <p:cNvPr id="5" name="TextBox 4">
+            <a:extLst>
+              <a:ext uri="{FF2B5EF4-FFF2-40B4-BE49-F238E27FC236}">
+                <a16:creationId xmlns:a16="http://schemas.microsoft.com/office/drawing/2014/main" id="{794D0E4C-B531-D034-DD80-790549CE862A}"/>
+              </a:ext>
+            </a:extLst>
+          </p:cNvPr>
+          <p:cNvSpPr txBox="1"/>
+          <p:nvPr/>
+        </p:nvSpPr>
+        <p:spPr>
+          <a:xfrm>
+            <a:off x="922113" y="1083072"/>
+            <a:ext cx="1107996" cy="461665"/>
+          </a:xfrm>
+          <a:prstGeom prst="rect">
+            <a:avLst/>
+          </a:prstGeom>
+          <a:noFill/>
+        </p:spPr>
+        <p:txBody>
+          <a:bodyPr wrap="none" rtlCol="0">
+            <a:spAutoFit/>
+          </a:bodyPr>
+          <a:lstStyle/>
+          <a:p>
+            <a:r>
+              <a:rPr lang="en-US" sz="2400" dirty="0"/>
+              <a:t>INPUT	</a:t>
+            </a:r>
+          </a:p>
+        </p:txBody>
+      </p:sp>
+      <p:sp>
+        <p:nvSpPr>
+          <p:cNvPr id="27" name="Rectangle: Rounded Corners 26">
+            <a:extLst>
+              <a:ext uri="{FF2B5EF4-FFF2-40B4-BE49-F238E27FC236}">
+                <a16:creationId xmlns:a16="http://schemas.microsoft.com/office/drawing/2014/main" id="{1F1DAB66-E7A9-AB9B-E6A9-5D20470C24A9}"/>
+              </a:ext>
+            </a:extLst>
+          </p:cNvPr>
+          <p:cNvSpPr/>
+          <p:nvPr/>
+        </p:nvSpPr>
+        <p:spPr>
+          <a:xfrm>
+            <a:off x="508295" y="3717476"/>
             <a:ext cx="1828800" cy="457200"/>
           </a:xfrm>
           <a:prstGeom prst="roundRect">
@@ -4271,7 +4578,7 @@
             <a:pPr algn="ctr"/>
             <a:r>
               <a:rPr lang="en-US" sz="1200" b="1" dirty="0" err="1"/>
-              <a:t>wrangle_SU-SI_DuplicatesNewData.R</a:t>
+              <a:t>distance_calculations_mpa.R</a:t>
             </a:r>
             <a:endParaRPr lang="en-US" sz="1200" b="1" dirty="0"/>
           </a:p>
@@ -4279,10 +4586,10 @@
       </p:sp>
       <p:sp>
         <p:nvSpPr>
-          <p:cNvPr id="15" name="Rectangle: Rounded Corners 14">
-            <a:extLst>
-              <a:ext uri="{FF2B5EF4-FFF2-40B4-BE49-F238E27FC236}">
-                <a16:creationId xmlns:a16="http://schemas.microsoft.com/office/drawing/2014/main" id="{D4E87A1D-6DA3-D7B4-187C-F8D08F6EF6F6}"/>
+          <p:cNvPr id="28" name="Rectangle: Rounded Corners 27">
+            <a:extLst>
+              <a:ext uri="{FF2B5EF4-FFF2-40B4-BE49-F238E27FC236}">
+                <a16:creationId xmlns:a16="http://schemas.microsoft.com/office/drawing/2014/main" id="{408B98AC-561F-2907-FCED-CE1B7D243B06}"/>
               </a:ext>
             </a:extLst>
           </p:cNvPr>
@@ -4291,8 +4598,8 @@
         </p:nvSpPr>
         <p:spPr>
           <a:xfrm>
-            <a:off x="3251200" y="6099902"/>
-            <a:ext cx="1892300" cy="457200"/>
+            <a:off x="3282950" y="1490518"/>
+            <a:ext cx="1828800" cy="457200"/>
           </a:xfrm>
           <a:prstGeom prst="roundRect">
             <a:avLst/>
@@ -4320,19 +4627,19 @@
           <a:p>
             <a:pPr algn="ctr"/>
             <a:r>
-              <a:rPr lang="en-US" sz="1200" dirty="0" err="1"/>
-              <a:t>distance_calculations_mpa.R</a:t>
-            </a:r>
-            <a:endParaRPr lang="en-US" sz="1200" dirty="0"/>
-          </a:p>
-        </p:txBody>
-      </p:sp>
-      <p:sp>
-        <p:nvSpPr>
-          <p:cNvPr id="16" name="Rectangle: Rounded Corners 15">
-            <a:extLst>
-              <a:ext uri="{FF2B5EF4-FFF2-40B4-BE49-F238E27FC236}">
-                <a16:creationId xmlns:a16="http://schemas.microsoft.com/office/drawing/2014/main" id="{E23CA4BF-9220-9927-503F-1EFB97CD8D06}"/>
+              <a:rPr lang="en-US" sz="1200" b="1" dirty="0" err="1"/>
+              <a:t>wrangle_cas_si_su_data.R</a:t>
+            </a:r>
+            <a:endParaRPr lang="en-US" sz="1200" b="1" dirty="0"/>
+          </a:p>
+        </p:txBody>
+      </p:sp>
+      <p:sp>
+        <p:nvSpPr>
+          <p:cNvPr id="10" name="Rectangle: Rounded Corners 9">
+            <a:extLst>
+              <a:ext uri="{FF2B5EF4-FFF2-40B4-BE49-F238E27FC236}">
+                <a16:creationId xmlns:a16="http://schemas.microsoft.com/office/drawing/2014/main" id="{2A9E53F8-3608-5074-3AB8-19247D41AA9C}"/>
               </a:ext>
             </a:extLst>
           </p:cNvPr>
@@ -4341,7 +4648,7 @@
         </p:nvSpPr>
         <p:spPr>
           <a:xfrm>
-            <a:off x="3282950" y="7632707"/>
+            <a:off x="508295" y="4283912"/>
             <a:ext cx="1828800" cy="457200"/>
           </a:xfrm>
           <a:prstGeom prst="roundRect">
@@ -4370,19 +4677,412 @@
           <a:p>
             <a:pPr algn="ctr"/>
             <a:r>
-              <a:rPr lang="en-US" sz="1200" dirty="0" err="1"/>
+              <a:rPr lang="en-US" sz="1200" b="1" dirty="0" err="1"/>
               <a:t>visualize_pca_mpa_influence.R</a:t>
             </a:r>
+            <a:endParaRPr lang="en-US" sz="1200" b="1" dirty="0"/>
+          </a:p>
+        </p:txBody>
+      </p:sp>
+      <p:sp>
+        <p:nvSpPr>
+          <p:cNvPr id="15" name="Rectangle: Rounded Corners 14">
+            <a:extLst>
+              <a:ext uri="{FF2B5EF4-FFF2-40B4-BE49-F238E27FC236}">
+                <a16:creationId xmlns:a16="http://schemas.microsoft.com/office/drawing/2014/main" id="{0C895A39-46FD-2CD0-D85A-92C2C20945B1}"/>
+              </a:ext>
+            </a:extLst>
+          </p:cNvPr>
+          <p:cNvSpPr/>
+          <p:nvPr/>
+        </p:nvSpPr>
+        <p:spPr>
+          <a:xfrm>
+            <a:off x="508295" y="3168438"/>
+            <a:ext cx="1828800" cy="457200"/>
+          </a:xfrm>
+          <a:prstGeom prst="roundRect">
+            <a:avLst/>
+          </a:prstGeom>
+        </p:spPr>
+        <p:style>
+          <a:lnRef idx="2">
+            <a:schemeClr val="accent1">
+              <a:shade val="50000"/>
+            </a:schemeClr>
+          </a:lnRef>
+          <a:fillRef idx="1">
+            <a:schemeClr val="accent1"/>
+          </a:fillRef>
+          <a:effectRef idx="0">
+            <a:schemeClr val="accent1"/>
+          </a:effectRef>
+          <a:fontRef idx="minor">
+            <a:schemeClr val="lt1"/>
+          </a:fontRef>
+        </p:style>
+        <p:txBody>
+          <a:bodyPr rtlCol="0" anchor="ctr"/>
+          <a:lstStyle/>
+          <a:p>
+            <a:pPr algn="ctr"/>
+            <a:r>
+              <a:rPr lang="en-US" sz="1200" b="1" dirty="0" err="1"/>
+              <a:t>wrangle_arcgis.R</a:t>
+            </a:r>
+            <a:endParaRPr lang="en-US" sz="1200" b="1" dirty="0"/>
+          </a:p>
+        </p:txBody>
+      </p:sp>
+      <p:sp>
+        <p:nvSpPr>
+          <p:cNvPr id="7" name="Rectangle: Rounded Corners 6">
+            <a:extLst>
+              <a:ext uri="{FF2B5EF4-FFF2-40B4-BE49-F238E27FC236}">
+                <a16:creationId xmlns:a16="http://schemas.microsoft.com/office/drawing/2014/main" id="{80FB65A8-DB72-0483-79A7-64A1794E6065}"/>
+              </a:ext>
+            </a:extLst>
+          </p:cNvPr>
+          <p:cNvSpPr/>
+          <p:nvPr/>
+        </p:nvSpPr>
+        <p:spPr>
+          <a:xfrm>
+            <a:off x="5152196" y="2144290"/>
+            <a:ext cx="2603500" cy="228600"/>
+          </a:xfrm>
+          <a:prstGeom prst="roundRect">
+            <a:avLst/>
+          </a:prstGeom>
+        </p:spPr>
+        <p:style>
+          <a:lnRef idx="2">
+            <a:schemeClr val="accent6">
+              <a:shade val="50000"/>
+            </a:schemeClr>
+          </a:lnRef>
+          <a:fillRef idx="1">
+            <a:schemeClr val="accent6"/>
+          </a:fillRef>
+          <a:effectRef idx="0">
+            <a:schemeClr val="accent6"/>
+          </a:effectRef>
+          <a:fontRef idx="minor">
+            <a:schemeClr val="lt1"/>
+          </a:fontRef>
+        </p:style>
+        <p:txBody>
+          <a:bodyPr rtlCol="0" anchor="ctr"/>
+          <a:lstStyle/>
+          <a:p>
+            <a:pPr algn="ctr"/>
+            <a:r>
+              <a:rPr lang="it-IT" sz="1200" dirty="0"/>
+              <a:t>data_cas_si_su</a:t>
+            </a:r>
             <a:endParaRPr lang="en-US" sz="1200" dirty="0"/>
           </a:p>
         </p:txBody>
       </p:sp>
       <p:sp>
         <p:nvSpPr>
+          <p:cNvPr id="8" name="Rectangle: Rounded Corners 7">
+            <a:extLst>
+              <a:ext uri="{FF2B5EF4-FFF2-40B4-BE49-F238E27FC236}">
+                <a16:creationId xmlns:a16="http://schemas.microsoft.com/office/drawing/2014/main" id="{425F6FAD-05C9-436C-37DC-F67D7C03CDAA}"/>
+              </a:ext>
+            </a:extLst>
+          </p:cNvPr>
+          <p:cNvSpPr/>
+          <p:nvPr/>
+        </p:nvSpPr>
+        <p:spPr>
+          <a:xfrm>
+            <a:off x="5152196" y="1833418"/>
+            <a:ext cx="2603500" cy="228600"/>
+          </a:xfrm>
+          <a:prstGeom prst="roundRect">
+            <a:avLst/>
+          </a:prstGeom>
+        </p:spPr>
+        <p:style>
+          <a:lnRef idx="2">
+            <a:schemeClr val="accent6">
+              <a:shade val="50000"/>
+            </a:schemeClr>
+          </a:lnRef>
+          <a:fillRef idx="1">
+            <a:schemeClr val="accent6"/>
+          </a:fillRef>
+          <a:effectRef idx="0">
+            <a:schemeClr val="accent6"/>
+          </a:effectRef>
+          <a:fontRef idx="minor">
+            <a:schemeClr val="lt1"/>
+          </a:fontRef>
+        </p:style>
+        <p:txBody>
+          <a:bodyPr rtlCol="0" anchor="ctr"/>
+          <a:lstStyle/>
+          <a:p>
+            <a:pPr algn="ctr"/>
+            <a:r>
+              <a:rPr lang="it-IT" sz="1200" dirty="0"/>
+              <a:t>data_cas_si_su_mpa</a:t>
+            </a:r>
+            <a:endParaRPr lang="en-US" sz="1200" dirty="0"/>
+          </a:p>
+        </p:txBody>
+      </p:sp>
+    </p:spTree>
+    <p:extLst>
+      <p:ext uri="{BB962C8B-B14F-4D97-AF65-F5344CB8AC3E}">
+        <p14:creationId xmlns:p14="http://schemas.microsoft.com/office/powerpoint/2010/main" val="3999765948"/>
+      </p:ext>
+    </p:extLst>
+  </p:cSld>
+  <p:clrMapOvr>
+    <a:masterClrMapping/>
+  </p:clrMapOvr>
+</p:sld>
+</file>
+
+<file path=ppt/slides/slide4.xml><?xml version="1.0" encoding="utf-8"?>
+<p:sld xmlns:a="http://schemas.openxmlformats.org/drawingml/2006/main" xmlns:r="http://schemas.openxmlformats.org/officeDocument/2006/relationships" xmlns:p="http://schemas.openxmlformats.org/presentationml/2006/main">
+  <p:cSld>
+    <p:spTree>
+      <p:nvGrpSpPr>
+        <p:cNvPr id="1" name="">
+          <a:extLst>
+            <a:ext uri="{FF2B5EF4-FFF2-40B4-BE49-F238E27FC236}">
+              <a16:creationId xmlns:a16="http://schemas.microsoft.com/office/drawing/2014/main" id="{EBBF8D6E-F2F1-648D-AA4E-D8A5FCCB0521}"/>
+            </a:ext>
+          </a:extLst>
+        </p:cNvPr>
+        <p:cNvGrpSpPr/>
+        <p:nvPr/>
+      </p:nvGrpSpPr>
+      <p:grpSpPr>
+        <a:xfrm>
+          <a:off x="0" y="0"/>
+          <a:ext cx="0" cy="0"/>
+          <a:chOff x="0" y="0"/>
+          <a:chExt cx="0" cy="0"/>
+        </a:xfrm>
+      </p:grpSpPr>
+      <p:sp>
+        <p:nvSpPr>
+          <p:cNvPr id="11" name="Rectangle: Rounded Corners 10">
+            <a:extLst>
+              <a:ext uri="{FF2B5EF4-FFF2-40B4-BE49-F238E27FC236}">
+                <a16:creationId xmlns:a16="http://schemas.microsoft.com/office/drawing/2014/main" id="{799585DF-8D33-B333-5171-3DEF270CE76F}"/>
+              </a:ext>
+            </a:extLst>
+          </p:cNvPr>
+          <p:cNvSpPr/>
+          <p:nvPr/>
+        </p:nvSpPr>
+        <p:spPr>
+          <a:xfrm>
+            <a:off x="3282950" y="4567097"/>
+            <a:ext cx="1828800" cy="457200"/>
+          </a:xfrm>
+          <a:prstGeom prst="roundRect">
+            <a:avLst/>
+          </a:prstGeom>
+        </p:spPr>
+        <p:style>
+          <a:lnRef idx="2">
+            <a:schemeClr val="accent1">
+              <a:shade val="50000"/>
+            </a:schemeClr>
+          </a:lnRef>
+          <a:fillRef idx="1">
+            <a:schemeClr val="accent1"/>
+          </a:fillRef>
+          <a:effectRef idx="0">
+            <a:schemeClr val="accent1"/>
+          </a:effectRef>
+          <a:fontRef idx="minor">
+            <a:schemeClr val="lt1"/>
+          </a:fontRef>
+        </p:style>
+        <p:txBody>
+          <a:bodyPr rtlCol="0" anchor="ctr"/>
+          <a:lstStyle/>
+          <a:p>
+            <a:pPr algn="ctr"/>
+            <a:r>
+              <a:rPr lang="en-US" sz="1200" b="1" dirty="0" err="1"/>
+              <a:t>wrangle_cas_data.R</a:t>
+            </a:r>
+            <a:endParaRPr lang="en-US" sz="1200" b="1" dirty="0"/>
+          </a:p>
+        </p:txBody>
+      </p:sp>
+      <p:sp>
+        <p:nvSpPr>
+          <p:cNvPr id="12" name="Rectangle: Rounded Corners 11">
+            <a:extLst>
+              <a:ext uri="{FF2B5EF4-FFF2-40B4-BE49-F238E27FC236}">
+                <a16:creationId xmlns:a16="http://schemas.microsoft.com/office/drawing/2014/main" id="{CA48A12E-6F52-8CE5-47D4-5F9941BF77F6}"/>
+              </a:ext>
+            </a:extLst>
+          </p:cNvPr>
+          <p:cNvSpPr/>
+          <p:nvPr/>
+        </p:nvSpPr>
+        <p:spPr>
+          <a:xfrm>
+            <a:off x="3282950" y="1501487"/>
+            <a:ext cx="1828800" cy="457200"/>
+          </a:xfrm>
+          <a:prstGeom prst="roundRect">
+            <a:avLst/>
+          </a:prstGeom>
+        </p:spPr>
+        <p:style>
+          <a:lnRef idx="2">
+            <a:schemeClr val="accent1">
+              <a:shade val="50000"/>
+            </a:schemeClr>
+          </a:lnRef>
+          <a:fillRef idx="1">
+            <a:schemeClr val="accent1"/>
+          </a:fillRef>
+          <a:effectRef idx="0">
+            <a:schemeClr val="accent1"/>
+          </a:effectRef>
+          <a:fontRef idx="minor">
+            <a:schemeClr val="lt1"/>
+          </a:fontRef>
+        </p:style>
+        <p:txBody>
+          <a:bodyPr rtlCol="0" anchor="ctr"/>
+          <a:lstStyle/>
+          <a:p>
+            <a:pPr algn="ctr"/>
+            <a:r>
+              <a:rPr lang="en-US" sz="1200" b="1" dirty="0" err="1"/>
+              <a:t>wrangleStationData_SI.R</a:t>
+            </a:r>
+            <a:endParaRPr lang="en-US" sz="1200" b="1" dirty="0"/>
+          </a:p>
+        </p:txBody>
+      </p:sp>
+      <p:sp>
+        <p:nvSpPr>
+          <p:cNvPr id="13" name="Rectangle: Rounded Corners 12">
+            <a:extLst>
+              <a:ext uri="{FF2B5EF4-FFF2-40B4-BE49-F238E27FC236}">
+                <a16:creationId xmlns:a16="http://schemas.microsoft.com/office/drawing/2014/main" id="{1B8C130E-8B97-5C60-272D-56C0C0E672AF}"/>
+              </a:ext>
+            </a:extLst>
+          </p:cNvPr>
+          <p:cNvSpPr/>
+          <p:nvPr/>
+        </p:nvSpPr>
+        <p:spPr>
+          <a:xfrm>
+            <a:off x="1104900" y="7467"/>
+            <a:ext cx="5372100" cy="1059333"/>
+          </a:xfrm>
+          <a:prstGeom prst="roundRect">
+            <a:avLst/>
+          </a:prstGeom>
+        </p:spPr>
+        <p:style>
+          <a:lnRef idx="2">
+            <a:schemeClr val="accent1">
+              <a:shade val="50000"/>
+            </a:schemeClr>
+          </a:lnRef>
+          <a:fillRef idx="1">
+            <a:schemeClr val="accent1"/>
+          </a:fillRef>
+          <a:effectRef idx="0">
+            <a:schemeClr val="accent1"/>
+          </a:effectRef>
+          <a:fontRef idx="minor">
+            <a:schemeClr val="lt1"/>
+          </a:fontRef>
+        </p:style>
+        <p:txBody>
+          <a:bodyPr rtlCol="0" anchor="ctr"/>
+          <a:lstStyle/>
+          <a:p>
+            <a:pPr algn="ctr"/>
+            <a:r>
+              <a:rPr lang="en-US" sz="3200" b="1" dirty="0" err="1"/>
+              <a:t>wrangle_cas_si_su_data.R</a:t>
+            </a:r>
+            <a:endParaRPr lang="en-US" sz="3200" b="1" dirty="0"/>
+          </a:p>
+          <a:p>
+            <a:pPr algn="ctr"/>
+            <a:r>
+              <a:rPr lang="en-US" sz="3200" b="1" dirty="0"/>
+              <a:t>dependencies</a:t>
+            </a:r>
+          </a:p>
+        </p:txBody>
+      </p:sp>
+      <p:sp>
+        <p:nvSpPr>
+          <p:cNvPr id="14" name="Rectangle: Rounded Corners 13">
+            <a:extLst>
+              <a:ext uri="{FF2B5EF4-FFF2-40B4-BE49-F238E27FC236}">
+                <a16:creationId xmlns:a16="http://schemas.microsoft.com/office/drawing/2014/main" id="{9A0DC861-DBBA-97CB-7473-2AEC62CE1AB6}"/>
+              </a:ext>
+            </a:extLst>
+          </p:cNvPr>
+          <p:cNvSpPr/>
+          <p:nvPr/>
+        </p:nvSpPr>
+        <p:spPr>
+          <a:xfrm>
+            <a:off x="3282950" y="3034292"/>
+            <a:ext cx="1828800" cy="457200"/>
+          </a:xfrm>
+          <a:prstGeom prst="roundRect">
+            <a:avLst/>
+          </a:prstGeom>
+        </p:spPr>
+        <p:style>
+          <a:lnRef idx="2">
+            <a:schemeClr val="accent1">
+              <a:shade val="50000"/>
+            </a:schemeClr>
+          </a:lnRef>
+          <a:fillRef idx="1">
+            <a:schemeClr val="accent1"/>
+          </a:fillRef>
+          <a:effectRef idx="0">
+            <a:schemeClr val="accent1"/>
+          </a:effectRef>
+          <a:fontRef idx="minor">
+            <a:schemeClr val="lt1"/>
+          </a:fontRef>
+        </p:style>
+        <p:txBody>
+          <a:bodyPr rtlCol="0" anchor="ctr"/>
+          <a:lstStyle/>
+          <a:p>
+            <a:pPr algn="ctr"/>
+            <a:r>
+              <a:rPr lang="en-US" sz="1200" b="1" dirty="0" err="1"/>
+              <a:t>wrangle_SU-SI_DuplicatesNewData.R</a:t>
+            </a:r>
+            <a:endParaRPr lang="en-US" sz="1200" b="1" dirty="0"/>
+          </a:p>
+        </p:txBody>
+      </p:sp>
+      <p:sp>
+        <p:nvSpPr>
           <p:cNvPr id="18" name="Rectangle: Rounded Corners 17">
             <a:extLst>
               <a:ext uri="{FF2B5EF4-FFF2-40B4-BE49-F238E27FC236}">
-                <a16:creationId xmlns:a16="http://schemas.microsoft.com/office/drawing/2014/main" id="{FABC03AE-12A2-2BAC-2B49-3A95CC3CC8F5}"/>
+                <a16:creationId xmlns:a16="http://schemas.microsoft.com/office/drawing/2014/main" id="{CD33B98F-B736-8309-24E0-BCA9D8E460C5}"/>
               </a:ext>
             </a:extLst>
           </p:cNvPr>
@@ -4439,7 +5139,7 @@
           <p:cNvPr id="19" name="Rectangle: Rounded Corners 18">
             <a:extLst>
               <a:ext uri="{FF2B5EF4-FFF2-40B4-BE49-F238E27FC236}">
-                <a16:creationId xmlns:a16="http://schemas.microsoft.com/office/drawing/2014/main" id="{229E2602-BAB5-0F62-0CAC-E3B6D6634A0A}"/>
+                <a16:creationId xmlns:a16="http://schemas.microsoft.com/office/drawing/2014/main" id="{D2BF9A00-2FA0-0835-D121-62519312C344}"/>
               </a:ext>
             </a:extLst>
           </p:cNvPr>
@@ -4488,7 +5188,7 @@
           <p:cNvPr id="20" name="Rectangle: Rounded Corners 19">
             <a:extLst>
               <a:ext uri="{FF2B5EF4-FFF2-40B4-BE49-F238E27FC236}">
-                <a16:creationId xmlns:a16="http://schemas.microsoft.com/office/drawing/2014/main" id="{8DA460A6-1004-E5DA-AD23-3EB36320975D}"/>
+                <a16:creationId xmlns:a16="http://schemas.microsoft.com/office/drawing/2014/main" id="{90CEE2A5-69DA-63D0-5E09-1A9598C5D78B}"/>
               </a:ext>
             </a:extLst>
           </p:cNvPr>
@@ -4537,7 +5237,7 @@
           <p:cNvPr id="21" name="Rectangle: Rounded Corners 20">
             <a:extLst>
               <a:ext uri="{FF2B5EF4-FFF2-40B4-BE49-F238E27FC236}">
-                <a16:creationId xmlns:a16="http://schemas.microsoft.com/office/drawing/2014/main" id="{ECE076C8-C808-017A-8E5D-95DB44CAF9FD}"/>
+                <a16:creationId xmlns:a16="http://schemas.microsoft.com/office/drawing/2014/main" id="{31CF4F84-3206-02E8-5E2D-C806B8A93DD9}"/>
               </a:ext>
             </a:extLst>
           </p:cNvPr>
@@ -4586,7 +5286,7 @@
           <p:cNvPr id="2" name="TextBox 1">
             <a:extLst>
               <a:ext uri="{FF2B5EF4-FFF2-40B4-BE49-F238E27FC236}">
-                <a16:creationId xmlns:a16="http://schemas.microsoft.com/office/drawing/2014/main" id="{65889B7A-55FF-80CA-8147-3FEEBCBBD354}"/>
+                <a16:creationId xmlns:a16="http://schemas.microsoft.com/office/drawing/2014/main" id="{BEBC957D-73AE-B4FD-48CB-B14F25FAF410}"/>
               </a:ext>
             </a:extLst>
           </p:cNvPr>
@@ -4621,7 +5321,7 @@
           <p:cNvPr id="3" name="Rectangle: Rounded Corners 2">
             <a:extLst>
               <a:ext uri="{FF2B5EF4-FFF2-40B4-BE49-F238E27FC236}">
-                <a16:creationId xmlns:a16="http://schemas.microsoft.com/office/drawing/2014/main" id="{25890449-4B5F-9803-75FD-1FD83763495C}"/>
+                <a16:creationId xmlns:a16="http://schemas.microsoft.com/office/drawing/2014/main" id="{266F73FD-A774-EF07-2C19-478B69BC94AD}"/>
               </a:ext>
             </a:extLst>
           </p:cNvPr>
@@ -4659,10 +5359,10 @@
           <a:p>
             <a:pPr algn="ctr"/>
             <a:r>
-              <a:rPr lang="en-US" sz="1200" dirty="0" err="1"/>
-              <a:t>data_cas_si_su</a:t>
-            </a:r>
-            <a:endParaRPr lang="en-US" sz="1200" dirty="0"/>
+              <a:rPr lang="en-US" sz="1200" b="1" dirty="0" err="1"/>
+              <a:t>data_si_station_gis</a:t>
+            </a:r>
+            <a:endParaRPr lang="en-US" sz="1200" b="1" dirty="0"/>
           </a:p>
         </p:txBody>
       </p:sp>
@@ -4671,7 +5371,7 @@
           <p:cNvPr id="4" name="TextBox 3">
             <a:extLst>
               <a:ext uri="{FF2B5EF4-FFF2-40B4-BE49-F238E27FC236}">
-                <a16:creationId xmlns:a16="http://schemas.microsoft.com/office/drawing/2014/main" id="{0109E3E0-7269-924F-A5B5-C68C5B80EBE6}"/>
+                <a16:creationId xmlns:a16="http://schemas.microsoft.com/office/drawing/2014/main" id="{543D7017-B167-AEC9-8DAF-C8DE5BDB4647}"/>
               </a:ext>
             </a:extLst>
           </p:cNvPr>
@@ -4706,7 +5406,7 @@
           <p:cNvPr id="5" name="TextBox 4">
             <a:extLst>
               <a:ext uri="{FF2B5EF4-FFF2-40B4-BE49-F238E27FC236}">
-                <a16:creationId xmlns:a16="http://schemas.microsoft.com/office/drawing/2014/main" id="{3C7693B8-B001-51BA-D2C7-85B261581FC5}"/>
+                <a16:creationId xmlns:a16="http://schemas.microsoft.com/office/drawing/2014/main" id="{DF581BFA-785E-F062-818E-E9E089FA0960}"/>
               </a:ext>
             </a:extLst>
           </p:cNvPr>
@@ -4738,10 +5438,10 @@
       </p:sp>
       <p:sp>
         <p:nvSpPr>
-          <p:cNvPr id="6" name="Rectangle: Rounded Corners 5">
-            <a:extLst>
-              <a:ext uri="{FF2B5EF4-FFF2-40B4-BE49-F238E27FC236}">
-                <a16:creationId xmlns:a16="http://schemas.microsoft.com/office/drawing/2014/main" id="{1D117679-AF19-B7F6-2C3C-7F01E25307D0}"/>
+          <p:cNvPr id="22" name="Rectangle: Rounded Corners 21">
+            <a:extLst>
+              <a:ext uri="{FF2B5EF4-FFF2-40B4-BE49-F238E27FC236}">
+                <a16:creationId xmlns:a16="http://schemas.microsoft.com/office/drawing/2014/main" id="{467ADE27-45BF-DABA-DD71-4EE5F37815CB}"/>
               </a:ext>
             </a:extLst>
           </p:cNvPr>
@@ -4750,7 +5450,162 @@
         </p:nvSpPr>
         <p:spPr>
           <a:xfrm>
-            <a:off x="5152196" y="5447799"/>
+            <a:off x="16704" y="3028699"/>
+            <a:ext cx="3225800" cy="228600"/>
+          </a:xfrm>
+          <a:prstGeom prst="roundRect">
+            <a:avLst/>
+          </a:prstGeom>
+        </p:spPr>
+        <p:style>
+          <a:lnRef idx="2">
+            <a:schemeClr val="accent2">
+              <a:shade val="50000"/>
+            </a:schemeClr>
+          </a:lnRef>
+          <a:fillRef idx="1">
+            <a:schemeClr val="accent2"/>
+          </a:fillRef>
+          <a:effectRef idx="0">
+            <a:schemeClr val="accent2"/>
+          </a:effectRef>
+          <a:fontRef idx="minor">
+            <a:schemeClr val="lt1"/>
+          </a:fontRef>
+        </p:style>
+        <p:txBody>
+          <a:bodyPr rtlCol="0" anchor="ctr"/>
+          <a:lstStyle/>
+          <a:p>
+            <a:pPr algn="ctr"/>
+            <a:r>
+              <a:rPr lang="en-US" sz="1200" b="1" dirty="0"/>
+              <a:t>../data/SU-SI_Duplicates_20220808.xlsx</a:t>
+            </a:r>
+          </a:p>
+        </p:txBody>
+      </p:sp>
+      <p:sp>
+        <p:nvSpPr>
+          <p:cNvPr id="23" name="Rectangle: Rounded Corners 22">
+            <a:extLst>
+              <a:ext uri="{FF2B5EF4-FFF2-40B4-BE49-F238E27FC236}">
+                <a16:creationId xmlns:a16="http://schemas.microsoft.com/office/drawing/2014/main" id="{B0BBE925-5B89-D811-B814-BB49EEE40A82}"/>
+              </a:ext>
+            </a:extLst>
+          </p:cNvPr>
+          <p:cNvSpPr/>
+          <p:nvPr/>
+        </p:nvSpPr>
+        <p:spPr>
+          <a:xfrm>
+            <a:off x="16704" y="3377192"/>
+            <a:ext cx="3225800" cy="228600"/>
+          </a:xfrm>
+          <a:prstGeom prst="roundRect">
+            <a:avLst/>
+          </a:prstGeom>
+        </p:spPr>
+        <p:style>
+          <a:lnRef idx="2">
+            <a:schemeClr val="accent2">
+              <a:shade val="50000"/>
+            </a:schemeClr>
+          </a:lnRef>
+          <a:fillRef idx="1">
+            <a:schemeClr val="accent2"/>
+          </a:fillRef>
+          <a:effectRef idx="0">
+            <a:schemeClr val="accent2"/>
+          </a:effectRef>
+          <a:fontRef idx="minor">
+            <a:schemeClr val="lt1"/>
+          </a:fontRef>
+        </p:style>
+        <p:txBody>
+          <a:bodyPr rtlCol="0" anchor="ctr"/>
+          <a:lstStyle/>
+          <a:p>
+            <a:pPr algn="ctr"/>
+            <a:r>
+              <a:rPr lang="en-US" sz="1200" b="1" dirty="0"/>
+              <a:t>../data/All_confirmed_names.xlsx</a:t>
+            </a:r>
+          </a:p>
+        </p:txBody>
+      </p:sp>
+      <p:sp>
+        <p:nvSpPr>
+          <p:cNvPr id="24" name="Rectangle: Rounded Corners 23">
+            <a:extLst>
+              <a:ext uri="{FF2B5EF4-FFF2-40B4-BE49-F238E27FC236}">
+                <a16:creationId xmlns:a16="http://schemas.microsoft.com/office/drawing/2014/main" id="{5A489ADB-B8EB-64E0-0BCE-8A2AAB01576B}"/>
+              </a:ext>
+            </a:extLst>
+          </p:cNvPr>
+          <p:cNvSpPr/>
+          <p:nvPr/>
+        </p:nvSpPr>
+        <p:spPr>
+          <a:xfrm>
+            <a:off x="16704" y="3726574"/>
+            <a:ext cx="3225800" cy="457200"/>
+          </a:xfrm>
+          <a:prstGeom prst="roundRect">
+            <a:avLst/>
+          </a:prstGeom>
+        </p:spPr>
+        <p:style>
+          <a:lnRef idx="2">
+            <a:schemeClr val="accent2">
+              <a:shade val="50000"/>
+            </a:schemeClr>
+          </a:lnRef>
+          <a:fillRef idx="1">
+            <a:schemeClr val="accent2"/>
+          </a:fillRef>
+          <a:effectRef idx="0">
+            <a:schemeClr val="accent2"/>
+          </a:effectRef>
+          <a:fontRef idx="minor">
+            <a:schemeClr val="lt1"/>
+          </a:fontRef>
+        </p:style>
+        <p:txBody>
+          <a:bodyPr rtlCol="0" anchor="ctr"/>
+          <a:lstStyle/>
+          <a:p>
+            <a:pPr algn="ctr"/>
+            <a:r>
+              <a:rPr lang="es-ES" sz="1200" b="1" dirty="0"/>
+              <a:t>../SU/su_station_database_20221024.xlsx</a:t>
+            </a:r>
+          </a:p>
+          <a:p>
+            <a:pPr algn="ctr"/>
+            <a:r>
+              <a:rPr lang="es-ES" sz="1200" b="1" dirty="0" err="1"/>
+              <a:t>All_Stations</a:t>
+            </a:r>
+            <a:endParaRPr lang="en-US" sz="1200" b="1" dirty="0"/>
+          </a:p>
+        </p:txBody>
+      </p:sp>
+      <p:sp>
+        <p:nvSpPr>
+          <p:cNvPr id="25" name="Rectangle: Rounded Corners 24">
+            <a:extLst>
+              <a:ext uri="{FF2B5EF4-FFF2-40B4-BE49-F238E27FC236}">
+                <a16:creationId xmlns:a16="http://schemas.microsoft.com/office/drawing/2014/main" id="{F032F5E8-2680-4322-AB81-071B1AE952B6}"/>
+              </a:ext>
+            </a:extLst>
+          </p:cNvPr>
+          <p:cNvSpPr/>
+          <p:nvPr/>
+        </p:nvSpPr>
+        <p:spPr>
+          <a:xfrm>
+            <a:off x="5143500" y="3028699"/>
             <a:ext cx="2603500" cy="228600"/>
           </a:xfrm>
           <a:prstGeom prst="roundRect">
@@ -4779,19 +5634,19 @@
           <a:p>
             <a:pPr algn="ctr"/>
             <a:r>
-              <a:rPr lang="en-US" sz="1200" dirty="0" err="1"/>
-              <a:t>data_cas_si_su_mpa</a:t>
-            </a:r>
-            <a:endParaRPr lang="en-US" sz="1200" dirty="0"/>
-          </a:p>
-        </p:txBody>
-      </p:sp>
-      <p:sp>
-        <p:nvSpPr>
-          <p:cNvPr id="7" name="Rectangle: Rounded Corners 6">
-            <a:extLst>
-              <a:ext uri="{FF2B5EF4-FFF2-40B4-BE49-F238E27FC236}">
-                <a16:creationId xmlns:a16="http://schemas.microsoft.com/office/drawing/2014/main" id="{E6D3A291-0D90-BA73-2F22-A04435859284}"/>
+              <a:rPr lang="en-US" sz="1200" b="1" dirty="0" err="1"/>
+              <a:t>data_su_all</a:t>
+            </a:r>
+            <a:endParaRPr lang="en-US" sz="1200" b="1" dirty="0"/>
+          </a:p>
+        </p:txBody>
+      </p:sp>
+      <p:sp>
+        <p:nvSpPr>
+          <p:cNvPr id="8" name="Rectangle: Rounded Corners 7">
+            <a:extLst>
+              <a:ext uri="{FF2B5EF4-FFF2-40B4-BE49-F238E27FC236}">
+                <a16:creationId xmlns:a16="http://schemas.microsoft.com/office/drawing/2014/main" id="{E5EEC332-131A-E502-6A15-3152A9656CA3}"/>
               </a:ext>
             </a:extLst>
           </p:cNvPr>
@@ -4800,7 +5655,168 @@
         </p:nvSpPr>
         <p:spPr>
           <a:xfrm>
-            <a:off x="5143500" y="9394110"/>
+            <a:off x="25400" y="4561503"/>
+            <a:ext cx="3225800" cy="457200"/>
+          </a:xfrm>
+          <a:prstGeom prst="roundRect">
+            <a:avLst/>
+          </a:prstGeom>
+        </p:spPr>
+        <p:style>
+          <a:lnRef idx="2">
+            <a:schemeClr val="accent2">
+              <a:shade val="50000"/>
+            </a:schemeClr>
+          </a:lnRef>
+          <a:fillRef idx="1">
+            <a:schemeClr val="accent2"/>
+          </a:fillRef>
+          <a:effectRef idx="0">
+            <a:schemeClr val="accent2"/>
+          </a:effectRef>
+          <a:fontRef idx="minor">
+            <a:schemeClr val="lt1"/>
+          </a:fontRef>
+        </p:style>
+        <p:txBody>
+          <a:bodyPr rtlCol="0" anchor="ctr"/>
+          <a:lstStyle/>
+          <a:p>
+            <a:pPr algn="ctr"/>
+            <a:r>
+              <a:rPr lang="en-US" sz="1200" b="1" dirty="0"/>
+              <a:t>../CAS/CAS fish count by site PH 2016.xlsx</a:t>
+            </a:r>
+          </a:p>
+          <a:p>
+            <a:pPr algn="ctr"/>
+            <a:r>
+              <a:rPr lang="en-US" sz="1200" b="1" dirty="0"/>
+              <a:t>B1:AD490</a:t>
+            </a:r>
+          </a:p>
+        </p:txBody>
+      </p:sp>
+      <p:sp>
+        <p:nvSpPr>
+          <p:cNvPr id="9" name="Rectangle: Rounded Corners 8">
+            <a:extLst>
+              <a:ext uri="{FF2B5EF4-FFF2-40B4-BE49-F238E27FC236}">
+                <a16:creationId xmlns:a16="http://schemas.microsoft.com/office/drawing/2014/main" id="{99A93106-D060-C2D7-254A-F0A93A5CE322}"/>
+              </a:ext>
+            </a:extLst>
+          </p:cNvPr>
+          <p:cNvSpPr/>
+          <p:nvPr/>
+        </p:nvSpPr>
+        <p:spPr>
+          <a:xfrm>
+            <a:off x="16704" y="5208015"/>
+            <a:ext cx="3225800" cy="457199"/>
+          </a:xfrm>
+          <a:prstGeom prst="roundRect">
+            <a:avLst/>
+          </a:prstGeom>
+        </p:spPr>
+        <p:style>
+          <a:lnRef idx="2">
+            <a:schemeClr val="accent2">
+              <a:shade val="50000"/>
+            </a:schemeClr>
+          </a:lnRef>
+          <a:fillRef idx="1">
+            <a:schemeClr val="accent2"/>
+          </a:fillRef>
+          <a:effectRef idx="0">
+            <a:schemeClr val="accent2"/>
+          </a:effectRef>
+          <a:fontRef idx="minor">
+            <a:schemeClr val="lt1"/>
+          </a:fontRef>
+        </p:style>
+        <p:txBody>
+          <a:bodyPr rtlCol="0" anchor="ctr"/>
+          <a:lstStyle/>
+          <a:p>
+            <a:pPr algn="ctr"/>
+            <a:r>
+              <a:rPr lang="en-US" sz="1200" b="1" dirty="0"/>
+              <a:t>../CAS/CAS-Fishes-VIP2016-localities.xlsx</a:t>
+            </a:r>
+          </a:p>
+          <a:p>
+            <a:pPr algn="ctr"/>
+            <a:r>
+              <a:rPr lang="en-US" sz="1200" b="1" dirty="0"/>
+              <a:t>Phil_0416</a:t>
+            </a:r>
+          </a:p>
+        </p:txBody>
+      </p:sp>
+      <p:sp>
+        <p:nvSpPr>
+          <p:cNvPr id="17" name="Rectangle: Rounded Corners 16">
+            <a:extLst>
+              <a:ext uri="{FF2B5EF4-FFF2-40B4-BE49-F238E27FC236}">
+                <a16:creationId xmlns:a16="http://schemas.microsoft.com/office/drawing/2014/main" id="{449F8A2D-52B8-28E9-6C13-AF6590A99A21}"/>
+              </a:ext>
+            </a:extLst>
+          </p:cNvPr>
+          <p:cNvSpPr/>
+          <p:nvPr/>
+        </p:nvSpPr>
+        <p:spPr>
+          <a:xfrm>
+            <a:off x="25400" y="5755292"/>
+            <a:ext cx="3225800" cy="228600"/>
+          </a:xfrm>
+          <a:prstGeom prst="roundRect">
+            <a:avLst/>
+          </a:prstGeom>
+        </p:spPr>
+        <p:style>
+          <a:lnRef idx="2">
+            <a:schemeClr val="accent2">
+              <a:shade val="50000"/>
+            </a:schemeClr>
+          </a:lnRef>
+          <a:fillRef idx="1">
+            <a:schemeClr val="accent2"/>
+          </a:fillRef>
+          <a:effectRef idx="0">
+            <a:schemeClr val="accent2"/>
+          </a:effectRef>
+          <a:fontRef idx="minor">
+            <a:schemeClr val="lt1"/>
+          </a:fontRef>
+        </p:style>
+        <p:txBody>
+          <a:bodyPr rtlCol="0" anchor="ctr"/>
+          <a:lstStyle/>
+          <a:p>
+            <a:pPr algn="ctr"/>
+            <a:r>
+              <a:rPr lang="en-US" sz="1200" b="1" dirty="0"/>
+              <a:t>../data/All_confirmed_names.xlsx</a:t>
+            </a:r>
+          </a:p>
+        </p:txBody>
+      </p:sp>
+      <p:sp>
+        <p:nvSpPr>
+          <p:cNvPr id="26" name="Rectangle: Rounded Corners 25">
+            <a:extLst>
+              <a:ext uri="{FF2B5EF4-FFF2-40B4-BE49-F238E27FC236}">
+                <a16:creationId xmlns:a16="http://schemas.microsoft.com/office/drawing/2014/main" id="{AF9444D3-C85B-507F-3B60-8F5FE2DF5260}"/>
+              </a:ext>
+            </a:extLst>
+          </p:cNvPr>
+          <p:cNvSpPr/>
+          <p:nvPr/>
+        </p:nvSpPr>
+        <p:spPr>
+          <a:xfrm>
+            <a:off x="5143500" y="4575726"/>
             <a:ext cx="2603500" cy="228600"/>
           </a:xfrm>
           <a:prstGeom prst="roundRect">
@@ -4829,8 +5845,58 @@
           <a:p>
             <a:pPr algn="ctr"/>
             <a:r>
+              <a:rPr lang="en-US" sz="1200" b="1" dirty="0" err="1"/>
+              <a:t>data_cas_all</a:t>
+            </a:r>
+            <a:endParaRPr lang="en-US" sz="1200" b="1" dirty="0"/>
+          </a:p>
+        </p:txBody>
+      </p:sp>
+      <p:sp>
+        <p:nvSpPr>
+          <p:cNvPr id="32" name="Rectangle: Rounded Corners 31">
+            <a:extLst>
+              <a:ext uri="{FF2B5EF4-FFF2-40B4-BE49-F238E27FC236}">
+                <a16:creationId xmlns:a16="http://schemas.microsoft.com/office/drawing/2014/main" id="{C9DF298B-3A8E-380F-F485-880220962245}"/>
+              </a:ext>
+            </a:extLst>
+          </p:cNvPr>
+          <p:cNvSpPr/>
+          <p:nvPr/>
+        </p:nvSpPr>
+        <p:spPr>
+          <a:xfrm>
+            <a:off x="5143500" y="1770898"/>
+            <a:ext cx="2603500" cy="228600"/>
+          </a:xfrm>
+          <a:prstGeom prst="roundRect">
+            <a:avLst/>
+          </a:prstGeom>
+        </p:spPr>
+        <p:style>
+          <a:lnRef idx="2">
+            <a:schemeClr val="accent6">
+              <a:shade val="50000"/>
+            </a:schemeClr>
+          </a:lnRef>
+          <a:fillRef idx="1">
+            <a:schemeClr val="accent6"/>
+          </a:fillRef>
+          <a:effectRef idx="0">
+            <a:schemeClr val="accent6"/>
+          </a:effectRef>
+          <a:fontRef idx="minor">
+            <a:schemeClr val="lt1"/>
+          </a:fontRef>
+        </p:style>
+        <p:txBody>
+          <a:bodyPr rtlCol="0" anchor="ctr"/>
+          <a:lstStyle/>
+          <a:p>
+            <a:pPr algn="ctr"/>
+            <a:r>
               <a:rPr lang="en-US" sz="1200" dirty="0" err="1"/>
-              <a:t>data_cas_si_su_mpa_pop</a:t>
+              <a:t>data_si</a:t>
             </a:r>
             <a:endParaRPr lang="en-US" sz="1200" dirty="0"/>
           </a:p>
@@ -4838,10 +5904,10 @@
       </p:sp>
       <p:sp>
         <p:nvSpPr>
-          <p:cNvPr id="8" name="Rectangle: Rounded Corners 7">
-            <a:extLst>
-              <a:ext uri="{FF2B5EF4-FFF2-40B4-BE49-F238E27FC236}">
-                <a16:creationId xmlns:a16="http://schemas.microsoft.com/office/drawing/2014/main" id="{5F537EEE-F86B-B288-A5BC-AC3C9B1ECAEB}"/>
+          <p:cNvPr id="35" name="Rectangle: Rounded Corners 34">
+            <a:extLst>
+              <a:ext uri="{FF2B5EF4-FFF2-40B4-BE49-F238E27FC236}">
+                <a16:creationId xmlns:a16="http://schemas.microsoft.com/office/drawing/2014/main" id="{B83628C6-0BEA-9FB8-3CCA-C3785D2E3ADD}"/>
               </a:ext>
             </a:extLst>
           </p:cNvPr>
@@ -4850,7 +5916,407 @@
         </p:nvSpPr>
         <p:spPr>
           <a:xfrm>
-            <a:off x="16704" y="3028699"/>
+            <a:off x="5150926" y="2050474"/>
+            <a:ext cx="2603500" cy="228600"/>
+          </a:xfrm>
+          <a:prstGeom prst="roundRect">
+            <a:avLst/>
+          </a:prstGeom>
+        </p:spPr>
+        <p:style>
+          <a:lnRef idx="2">
+            <a:schemeClr val="accent6">
+              <a:shade val="50000"/>
+            </a:schemeClr>
+          </a:lnRef>
+          <a:fillRef idx="1">
+            <a:schemeClr val="accent6"/>
+          </a:fillRef>
+          <a:effectRef idx="0">
+            <a:schemeClr val="accent6"/>
+          </a:effectRef>
+          <a:fontRef idx="minor">
+            <a:schemeClr val="lt1"/>
+          </a:fontRef>
+        </p:style>
+        <p:txBody>
+          <a:bodyPr rtlCol="0" anchor="ctr"/>
+          <a:lstStyle/>
+          <a:p>
+            <a:pPr algn="ctr"/>
+            <a:r>
+              <a:rPr lang="en-US" sz="1200" dirty="0" err="1"/>
+              <a:t>data_si_station</a:t>
+            </a:r>
+            <a:endParaRPr lang="en-US" sz="1200" dirty="0"/>
+          </a:p>
+        </p:txBody>
+      </p:sp>
+      <p:sp>
+        <p:nvSpPr>
+          <p:cNvPr id="36" name="Rectangle: Rounded Corners 35">
+            <a:extLst>
+              <a:ext uri="{FF2B5EF4-FFF2-40B4-BE49-F238E27FC236}">
+                <a16:creationId xmlns:a16="http://schemas.microsoft.com/office/drawing/2014/main" id="{7872E054-2F7F-EAA2-BC41-AEE5C8225C2E}"/>
+              </a:ext>
+            </a:extLst>
+          </p:cNvPr>
+          <p:cNvSpPr/>
+          <p:nvPr/>
+        </p:nvSpPr>
+        <p:spPr>
+          <a:xfrm>
+            <a:off x="5143500" y="2332575"/>
+            <a:ext cx="2603500" cy="228600"/>
+          </a:xfrm>
+          <a:prstGeom prst="roundRect">
+            <a:avLst/>
+          </a:prstGeom>
+        </p:spPr>
+        <p:style>
+          <a:lnRef idx="2">
+            <a:schemeClr val="accent6">
+              <a:shade val="50000"/>
+            </a:schemeClr>
+          </a:lnRef>
+          <a:fillRef idx="1">
+            <a:schemeClr val="accent6"/>
+          </a:fillRef>
+          <a:effectRef idx="0">
+            <a:schemeClr val="accent6"/>
+          </a:effectRef>
+          <a:fontRef idx="minor">
+            <a:schemeClr val="lt1"/>
+          </a:fontRef>
+        </p:style>
+        <p:txBody>
+          <a:bodyPr rtlCol="0" anchor="ctr"/>
+          <a:lstStyle/>
+          <a:p>
+            <a:pPr algn="ctr"/>
+            <a:r>
+              <a:rPr lang="en-US" sz="1200" dirty="0" err="1"/>
+              <a:t>data_gis</a:t>
+            </a:r>
+            <a:endParaRPr lang="en-US" sz="1200" dirty="0"/>
+          </a:p>
+        </p:txBody>
+      </p:sp>
+      <p:sp>
+        <p:nvSpPr>
+          <p:cNvPr id="37" name="Rectangle: Rounded Corners 36">
+            <a:extLst>
+              <a:ext uri="{FF2B5EF4-FFF2-40B4-BE49-F238E27FC236}">
+                <a16:creationId xmlns:a16="http://schemas.microsoft.com/office/drawing/2014/main" id="{4AB77A96-8A46-8110-1116-AA69CA624B1F}"/>
+              </a:ext>
+            </a:extLst>
+          </p:cNvPr>
+          <p:cNvSpPr/>
+          <p:nvPr/>
+        </p:nvSpPr>
+        <p:spPr>
+          <a:xfrm>
+            <a:off x="5150926" y="3610523"/>
+            <a:ext cx="2603500" cy="228600"/>
+          </a:xfrm>
+          <a:prstGeom prst="roundRect">
+            <a:avLst/>
+          </a:prstGeom>
+        </p:spPr>
+        <p:style>
+          <a:lnRef idx="2">
+            <a:schemeClr val="accent6">
+              <a:shade val="50000"/>
+            </a:schemeClr>
+          </a:lnRef>
+          <a:fillRef idx="1">
+            <a:schemeClr val="accent6"/>
+          </a:fillRef>
+          <a:effectRef idx="0">
+            <a:schemeClr val="accent6"/>
+          </a:effectRef>
+          <a:fontRef idx="minor">
+            <a:schemeClr val="lt1"/>
+          </a:fontRef>
+        </p:style>
+        <p:txBody>
+          <a:bodyPr rtlCol="0" anchor="ctr"/>
+          <a:lstStyle/>
+          <a:p>
+            <a:pPr algn="ctr"/>
+            <a:r>
+              <a:rPr lang="en-US" sz="1200" dirty="0" err="1"/>
+              <a:t>data_su_metadata</a:t>
+            </a:r>
+            <a:endParaRPr lang="en-US" sz="1200" dirty="0"/>
+          </a:p>
+        </p:txBody>
+      </p:sp>
+      <p:sp>
+        <p:nvSpPr>
+          <p:cNvPr id="38" name="Rectangle: Rounded Corners 37">
+            <a:extLst>
+              <a:ext uri="{FF2B5EF4-FFF2-40B4-BE49-F238E27FC236}">
+                <a16:creationId xmlns:a16="http://schemas.microsoft.com/office/drawing/2014/main" id="{B04AB0CE-B434-872B-D78F-9D47D3A1E5B7}"/>
+              </a:ext>
+            </a:extLst>
+          </p:cNvPr>
+          <p:cNvSpPr/>
+          <p:nvPr/>
+        </p:nvSpPr>
+        <p:spPr>
+          <a:xfrm>
+            <a:off x="5143500" y="3328422"/>
+            <a:ext cx="2603500" cy="228600"/>
+          </a:xfrm>
+          <a:prstGeom prst="roundRect">
+            <a:avLst/>
+          </a:prstGeom>
+        </p:spPr>
+        <p:style>
+          <a:lnRef idx="2">
+            <a:schemeClr val="accent6">
+              <a:shade val="50000"/>
+            </a:schemeClr>
+          </a:lnRef>
+          <a:fillRef idx="1">
+            <a:schemeClr val="accent6"/>
+          </a:fillRef>
+          <a:effectRef idx="0">
+            <a:schemeClr val="accent6"/>
+          </a:effectRef>
+          <a:fontRef idx="minor">
+            <a:schemeClr val="lt1"/>
+          </a:fontRef>
+        </p:style>
+        <p:txBody>
+          <a:bodyPr rtlCol="0" anchor="ctr"/>
+          <a:lstStyle/>
+          <a:p>
+            <a:pPr algn="ctr"/>
+            <a:r>
+              <a:rPr lang="en-US" sz="1200" dirty="0" err="1"/>
+              <a:t>data_su</a:t>
+            </a:r>
+            <a:endParaRPr lang="en-US" sz="1200" dirty="0"/>
+          </a:p>
+        </p:txBody>
+      </p:sp>
+      <p:sp>
+        <p:nvSpPr>
+          <p:cNvPr id="39" name="Rectangle: Rounded Corners 38">
+            <a:extLst>
+              <a:ext uri="{FF2B5EF4-FFF2-40B4-BE49-F238E27FC236}">
+                <a16:creationId xmlns:a16="http://schemas.microsoft.com/office/drawing/2014/main" id="{81C84B98-43FF-0967-4B63-130BEC957A7D}"/>
+              </a:ext>
+            </a:extLst>
+          </p:cNvPr>
+          <p:cNvSpPr/>
+          <p:nvPr/>
+        </p:nvSpPr>
+        <p:spPr>
+          <a:xfrm>
+            <a:off x="5143500" y="4888471"/>
+            <a:ext cx="2603500" cy="228600"/>
+          </a:xfrm>
+          <a:prstGeom prst="roundRect">
+            <a:avLst/>
+          </a:prstGeom>
+        </p:spPr>
+        <p:style>
+          <a:lnRef idx="2">
+            <a:schemeClr val="accent6">
+              <a:shade val="50000"/>
+            </a:schemeClr>
+          </a:lnRef>
+          <a:fillRef idx="1">
+            <a:schemeClr val="accent6"/>
+          </a:fillRef>
+          <a:effectRef idx="0">
+            <a:schemeClr val="accent6"/>
+          </a:effectRef>
+          <a:fontRef idx="minor">
+            <a:schemeClr val="lt1"/>
+          </a:fontRef>
+        </p:style>
+        <p:txBody>
+          <a:bodyPr rtlCol="0" anchor="ctr"/>
+          <a:lstStyle/>
+          <a:p>
+            <a:pPr algn="ctr"/>
+            <a:r>
+              <a:rPr lang="en-US" sz="1200" dirty="0" err="1"/>
+              <a:t>data_cas</a:t>
+            </a:r>
+            <a:endParaRPr lang="en-US" sz="1200" dirty="0"/>
+          </a:p>
+        </p:txBody>
+      </p:sp>
+      <p:sp>
+        <p:nvSpPr>
+          <p:cNvPr id="40" name="Rectangle: Rounded Corners 39">
+            <a:extLst>
+              <a:ext uri="{FF2B5EF4-FFF2-40B4-BE49-F238E27FC236}">
+                <a16:creationId xmlns:a16="http://schemas.microsoft.com/office/drawing/2014/main" id="{3308F7FD-8C51-1DF2-DF93-B19F7E3A06AF}"/>
+              </a:ext>
+            </a:extLst>
+          </p:cNvPr>
+          <p:cNvSpPr/>
+          <p:nvPr/>
+        </p:nvSpPr>
+        <p:spPr>
+          <a:xfrm>
+            <a:off x="5150926" y="5166304"/>
+            <a:ext cx="2603500" cy="228600"/>
+          </a:xfrm>
+          <a:prstGeom prst="roundRect">
+            <a:avLst/>
+          </a:prstGeom>
+        </p:spPr>
+        <p:style>
+          <a:lnRef idx="2">
+            <a:schemeClr val="accent6">
+              <a:shade val="50000"/>
+            </a:schemeClr>
+          </a:lnRef>
+          <a:fillRef idx="1">
+            <a:schemeClr val="accent6"/>
+          </a:fillRef>
+          <a:effectRef idx="0">
+            <a:schemeClr val="accent6"/>
+          </a:effectRef>
+          <a:fontRef idx="minor">
+            <a:schemeClr val="lt1"/>
+          </a:fontRef>
+        </p:style>
+        <p:txBody>
+          <a:bodyPr rtlCol="0" anchor="ctr"/>
+          <a:lstStyle/>
+          <a:p>
+            <a:pPr algn="ctr"/>
+            <a:r>
+              <a:rPr lang="en-US" sz="1200" dirty="0" err="1"/>
+              <a:t>metadata_cas</a:t>
+            </a:r>
+            <a:endParaRPr lang="en-US" sz="1200" dirty="0"/>
+          </a:p>
+        </p:txBody>
+      </p:sp>
+      <p:sp>
+        <p:nvSpPr>
+          <p:cNvPr id="46" name="Rectangle: Rounded Corners 45">
+            <a:extLst>
+              <a:ext uri="{FF2B5EF4-FFF2-40B4-BE49-F238E27FC236}">
+                <a16:creationId xmlns:a16="http://schemas.microsoft.com/office/drawing/2014/main" id="{22E90542-B4E6-6B19-0073-6484FF46A9C8}"/>
+              </a:ext>
+            </a:extLst>
+          </p:cNvPr>
+          <p:cNvSpPr/>
+          <p:nvPr/>
+        </p:nvSpPr>
+        <p:spPr>
+          <a:xfrm>
+            <a:off x="3282950" y="6204148"/>
+            <a:ext cx="1828800" cy="457200"/>
+          </a:xfrm>
+          <a:prstGeom prst="roundRect">
+            <a:avLst/>
+          </a:prstGeom>
+        </p:spPr>
+        <p:style>
+          <a:lnRef idx="2">
+            <a:schemeClr val="accent1">
+              <a:shade val="50000"/>
+            </a:schemeClr>
+          </a:lnRef>
+          <a:fillRef idx="1">
+            <a:schemeClr val="accent1"/>
+          </a:fillRef>
+          <a:effectRef idx="0">
+            <a:schemeClr val="accent1"/>
+          </a:effectRef>
+          <a:fontRef idx="minor">
+            <a:schemeClr val="lt1"/>
+          </a:fontRef>
+        </p:style>
+        <p:txBody>
+          <a:bodyPr rtlCol="0" anchor="ctr"/>
+          <a:lstStyle/>
+          <a:p>
+            <a:pPr algn="ctr"/>
+            <a:r>
+              <a:rPr lang="en-US" sz="1200" b="1" dirty="0" err="1"/>
+              <a:t>wrangle_arcgis.R</a:t>
+            </a:r>
+            <a:endParaRPr lang="en-US" sz="1200" b="1" dirty="0"/>
+          </a:p>
+        </p:txBody>
+      </p:sp>
+      <p:sp>
+        <p:nvSpPr>
+          <p:cNvPr id="47" name="Rectangle: Rounded Corners 46">
+            <a:extLst>
+              <a:ext uri="{FF2B5EF4-FFF2-40B4-BE49-F238E27FC236}">
+                <a16:creationId xmlns:a16="http://schemas.microsoft.com/office/drawing/2014/main" id="{B8D01CC2-4EAF-3D36-AA2A-4ED3C226D531}"/>
+              </a:ext>
+            </a:extLst>
+          </p:cNvPr>
+          <p:cNvSpPr/>
+          <p:nvPr/>
+        </p:nvSpPr>
+        <p:spPr>
+          <a:xfrm>
+            <a:off x="723900" y="6203712"/>
+            <a:ext cx="1828800" cy="457200"/>
+          </a:xfrm>
+          <a:prstGeom prst="roundRect">
+            <a:avLst/>
+          </a:prstGeom>
+        </p:spPr>
+        <p:style>
+          <a:lnRef idx="2">
+            <a:schemeClr val="accent1">
+              <a:shade val="50000"/>
+            </a:schemeClr>
+          </a:lnRef>
+          <a:fillRef idx="1">
+            <a:schemeClr val="accent1"/>
+          </a:fillRef>
+          <a:effectRef idx="0">
+            <a:schemeClr val="accent1"/>
+          </a:effectRef>
+          <a:fontRef idx="minor">
+            <a:schemeClr val="lt1"/>
+          </a:fontRef>
+        </p:style>
+        <p:txBody>
+          <a:bodyPr rtlCol="0" anchor="ctr"/>
+          <a:lstStyle/>
+          <a:p>
+            <a:pPr algn="ctr"/>
+            <a:r>
+              <a:rPr lang="en-US" sz="1200" b="1" dirty="0" err="1"/>
+              <a:t>wrangle_cas_si_su_data.R</a:t>
+            </a:r>
+            <a:endParaRPr lang="en-US" sz="1200" b="1" dirty="0"/>
+          </a:p>
+        </p:txBody>
+      </p:sp>
+      <p:sp>
+        <p:nvSpPr>
+          <p:cNvPr id="48" name="Rectangle: Rounded Corners 47">
+            <a:extLst>
+              <a:ext uri="{FF2B5EF4-FFF2-40B4-BE49-F238E27FC236}">
+                <a16:creationId xmlns:a16="http://schemas.microsoft.com/office/drawing/2014/main" id="{8D02CFF8-C6C4-BCEA-A8F8-CE98EAD35552}"/>
+              </a:ext>
+            </a:extLst>
+          </p:cNvPr>
+          <p:cNvSpPr/>
+          <p:nvPr/>
+        </p:nvSpPr>
+        <p:spPr>
+          <a:xfrm>
+            <a:off x="25400" y="6752002"/>
             <a:ext cx="3225800" cy="228600"/>
           </a:xfrm>
           <a:prstGeom prst="roundRect">
@@ -4879,48 +6345,19 @@
           <a:p>
             <a:pPr algn="ctr"/>
             <a:r>
-              <a:rPr lang="en-US" sz="1200" b="1" dirty="0"/>
-              <a:t>../data/SU-SI_Duplicates_20220808.xlsx</a:t>
-            </a:r>
-          </a:p>
-        </p:txBody>
-      </p:sp>
-    </p:spTree>
-    <p:extLst>
-      <p:ext uri="{BB962C8B-B14F-4D97-AF65-F5344CB8AC3E}">
-        <p14:creationId xmlns:p14="http://schemas.microsoft.com/office/powerpoint/2010/main" val="2442983635"/>
-      </p:ext>
-    </p:extLst>
-  </p:cSld>
-  <p:clrMapOvr>
-    <a:masterClrMapping/>
-  </p:clrMapOvr>
-</p:sld>
-</file>
-
-<file path=ppt/slides/slide4.xml><?xml version="1.0" encoding="utf-8"?>
-<p:sld xmlns:a="http://schemas.openxmlformats.org/drawingml/2006/main" xmlns:r="http://schemas.openxmlformats.org/officeDocument/2006/relationships" xmlns:p="http://schemas.openxmlformats.org/presentationml/2006/main">
-  <p:cSld>
-    <p:spTree>
-      <p:nvGrpSpPr>
-        <p:cNvPr id="1" name=""/>
-        <p:cNvGrpSpPr/>
-        <p:nvPr/>
-      </p:nvGrpSpPr>
-      <p:grpSpPr>
-        <a:xfrm>
-          <a:off x="0" y="0"/>
-          <a:ext cx="0" cy="0"/>
-          <a:chOff x="0" y="0"/>
-          <a:chExt cx="0" cy="0"/>
-        </a:xfrm>
-      </p:grpSpPr>
-      <p:sp>
-        <p:nvSpPr>
-          <p:cNvPr id="10" name="Rectangle: Rounded Corners 9">
-            <a:extLst>
-              <a:ext uri="{FF2B5EF4-FFF2-40B4-BE49-F238E27FC236}">
-                <a16:creationId xmlns:a16="http://schemas.microsoft.com/office/drawing/2014/main" id="{D737E575-F2DD-3F22-BF17-22BAEE3E5AE5}"/>
+              <a:rPr lang="it-IT" sz="1200" b="1" dirty="0"/>
+              <a:t>../data/gis/PhL_Province_Pop/</a:t>
+            </a:r>
+            <a:endParaRPr lang="en-US" sz="1200" b="1" dirty="0"/>
+          </a:p>
+        </p:txBody>
+      </p:sp>
+      <p:sp>
+        <p:nvSpPr>
+          <p:cNvPr id="49" name="Rectangle: Rounded Corners 48">
+            <a:extLst>
+              <a:ext uri="{FF2B5EF4-FFF2-40B4-BE49-F238E27FC236}">
+                <a16:creationId xmlns:a16="http://schemas.microsoft.com/office/drawing/2014/main" id="{39A90206-86D7-0366-1587-41B95144B872}"/>
               </a:ext>
             </a:extLst>
           </p:cNvPr>
@@ -4929,12 +6366,15 @@
         </p:nvSpPr>
         <p:spPr>
           <a:xfrm>
-            <a:off x="3282950" y="9165510"/>
-            <a:ext cx="1828800" cy="457200"/>
+            <a:off x="25400" y="7060466"/>
+            <a:ext cx="7721600" cy="876365"/>
           </a:xfrm>
           <a:prstGeom prst="roundRect">
             <a:avLst/>
           </a:prstGeom>
+          <a:solidFill>
+            <a:schemeClr val="bg1"/>
+          </a:solidFill>
         </p:spPr>
         <p:style>
           <a:lnRef idx="2">
@@ -4956,21 +6396,209 @@
           <a:bodyPr rtlCol="0" anchor="ctr"/>
           <a:lstStyle/>
           <a:p>
-            <a:pPr algn="ctr"/>
-            <a:r>
-              <a:rPr lang="en-US" sz="1200" b="1" dirty="0" err="1"/>
+            <a:r>
+              <a:rPr lang="en-US" sz="1200" b="1" dirty="0" err="1">
+                <a:solidFill>
+                  <a:schemeClr val="tx1"/>
+                </a:solidFill>
+              </a:rPr>
               <a:t>wrangle_arcgis.R</a:t>
             </a:r>
-            <a:endParaRPr lang="en-US" sz="1200" b="1" dirty="0"/>
-          </a:p>
-        </p:txBody>
-      </p:sp>
-      <p:sp>
-        <p:nvSpPr>
-          <p:cNvPr id="11" name="Rectangle: Rounded Corners 10">
-            <a:extLst>
-              <a:ext uri="{FF2B5EF4-FFF2-40B4-BE49-F238E27FC236}">
-                <a16:creationId xmlns:a16="http://schemas.microsoft.com/office/drawing/2014/main" id="{111909DF-EE82-E882-21E3-803BF6C62F9A}"/>
+            <a:r>
+              <a:rPr lang="en-US" sz="1200" b="1" dirty="0">
+                <a:solidFill>
+                  <a:schemeClr val="tx1"/>
+                </a:solidFill>
+              </a:rPr>
+              <a:t> sources the script </a:t>
+            </a:r>
+            <a:r>
+              <a:rPr lang="en-US" sz="1200" b="1" dirty="0" err="1">
+                <a:solidFill>
+                  <a:schemeClr val="tx1"/>
+                </a:solidFill>
+              </a:rPr>
+              <a:t>wrangle_cas_si_su_data.R</a:t>
+            </a:r>
+            <a:r>
+              <a:rPr lang="en-US" sz="1200" b="1" dirty="0">
+                <a:solidFill>
+                  <a:schemeClr val="tx1"/>
+                </a:solidFill>
+              </a:rPr>
+              <a:t> to generate the </a:t>
+            </a:r>
+            <a:r>
+              <a:rPr lang="en-US" sz="1200" b="1" dirty="0" err="1">
+                <a:solidFill>
+                  <a:schemeClr val="tx1"/>
+                </a:solidFill>
+              </a:rPr>
+              <a:t>dataframe</a:t>
+            </a:r>
+            <a:r>
+              <a:rPr lang="en-US" sz="1200" b="1" dirty="0">
+                <a:solidFill>
+                  <a:schemeClr val="tx1"/>
+                </a:solidFill>
+              </a:rPr>
+              <a:t> </a:t>
+            </a:r>
+            <a:r>
+              <a:rPr lang="en-US" sz="1200" b="1" dirty="0" err="1">
+                <a:solidFill>
+                  <a:schemeClr val="tx1"/>
+                </a:solidFill>
+              </a:rPr>
+              <a:t>data_cas_si_su</a:t>
+            </a:r>
+            <a:r>
+              <a:rPr lang="en-US" sz="1200" b="1" dirty="0">
+                <a:solidFill>
+                  <a:schemeClr val="tx1"/>
+                </a:solidFill>
+              </a:rPr>
+              <a:t>, which is used by </a:t>
+            </a:r>
+            <a:r>
+              <a:rPr lang="en-US" sz="1200" b="1" dirty="0" err="1">
+                <a:solidFill>
+                  <a:schemeClr val="tx1"/>
+                </a:solidFill>
+              </a:rPr>
+              <a:t>wrangle_arcgis.R</a:t>
+            </a:r>
+            <a:r>
+              <a:rPr lang="en-US" sz="1200" b="1" dirty="0">
+                <a:solidFill>
+                  <a:schemeClr val="tx1"/>
+                </a:solidFill>
+              </a:rPr>
+              <a:t> to create the </a:t>
+            </a:r>
+            <a:r>
+              <a:rPr lang="en-US" sz="1200" b="1" dirty="0" err="1">
+                <a:solidFill>
+                  <a:schemeClr val="tx1"/>
+                </a:solidFill>
+              </a:rPr>
+              <a:t>dataframe</a:t>
+            </a:r>
+            <a:r>
+              <a:rPr lang="en-US" sz="1200" b="1" dirty="0">
+                <a:solidFill>
+                  <a:schemeClr val="tx1"/>
+                </a:solidFill>
+              </a:rPr>
+              <a:t> </a:t>
+            </a:r>
+            <a:r>
+              <a:rPr lang="en-US" sz="1200" b="1" dirty="0" err="1">
+                <a:solidFill>
+                  <a:schemeClr val="tx1"/>
+                </a:solidFill>
+              </a:rPr>
+              <a:t>station_pts</a:t>
+            </a:r>
+            <a:r>
+              <a:rPr lang="en-US" sz="1200" b="1" dirty="0">
+                <a:solidFill>
+                  <a:schemeClr val="tx1"/>
+                </a:solidFill>
+              </a:rPr>
+              <a:t>. </a:t>
+            </a:r>
+            <a:r>
+              <a:rPr lang="en-US" sz="1200" b="1" dirty="0" err="1">
+                <a:solidFill>
+                  <a:schemeClr val="tx1"/>
+                </a:solidFill>
+              </a:rPr>
+              <a:t>wrangle_arcgis.R</a:t>
+            </a:r>
+            <a:r>
+              <a:rPr lang="en-US" sz="1200" b="1" dirty="0">
+                <a:solidFill>
+                  <a:schemeClr val="tx1"/>
+                </a:solidFill>
+              </a:rPr>
+              <a:t> can be run, but it requires the </a:t>
+            </a:r>
+            <a:r>
+              <a:rPr lang="en-US" sz="1200" b="1" dirty="0" err="1">
+                <a:solidFill>
+                  <a:schemeClr val="tx1"/>
+                </a:solidFill>
+              </a:rPr>
+              <a:t>wrangle_cas_si_su_data.R</a:t>
+            </a:r>
+            <a:r>
+              <a:rPr lang="en-US" sz="1200" b="1" dirty="0">
+                <a:solidFill>
+                  <a:schemeClr val="tx1"/>
+                </a:solidFill>
+              </a:rPr>
+              <a:t> to be run beforehand to generate the </a:t>
+            </a:r>
+            <a:r>
+              <a:rPr lang="en-US" sz="1200" b="1" dirty="0" err="1">
+                <a:solidFill>
+                  <a:schemeClr val="tx1"/>
+                </a:solidFill>
+              </a:rPr>
+              <a:t>dataframe</a:t>
+            </a:r>
+            <a:r>
+              <a:rPr lang="en-US" sz="1200" b="1" dirty="0">
+                <a:solidFill>
+                  <a:schemeClr val="tx1"/>
+                </a:solidFill>
+              </a:rPr>
+              <a:t> </a:t>
+            </a:r>
+            <a:r>
+              <a:rPr lang="en-US" sz="1200" b="1" dirty="0" err="1">
+                <a:solidFill>
+                  <a:schemeClr val="tx1"/>
+                </a:solidFill>
+              </a:rPr>
+              <a:t>data_cas_si_su</a:t>
+            </a:r>
+            <a:r>
+              <a:rPr lang="en-US" sz="1200" b="1" dirty="0">
+                <a:solidFill>
+                  <a:schemeClr val="tx1"/>
+                </a:solidFill>
+              </a:rPr>
+              <a:t>.</a:t>
+            </a:r>
+          </a:p>
+          <a:p>
+            <a:r>
+              <a:rPr lang="en-US" sz="1200" b="1" dirty="0" err="1">
+                <a:solidFill>
+                  <a:schemeClr val="tx1"/>
+                </a:solidFill>
+              </a:rPr>
+              <a:t>arcgis_tibble</a:t>
+            </a:r>
+            <a:r>
+              <a:rPr lang="en-US" sz="1200" b="1" dirty="0">
+                <a:solidFill>
+                  <a:schemeClr val="tx1"/>
+                </a:solidFill>
+              </a:rPr>
+              <a:t>: Detected an unexpected many-to-many relationship between `x` and `y`.</a:t>
+            </a:r>
+          </a:p>
+        </p:txBody>
+      </p:sp>
+      <p:sp>
+        <p:nvSpPr>
+          <p:cNvPr id="7" name="Rectangle: Rounded Corners 6">
+            <a:extLst>
+              <a:ext uri="{FF2B5EF4-FFF2-40B4-BE49-F238E27FC236}">
+                <a16:creationId xmlns:a16="http://schemas.microsoft.com/office/drawing/2014/main" id="{570CBB8E-10E5-B637-D810-880349F4325C}"/>
               </a:ext>
             </a:extLst>
           </p:cNvPr>
@@ -4979,12 +6607,15 @@
         </p:nvSpPr>
         <p:spPr>
           <a:xfrm>
-            <a:off x="3282950" y="4567097"/>
-            <a:ext cx="1828800" cy="457200"/>
+            <a:off x="32826" y="9214780"/>
+            <a:ext cx="7721600" cy="618010"/>
           </a:xfrm>
           <a:prstGeom prst="roundRect">
             <a:avLst/>
           </a:prstGeom>
+          <a:solidFill>
+            <a:schemeClr val="bg1"/>
+          </a:solidFill>
         </p:spPr>
         <p:style>
           <a:lnRef idx="2">
@@ -5006,21 +6637,191 @@
           <a:bodyPr rtlCol="0" anchor="ctr"/>
           <a:lstStyle/>
           <a:p>
-            <a:pPr algn="ctr"/>
-            <a:r>
-              <a:rPr lang="en-US" sz="1200" b="1" dirty="0" err="1"/>
-              <a:t>wrangle_cas_data.R</a:t>
-            </a:r>
-            <a:endParaRPr lang="en-US" sz="1200" b="1" dirty="0"/>
-          </a:p>
-        </p:txBody>
-      </p:sp>
-      <p:sp>
-        <p:nvSpPr>
-          <p:cNvPr id="12" name="Rectangle: Rounded Corners 11">
-            <a:extLst>
-              <a:ext uri="{FF2B5EF4-FFF2-40B4-BE49-F238E27FC236}">
-                <a16:creationId xmlns:a16="http://schemas.microsoft.com/office/drawing/2014/main" id="{F8233055-3E4B-7D86-0AA2-255CDE3DC270}"/>
+            <a:r>
+              <a:rPr lang="en-US" sz="1200" b="1" dirty="0" err="1">
+                <a:solidFill>
+                  <a:schemeClr val="tx1"/>
+                </a:solidFill>
+              </a:rPr>
+              <a:t>wrangle_arcgis.R</a:t>
+            </a:r>
+            <a:r>
+              <a:rPr lang="en-US" sz="1200" b="1" dirty="0">
+                <a:solidFill>
+                  <a:schemeClr val="tx1"/>
+                </a:solidFill>
+              </a:rPr>
+              <a:t> sources the script </a:t>
+            </a:r>
+            <a:r>
+              <a:rPr lang="en-US" sz="1200" b="1" dirty="0" err="1">
+                <a:solidFill>
+                  <a:schemeClr val="tx1"/>
+                </a:solidFill>
+              </a:rPr>
+              <a:t>wrangle_cas_si_su_data.R</a:t>
+            </a:r>
+            <a:r>
+              <a:rPr lang="en-US" sz="1200" b="1" dirty="0">
+                <a:solidFill>
+                  <a:schemeClr val="tx1"/>
+                </a:solidFill>
+              </a:rPr>
+              <a:t> to generate the </a:t>
+            </a:r>
+            <a:r>
+              <a:rPr lang="en-US" sz="1200" b="1" dirty="0" err="1">
+                <a:solidFill>
+                  <a:schemeClr val="tx1"/>
+                </a:solidFill>
+              </a:rPr>
+              <a:t>dataframe</a:t>
+            </a:r>
+            <a:r>
+              <a:rPr lang="en-US" sz="1200" b="1" dirty="0">
+                <a:solidFill>
+                  <a:schemeClr val="tx1"/>
+                </a:solidFill>
+              </a:rPr>
+              <a:t> </a:t>
+            </a:r>
+            <a:r>
+              <a:rPr lang="en-US" sz="1200" b="1" dirty="0" err="1">
+                <a:solidFill>
+                  <a:schemeClr val="tx1"/>
+                </a:solidFill>
+              </a:rPr>
+              <a:t>data_cas_si_su</a:t>
+            </a:r>
+            <a:r>
+              <a:rPr lang="en-US" sz="1200" b="1" dirty="0">
+                <a:solidFill>
+                  <a:schemeClr val="tx1"/>
+                </a:solidFill>
+              </a:rPr>
+              <a:t>, which is used by </a:t>
+            </a:r>
+            <a:r>
+              <a:rPr lang="en-US" sz="1200" b="1" dirty="0" err="1">
+                <a:solidFill>
+                  <a:schemeClr val="tx1"/>
+                </a:solidFill>
+              </a:rPr>
+              <a:t>wrangle_arcgis.R</a:t>
+            </a:r>
+            <a:r>
+              <a:rPr lang="en-US" sz="1200" b="1" dirty="0">
+                <a:solidFill>
+                  <a:schemeClr val="tx1"/>
+                </a:solidFill>
+              </a:rPr>
+              <a:t> to create the </a:t>
+            </a:r>
+            <a:r>
+              <a:rPr lang="en-US" sz="1200" b="1" dirty="0" err="1">
+                <a:solidFill>
+                  <a:schemeClr val="tx1"/>
+                </a:solidFill>
+              </a:rPr>
+              <a:t>dataframe</a:t>
+            </a:r>
+            <a:r>
+              <a:rPr lang="en-US" sz="1200" b="1" dirty="0">
+                <a:solidFill>
+                  <a:schemeClr val="tx1"/>
+                </a:solidFill>
+              </a:rPr>
+              <a:t> </a:t>
+            </a:r>
+            <a:r>
+              <a:rPr lang="en-US" sz="1200" b="1" dirty="0" err="1">
+                <a:solidFill>
+                  <a:schemeClr val="tx1"/>
+                </a:solidFill>
+              </a:rPr>
+              <a:t>station_pts</a:t>
+            </a:r>
+            <a:r>
+              <a:rPr lang="en-US" sz="1200" b="1" dirty="0">
+                <a:solidFill>
+                  <a:schemeClr val="tx1"/>
+                </a:solidFill>
+              </a:rPr>
+              <a:t>. </a:t>
+            </a:r>
+            <a:r>
+              <a:rPr lang="en-US" sz="1200" b="1" dirty="0" err="1">
+                <a:solidFill>
+                  <a:schemeClr val="tx1"/>
+                </a:solidFill>
+              </a:rPr>
+              <a:t>wrangle_arcgis.R</a:t>
+            </a:r>
+            <a:r>
+              <a:rPr lang="en-US" sz="1200" b="1" dirty="0">
+                <a:solidFill>
+                  <a:schemeClr val="tx1"/>
+                </a:solidFill>
+              </a:rPr>
+              <a:t> can be run, but it requires the </a:t>
+            </a:r>
+            <a:r>
+              <a:rPr lang="en-US" sz="1200" b="1" dirty="0" err="1">
+                <a:solidFill>
+                  <a:schemeClr val="tx1"/>
+                </a:solidFill>
+              </a:rPr>
+              <a:t>wrangle_cas_si_su_data.R</a:t>
+            </a:r>
+            <a:r>
+              <a:rPr lang="en-US" sz="1200" b="1" dirty="0">
+                <a:solidFill>
+                  <a:schemeClr val="tx1"/>
+                </a:solidFill>
+              </a:rPr>
+              <a:t> to be run beforehand to generate the </a:t>
+            </a:r>
+            <a:r>
+              <a:rPr lang="en-US" sz="1200" b="1" dirty="0" err="1">
+                <a:solidFill>
+                  <a:schemeClr val="tx1"/>
+                </a:solidFill>
+              </a:rPr>
+              <a:t>dataframe</a:t>
+            </a:r>
+            <a:r>
+              <a:rPr lang="en-US" sz="1200" b="1" dirty="0">
+                <a:solidFill>
+                  <a:schemeClr val="tx1"/>
+                </a:solidFill>
+              </a:rPr>
+              <a:t> </a:t>
+            </a:r>
+            <a:r>
+              <a:rPr lang="en-US" sz="1200" b="1" dirty="0" err="1">
+                <a:solidFill>
+                  <a:schemeClr val="tx1"/>
+                </a:solidFill>
+              </a:rPr>
+              <a:t>data_cas_si_su</a:t>
+            </a:r>
+            <a:r>
+              <a:rPr lang="en-US" sz="1200" b="1" dirty="0">
+                <a:solidFill>
+                  <a:schemeClr val="tx1"/>
+                </a:solidFill>
+              </a:rPr>
+              <a:t>.</a:t>
+            </a:r>
+          </a:p>
+        </p:txBody>
+      </p:sp>
+      <p:sp>
+        <p:nvSpPr>
+          <p:cNvPr id="10" name="Rectangle: Rounded Corners 9">
+            <a:extLst>
+              <a:ext uri="{FF2B5EF4-FFF2-40B4-BE49-F238E27FC236}">
+                <a16:creationId xmlns:a16="http://schemas.microsoft.com/office/drawing/2014/main" id="{1D117679-AF19-B7F6-2C3C-7F01E25307D0}"/>
               </a:ext>
             </a:extLst>
           </p:cNvPr>
@@ -5029,292 +6830,7 @@
         </p:nvSpPr>
         <p:spPr>
           <a:xfrm>
-            <a:off x="3282950" y="1501487"/>
-            <a:ext cx="1828800" cy="457200"/>
-          </a:xfrm>
-          <a:prstGeom prst="roundRect">
-            <a:avLst/>
-          </a:prstGeom>
-        </p:spPr>
-        <p:style>
-          <a:lnRef idx="2">
-            <a:schemeClr val="accent1">
-              <a:shade val="50000"/>
-            </a:schemeClr>
-          </a:lnRef>
-          <a:fillRef idx="1">
-            <a:schemeClr val="accent1"/>
-          </a:fillRef>
-          <a:effectRef idx="0">
-            <a:schemeClr val="accent1"/>
-          </a:effectRef>
-          <a:fontRef idx="minor">
-            <a:schemeClr val="lt1"/>
-          </a:fontRef>
-        </p:style>
-        <p:txBody>
-          <a:bodyPr rtlCol="0" anchor="ctr"/>
-          <a:lstStyle/>
-          <a:p>
-            <a:pPr algn="ctr"/>
-            <a:r>
-              <a:rPr lang="en-US" sz="1200" b="1" dirty="0" err="1"/>
-              <a:t>wrangleStationData_SI.R</a:t>
-            </a:r>
-            <a:endParaRPr lang="en-US" sz="1200" b="1" dirty="0"/>
-          </a:p>
-        </p:txBody>
-      </p:sp>
-      <p:sp>
-        <p:nvSpPr>
-          <p:cNvPr id="13" name="Rectangle: Rounded Corners 12">
-            <a:extLst>
-              <a:ext uri="{FF2B5EF4-FFF2-40B4-BE49-F238E27FC236}">
-                <a16:creationId xmlns:a16="http://schemas.microsoft.com/office/drawing/2014/main" id="{4EAD1516-111C-AE3C-0503-992AE73B9E6E}"/>
-              </a:ext>
-            </a:extLst>
-          </p:cNvPr>
-          <p:cNvSpPr/>
-          <p:nvPr/>
-        </p:nvSpPr>
-        <p:spPr>
-          <a:xfrm>
-            <a:off x="1104900" y="215479"/>
-            <a:ext cx="5372100" cy="851321"/>
-          </a:xfrm>
-          <a:prstGeom prst="roundRect">
-            <a:avLst/>
-          </a:prstGeom>
-        </p:spPr>
-        <p:style>
-          <a:lnRef idx="2">
-            <a:schemeClr val="accent1">
-              <a:shade val="50000"/>
-            </a:schemeClr>
-          </a:lnRef>
-          <a:fillRef idx="1">
-            <a:schemeClr val="accent1"/>
-          </a:fillRef>
-          <a:effectRef idx="0">
-            <a:schemeClr val="accent1"/>
-          </a:effectRef>
-          <a:fontRef idx="minor">
-            <a:schemeClr val="lt1"/>
-          </a:fontRef>
-        </p:style>
-        <p:txBody>
-          <a:bodyPr rtlCol="0" anchor="ctr"/>
-          <a:lstStyle/>
-          <a:p>
-            <a:pPr algn="ctr"/>
-            <a:r>
-              <a:rPr lang="en-US" sz="3600" dirty="0" err="1"/>
-              <a:t>wrangle_cas_si_su_data.R</a:t>
-            </a:r>
-            <a:endParaRPr lang="en-US" sz="3600" dirty="0"/>
-          </a:p>
-        </p:txBody>
-      </p:sp>
-      <p:sp>
-        <p:nvSpPr>
-          <p:cNvPr id="14" name="Rectangle: Rounded Corners 13">
-            <a:extLst>
-              <a:ext uri="{FF2B5EF4-FFF2-40B4-BE49-F238E27FC236}">
-                <a16:creationId xmlns:a16="http://schemas.microsoft.com/office/drawing/2014/main" id="{600BB368-7EFF-8F1A-2975-1356952FE833}"/>
-              </a:ext>
-            </a:extLst>
-          </p:cNvPr>
-          <p:cNvSpPr/>
-          <p:nvPr/>
-        </p:nvSpPr>
-        <p:spPr>
-          <a:xfrm>
-            <a:off x="3282950" y="3034292"/>
-            <a:ext cx="1828800" cy="457200"/>
-          </a:xfrm>
-          <a:prstGeom prst="roundRect">
-            <a:avLst/>
-          </a:prstGeom>
-        </p:spPr>
-        <p:style>
-          <a:lnRef idx="2">
-            <a:schemeClr val="accent1">
-              <a:shade val="50000"/>
-            </a:schemeClr>
-          </a:lnRef>
-          <a:fillRef idx="1">
-            <a:schemeClr val="accent1"/>
-          </a:fillRef>
-          <a:effectRef idx="0">
-            <a:schemeClr val="accent1"/>
-          </a:effectRef>
-          <a:fontRef idx="minor">
-            <a:schemeClr val="lt1"/>
-          </a:fontRef>
-        </p:style>
-        <p:txBody>
-          <a:bodyPr rtlCol="0" anchor="ctr"/>
-          <a:lstStyle/>
-          <a:p>
-            <a:pPr algn="ctr"/>
-            <a:r>
-              <a:rPr lang="en-US" sz="1200" b="1" dirty="0" err="1"/>
-              <a:t>wrangle_SU-SI_DuplicatesNewData.R</a:t>
-            </a:r>
-            <a:endParaRPr lang="en-US" sz="1200" b="1" dirty="0"/>
-          </a:p>
-        </p:txBody>
-      </p:sp>
-      <p:sp>
-        <p:nvSpPr>
-          <p:cNvPr id="15" name="Rectangle: Rounded Corners 14">
-            <a:extLst>
-              <a:ext uri="{FF2B5EF4-FFF2-40B4-BE49-F238E27FC236}">
-                <a16:creationId xmlns:a16="http://schemas.microsoft.com/office/drawing/2014/main" id="{D4E87A1D-6DA3-D7B4-187C-F8D08F6EF6F6}"/>
-              </a:ext>
-            </a:extLst>
-          </p:cNvPr>
-          <p:cNvSpPr/>
-          <p:nvPr/>
-        </p:nvSpPr>
-        <p:spPr>
-          <a:xfrm>
-            <a:off x="3251200" y="6099902"/>
-            <a:ext cx="1892300" cy="457200"/>
-          </a:xfrm>
-          <a:prstGeom prst="roundRect">
-            <a:avLst/>
-          </a:prstGeom>
-        </p:spPr>
-        <p:style>
-          <a:lnRef idx="2">
-            <a:schemeClr val="accent1">
-              <a:shade val="50000"/>
-            </a:schemeClr>
-          </a:lnRef>
-          <a:fillRef idx="1">
-            <a:schemeClr val="accent1"/>
-          </a:fillRef>
-          <a:effectRef idx="0">
-            <a:schemeClr val="accent1"/>
-          </a:effectRef>
-          <a:fontRef idx="minor">
-            <a:schemeClr val="lt1"/>
-          </a:fontRef>
-        </p:style>
-        <p:txBody>
-          <a:bodyPr rtlCol="0" anchor="ctr"/>
-          <a:lstStyle/>
-          <a:p>
-            <a:pPr algn="ctr"/>
-            <a:r>
-              <a:rPr lang="en-US" sz="1200" dirty="0" err="1"/>
-              <a:t>distance_calculations_mpa.R</a:t>
-            </a:r>
-            <a:endParaRPr lang="en-US" sz="1200" dirty="0"/>
-          </a:p>
-        </p:txBody>
-      </p:sp>
-      <p:sp>
-        <p:nvSpPr>
-          <p:cNvPr id="16" name="Rectangle: Rounded Corners 15">
-            <a:extLst>
-              <a:ext uri="{FF2B5EF4-FFF2-40B4-BE49-F238E27FC236}">
-                <a16:creationId xmlns:a16="http://schemas.microsoft.com/office/drawing/2014/main" id="{E23CA4BF-9220-9927-503F-1EFB97CD8D06}"/>
-              </a:ext>
-            </a:extLst>
-          </p:cNvPr>
-          <p:cNvSpPr/>
-          <p:nvPr/>
-        </p:nvSpPr>
-        <p:spPr>
-          <a:xfrm>
-            <a:off x="3282950" y="7632707"/>
-            <a:ext cx="1828800" cy="457200"/>
-          </a:xfrm>
-          <a:prstGeom prst="roundRect">
-            <a:avLst/>
-          </a:prstGeom>
-        </p:spPr>
-        <p:style>
-          <a:lnRef idx="2">
-            <a:schemeClr val="accent1">
-              <a:shade val="50000"/>
-            </a:schemeClr>
-          </a:lnRef>
-          <a:fillRef idx="1">
-            <a:schemeClr val="accent1"/>
-          </a:fillRef>
-          <a:effectRef idx="0">
-            <a:schemeClr val="accent1"/>
-          </a:effectRef>
-          <a:fontRef idx="minor">
-            <a:schemeClr val="lt1"/>
-          </a:fontRef>
-        </p:style>
-        <p:txBody>
-          <a:bodyPr rtlCol="0" anchor="ctr"/>
-          <a:lstStyle/>
-          <a:p>
-            <a:pPr algn="ctr"/>
-            <a:r>
-              <a:rPr lang="en-US" sz="1200" dirty="0" err="1"/>
-              <a:t>visualize_pca_mpa_influence.R</a:t>
-            </a:r>
-            <a:endParaRPr lang="en-US" sz="1200" dirty="0"/>
-          </a:p>
-        </p:txBody>
-      </p:sp>
-      <p:sp>
-        <p:nvSpPr>
-          <p:cNvPr id="2" name="TextBox 1">
-            <a:extLst>
-              <a:ext uri="{FF2B5EF4-FFF2-40B4-BE49-F238E27FC236}">
-                <a16:creationId xmlns:a16="http://schemas.microsoft.com/office/drawing/2014/main" id="{65889B7A-55FF-80CA-8147-3FEEBCBBD354}"/>
-              </a:ext>
-            </a:extLst>
-          </p:cNvPr>
-          <p:cNvSpPr txBox="1"/>
-          <p:nvPr/>
-        </p:nvSpPr>
-        <p:spPr>
-          <a:xfrm>
-            <a:off x="3643352" y="1087352"/>
-            <a:ext cx="1107996" cy="461665"/>
-          </a:xfrm>
-          <a:prstGeom prst="rect">
-            <a:avLst/>
-          </a:prstGeom>
-          <a:noFill/>
-        </p:spPr>
-        <p:txBody>
-          <a:bodyPr wrap="none" rtlCol="0">
-            <a:spAutoFit/>
-          </a:bodyPr>
-          <a:lstStyle/>
-          <a:p>
-            <a:r>
-              <a:rPr lang="en-US" sz="2400" dirty="0"/>
-              <a:t>SCRIPT	</a:t>
-            </a:r>
-          </a:p>
-        </p:txBody>
-      </p:sp>
-      <p:sp>
-        <p:nvSpPr>
-          <p:cNvPr id="3" name="Rectangle: Rounded Corners 2">
-            <a:extLst>
-              <a:ext uri="{FF2B5EF4-FFF2-40B4-BE49-F238E27FC236}">
-                <a16:creationId xmlns:a16="http://schemas.microsoft.com/office/drawing/2014/main" id="{25890449-4B5F-9803-75FD-1FD83763495C}"/>
-              </a:ext>
-            </a:extLst>
-          </p:cNvPr>
-          <p:cNvSpPr/>
-          <p:nvPr/>
-        </p:nvSpPr>
-        <p:spPr>
-          <a:xfrm>
-            <a:off x="5152196" y="1501487"/>
+            <a:off x="5143500" y="8649456"/>
             <a:ext cx="2603500" cy="228600"/>
           </a:xfrm>
           <a:prstGeom prst="roundRect">
@@ -5344,18 +6860,271 @@
             <a:pPr algn="ctr"/>
             <a:r>
               <a:rPr lang="en-US" sz="1200" dirty="0" err="1"/>
+              <a:t>data_cas_si_su_mpa</a:t>
+            </a:r>
+            <a:endParaRPr lang="en-US" sz="1200" dirty="0"/>
+          </a:p>
+        </p:txBody>
+      </p:sp>
+      <p:sp>
+        <p:nvSpPr>
+          <p:cNvPr id="15" name="Rectangle: Rounded Corners 14">
+            <a:extLst>
+              <a:ext uri="{FF2B5EF4-FFF2-40B4-BE49-F238E27FC236}">
+                <a16:creationId xmlns:a16="http://schemas.microsoft.com/office/drawing/2014/main" id="{D08F2861-C9D1-7C4E-B814-6F63F4A357A3}"/>
+              </a:ext>
+            </a:extLst>
+          </p:cNvPr>
+          <p:cNvSpPr/>
+          <p:nvPr/>
+        </p:nvSpPr>
+        <p:spPr>
+          <a:xfrm>
+            <a:off x="3282950" y="8649456"/>
+            <a:ext cx="1828800" cy="457200"/>
+          </a:xfrm>
+          <a:prstGeom prst="roundRect">
+            <a:avLst/>
+          </a:prstGeom>
+        </p:spPr>
+        <p:style>
+          <a:lnRef idx="2">
+            <a:schemeClr val="accent1">
+              <a:shade val="50000"/>
+            </a:schemeClr>
+          </a:lnRef>
+          <a:fillRef idx="1">
+            <a:schemeClr val="accent1"/>
+          </a:fillRef>
+          <a:effectRef idx="0">
+            <a:schemeClr val="accent1"/>
+          </a:effectRef>
+          <a:fontRef idx="minor">
+            <a:schemeClr val="lt1"/>
+          </a:fontRef>
+        </p:style>
+        <p:txBody>
+          <a:bodyPr rtlCol="0" anchor="ctr"/>
+          <a:lstStyle/>
+          <a:p>
+            <a:pPr algn="ctr"/>
+            <a:r>
+              <a:rPr lang="en-US" sz="1200" b="1" dirty="0" err="1"/>
+              <a:t>distance_calculations_mpa.R</a:t>
+            </a:r>
+            <a:endParaRPr lang="en-US" sz="1200" b="1" dirty="0"/>
+          </a:p>
+        </p:txBody>
+      </p:sp>
+      <p:sp>
+        <p:nvSpPr>
+          <p:cNvPr id="30" name="Rectangle: Rounded Corners 29">
+            <a:extLst>
+              <a:ext uri="{FF2B5EF4-FFF2-40B4-BE49-F238E27FC236}">
+                <a16:creationId xmlns:a16="http://schemas.microsoft.com/office/drawing/2014/main" id="{641DFBEA-DF7E-93F1-4D04-7ABB37C42EFD}"/>
+              </a:ext>
+            </a:extLst>
+          </p:cNvPr>
+          <p:cNvSpPr/>
+          <p:nvPr/>
+        </p:nvSpPr>
+        <p:spPr>
+          <a:xfrm>
+            <a:off x="16704" y="8649456"/>
+            <a:ext cx="3225800" cy="228600"/>
+          </a:xfrm>
+          <a:prstGeom prst="roundRect">
+            <a:avLst/>
+          </a:prstGeom>
+        </p:spPr>
+        <p:style>
+          <a:lnRef idx="2">
+            <a:schemeClr val="accent2">
+              <a:shade val="50000"/>
+            </a:schemeClr>
+          </a:lnRef>
+          <a:fillRef idx="1">
+            <a:schemeClr val="accent2"/>
+          </a:fillRef>
+          <a:effectRef idx="0">
+            <a:schemeClr val="accent2"/>
+          </a:effectRef>
+          <a:fontRef idx="minor">
+            <a:schemeClr val="lt1"/>
+          </a:fontRef>
+        </p:style>
+        <p:txBody>
+          <a:bodyPr rtlCol="0" anchor="ctr"/>
+          <a:lstStyle/>
+          <a:p>
+            <a:pPr algn="ctr"/>
+            <a:r>
+              <a:rPr lang="en-US" sz="1200" b="1" dirty="0"/>
+              <a:t>../data/MPA_coordinates_no_deg.xlsx</a:t>
+            </a:r>
+          </a:p>
+        </p:txBody>
+      </p:sp>
+      <p:sp>
+        <p:nvSpPr>
+          <p:cNvPr id="31" name="Rectangle: Rounded Corners 30">
+            <a:extLst>
+              <a:ext uri="{FF2B5EF4-FFF2-40B4-BE49-F238E27FC236}">
+                <a16:creationId xmlns:a16="http://schemas.microsoft.com/office/drawing/2014/main" id="{2F2A4080-4BEB-3701-AE25-F88E5EC7D4B3}"/>
+              </a:ext>
+            </a:extLst>
+          </p:cNvPr>
+          <p:cNvSpPr/>
+          <p:nvPr/>
+        </p:nvSpPr>
+        <p:spPr>
+          <a:xfrm>
+            <a:off x="16704" y="8934718"/>
+            <a:ext cx="3225800" cy="228600"/>
+          </a:xfrm>
+          <a:prstGeom prst="roundRect">
+            <a:avLst/>
+          </a:prstGeom>
+        </p:spPr>
+        <p:style>
+          <a:lnRef idx="2">
+            <a:schemeClr val="accent2">
+              <a:shade val="50000"/>
+            </a:schemeClr>
+          </a:lnRef>
+          <a:fillRef idx="1">
+            <a:schemeClr val="accent2"/>
+          </a:fillRef>
+          <a:effectRef idx="0">
+            <a:schemeClr val="accent2"/>
+          </a:effectRef>
+          <a:fontRef idx="minor">
+            <a:schemeClr val="lt1"/>
+          </a:fontRef>
+        </p:style>
+        <p:txBody>
+          <a:bodyPr rtlCol="0" anchor="ctr"/>
+          <a:lstStyle/>
+          <a:p>
+            <a:pPr algn="ctr"/>
+            <a:r>
+              <a:rPr lang="en-US" sz="1200" b="1" dirty="0" err="1"/>
               <a:t>data_cas_si_su</a:t>
             </a:r>
-            <a:endParaRPr lang="en-US" sz="1200" dirty="0"/>
-          </a:p>
-        </p:txBody>
-      </p:sp>
-      <p:sp>
-        <p:nvSpPr>
-          <p:cNvPr id="4" name="TextBox 3">
-            <a:extLst>
-              <a:ext uri="{FF2B5EF4-FFF2-40B4-BE49-F238E27FC236}">
-                <a16:creationId xmlns:a16="http://schemas.microsoft.com/office/drawing/2014/main" id="{0109E3E0-7269-924F-A5B5-C68C5B80EBE6}"/>
+            <a:r>
+              <a:rPr lang="en-US" sz="1200" b="1" dirty="0"/>
+              <a:t> (</a:t>
+            </a:r>
+            <a:r>
+              <a:rPr lang="en-US" sz="1200" b="1" dirty="0" err="1"/>
+              <a:t>dataframe</a:t>
+            </a:r>
+            <a:r>
+              <a:rPr lang="en-US" sz="1200" b="1" dirty="0"/>
+              <a:t>)</a:t>
+            </a:r>
+          </a:p>
+        </p:txBody>
+      </p:sp>
+    </p:spTree>
+    <p:extLst>
+      <p:ext uri="{BB962C8B-B14F-4D97-AF65-F5344CB8AC3E}">
+        <p14:creationId xmlns:p14="http://schemas.microsoft.com/office/powerpoint/2010/main" val="822556699"/>
+      </p:ext>
+    </p:extLst>
+  </p:cSld>
+  <p:clrMapOvr>
+    <a:masterClrMapping/>
+  </p:clrMapOvr>
+</p:sld>
+</file>
+
+<file path=ppt/slides/slide5.xml><?xml version="1.0" encoding="utf-8"?>
+<p:sld xmlns:a="http://schemas.openxmlformats.org/drawingml/2006/main" xmlns:r="http://schemas.openxmlformats.org/officeDocument/2006/relationships" xmlns:p="http://schemas.openxmlformats.org/presentationml/2006/main">
+  <p:cSld>
+    <p:spTree>
+      <p:nvGrpSpPr>
+        <p:cNvPr id="1" name="">
+          <a:extLst>
+            <a:ext uri="{FF2B5EF4-FFF2-40B4-BE49-F238E27FC236}">
+              <a16:creationId xmlns:a16="http://schemas.microsoft.com/office/drawing/2014/main" id="{C60BEE4E-C110-411A-D6C7-376A1153AD5D}"/>
+            </a:ext>
+          </a:extLst>
+        </p:cNvPr>
+        <p:cNvGrpSpPr/>
+        <p:nvPr/>
+      </p:nvGrpSpPr>
+      <p:grpSpPr>
+        <a:xfrm>
+          <a:off x="0" y="0"/>
+          <a:ext cx="0" cy="0"/>
+          <a:chOff x="0" y="0"/>
+          <a:chExt cx="0" cy="0"/>
+        </a:xfrm>
+      </p:grpSpPr>
+      <p:sp>
+        <p:nvSpPr>
+          <p:cNvPr id="13" name="Rectangle: Rounded Corners 12">
+            <a:extLst>
+              <a:ext uri="{FF2B5EF4-FFF2-40B4-BE49-F238E27FC236}">
+                <a16:creationId xmlns:a16="http://schemas.microsoft.com/office/drawing/2014/main" id="{608B4274-CD2B-EB34-0426-01FCABBD67CA}"/>
+              </a:ext>
+            </a:extLst>
+          </p:cNvPr>
+          <p:cNvSpPr/>
+          <p:nvPr/>
+        </p:nvSpPr>
+        <p:spPr>
+          <a:xfrm>
+            <a:off x="1104900" y="7467"/>
+            <a:ext cx="5372100" cy="1059333"/>
+          </a:xfrm>
+          <a:prstGeom prst="roundRect">
+            <a:avLst/>
+          </a:prstGeom>
+        </p:spPr>
+        <p:style>
+          <a:lnRef idx="2">
+            <a:schemeClr val="accent1">
+              <a:shade val="50000"/>
+            </a:schemeClr>
+          </a:lnRef>
+          <a:fillRef idx="1">
+            <a:schemeClr val="accent1"/>
+          </a:fillRef>
+          <a:effectRef idx="0">
+            <a:schemeClr val="accent1"/>
+          </a:effectRef>
+          <a:fontRef idx="minor">
+            <a:schemeClr val="lt1"/>
+          </a:fontRef>
+        </p:style>
+        <p:txBody>
+          <a:bodyPr rtlCol="0" anchor="ctr"/>
+          <a:lstStyle/>
+          <a:p>
+            <a:pPr algn="ctr"/>
+            <a:r>
+              <a:rPr lang="en-US" sz="3200" b="1" dirty="0" err="1"/>
+              <a:t>wrangle_cas_si_su_data.R</a:t>
+            </a:r>
+            <a:endParaRPr lang="en-US" sz="3200" b="1" dirty="0"/>
+          </a:p>
+          <a:p>
+            <a:pPr algn="ctr"/>
+            <a:r>
+              <a:rPr lang="en-US" sz="3200" b="1" dirty="0"/>
+              <a:t>dependencies</a:t>
+            </a:r>
+          </a:p>
+        </p:txBody>
+      </p:sp>
+      <p:sp>
+        <p:nvSpPr>
+          <p:cNvPr id="2" name="TextBox 1">
+            <a:extLst>
+              <a:ext uri="{FF2B5EF4-FFF2-40B4-BE49-F238E27FC236}">
+                <a16:creationId xmlns:a16="http://schemas.microsoft.com/office/drawing/2014/main" id="{48A73877-AF59-DCAD-7E07-96CDA6429D86}"/>
               </a:ext>
             </a:extLst>
           </p:cNvPr>
@@ -5364,8 +7133,8 @@
         </p:nvSpPr>
         <p:spPr>
           <a:xfrm>
-            <a:off x="6057605" y="1087284"/>
-            <a:ext cx="1242648" cy="461665"/>
+            <a:off x="3643352" y="1087352"/>
+            <a:ext cx="1107996" cy="461665"/>
           </a:xfrm>
           <a:prstGeom prst="rect">
             <a:avLst/>
@@ -5380,17 +7149,17 @@
           <a:p>
             <a:r>
               <a:rPr lang="en-US" sz="2400" dirty="0"/>
-              <a:t>OUTPUT</a:t>
-            </a:r>
-          </a:p>
-        </p:txBody>
-      </p:sp>
-      <p:sp>
-        <p:nvSpPr>
-          <p:cNvPr id="5" name="TextBox 4">
-            <a:extLst>
-              <a:ext uri="{FF2B5EF4-FFF2-40B4-BE49-F238E27FC236}">
-                <a16:creationId xmlns:a16="http://schemas.microsoft.com/office/drawing/2014/main" id="{3C7693B8-B001-51BA-D2C7-85B261581FC5}"/>
+              <a:t>SCRIPT	</a:t>
+            </a:r>
+          </a:p>
+        </p:txBody>
+      </p:sp>
+      <p:sp>
+        <p:nvSpPr>
+          <p:cNvPr id="4" name="TextBox 3">
+            <a:extLst>
+              <a:ext uri="{FF2B5EF4-FFF2-40B4-BE49-F238E27FC236}">
+                <a16:creationId xmlns:a16="http://schemas.microsoft.com/office/drawing/2014/main" id="{A7D452EB-A123-A43B-5662-B5CBC7D1559C}"/>
               </a:ext>
             </a:extLst>
           </p:cNvPr>
@@ -5399,8 +7168,8 @@
         </p:nvSpPr>
         <p:spPr>
           <a:xfrm>
-            <a:off x="922113" y="1083072"/>
-            <a:ext cx="1107996" cy="461665"/>
+            <a:off x="6057605" y="1087284"/>
+            <a:ext cx="1242648" cy="461665"/>
           </a:xfrm>
           <a:prstGeom prst="rect">
             <a:avLst/>
@@ -5415,6 +7184,41 @@
           <a:p>
             <a:r>
               <a:rPr lang="en-US" sz="2400" dirty="0"/>
+              <a:t>OUTPUT</a:t>
+            </a:r>
+          </a:p>
+        </p:txBody>
+      </p:sp>
+      <p:sp>
+        <p:nvSpPr>
+          <p:cNvPr id="5" name="TextBox 4">
+            <a:extLst>
+              <a:ext uri="{FF2B5EF4-FFF2-40B4-BE49-F238E27FC236}">
+                <a16:creationId xmlns:a16="http://schemas.microsoft.com/office/drawing/2014/main" id="{FF900641-F7A4-DA08-5EBE-D7B284DA7472}"/>
+              </a:ext>
+            </a:extLst>
+          </p:cNvPr>
+          <p:cNvSpPr txBox="1"/>
+          <p:nvPr/>
+        </p:nvSpPr>
+        <p:spPr>
+          <a:xfrm>
+            <a:off x="922113" y="1083072"/>
+            <a:ext cx="1107996" cy="461665"/>
+          </a:xfrm>
+          <a:prstGeom prst="rect">
+            <a:avLst/>
+          </a:prstGeom>
+          <a:noFill/>
+        </p:spPr>
+        <p:txBody>
+          <a:bodyPr wrap="none" rtlCol="0">
+            <a:spAutoFit/>
+          </a:bodyPr>
+          <a:lstStyle/>
+          <a:p>
+            <a:r>
+              <a:rPr lang="en-US" sz="2400" dirty="0"/>
               <a:t>INPUT	</a:t>
             </a:r>
           </a:p>
@@ -5422,10 +7226,10 @@
       </p:sp>
       <p:sp>
         <p:nvSpPr>
-          <p:cNvPr id="6" name="Rectangle: Rounded Corners 5">
-            <a:extLst>
-              <a:ext uri="{FF2B5EF4-FFF2-40B4-BE49-F238E27FC236}">
-                <a16:creationId xmlns:a16="http://schemas.microsoft.com/office/drawing/2014/main" id="{1D117679-AF19-B7F6-2C3C-7F01E25307D0}"/>
+          <p:cNvPr id="7" name="Rectangle: Rounded Corners 6">
+            <a:extLst>
+              <a:ext uri="{FF2B5EF4-FFF2-40B4-BE49-F238E27FC236}">
+                <a16:creationId xmlns:a16="http://schemas.microsoft.com/office/drawing/2014/main" id="{92DC1DC2-91C4-A342-A2F7-D406F354B559}"/>
               </a:ext>
             </a:extLst>
           </p:cNvPr>
@@ -5434,7 +7238,230 @@
         </p:nvSpPr>
         <p:spPr>
           <a:xfrm>
-            <a:off x="5152196" y="5447799"/>
+            <a:off x="21336" y="2193172"/>
+            <a:ext cx="7721600" cy="618010"/>
+          </a:xfrm>
+          <a:prstGeom prst="roundRect">
+            <a:avLst/>
+          </a:prstGeom>
+          <a:solidFill>
+            <a:schemeClr val="bg1"/>
+          </a:solidFill>
+        </p:spPr>
+        <p:style>
+          <a:lnRef idx="2">
+            <a:schemeClr val="accent1">
+              <a:shade val="50000"/>
+            </a:schemeClr>
+          </a:lnRef>
+          <a:fillRef idx="1">
+            <a:schemeClr val="accent1"/>
+          </a:fillRef>
+          <a:effectRef idx="0">
+            <a:schemeClr val="accent1"/>
+          </a:effectRef>
+          <a:fontRef idx="minor">
+            <a:schemeClr val="lt1"/>
+          </a:fontRef>
+        </p:style>
+        <p:txBody>
+          <a:bodyPr rtlCol="0" anchor="ctr"/>
+          <a:lstStyle/>
+          <a:p>
+            <a:r>
+              <a:rPr lang="en-US" sz="1200" dirty="0" err="1">
+                <a:solidFill>
+                  <a:schemeClr val="tx1"/>
+                </a:solidFill>
+              </a:rPr>
+              <a:t>wrangle_arcgis.R</a:t>
+            </a:r>
+            <a:r>
+              <a:rPr lang="en-US" sz="1200" dirty="0">
+                <a:solidFill>
+                  <a:schemeClr val="tx1"/>
+                </a:solidFill>
+              </a:rPr>
+              <a:t> sources the script </a:t>
+            </a:r>
+            <a:r>
+              <a:rPr lang="en-US" sz="1200" dirty="0" err="1">
+                <a:solidFill>
+                  <a:schemeClr val="tx1"/>
+                </a:solidFill>
+              </a:rPr>
+              <a:t>wrangle_cas_si_su_data.R</a:t>
+            </a:r>
+            <a:r>
+              <a:rPr lang="en-US" sz="1200" dirty="0">
+                <a:solidFill>
+                  <a:schemeClr val="tx1"/>
+                </a:solidFill>
+              </a:rPr>
+              <a:t> to generate the </a:t>
+            </a:r>
+            <a:r>
+              <a:rPr lang="en-US" sz="1200" dirty="0" err="1">
+                <a:solidFill>
+                  <a:schemeClr val="tx1"/>
+                </a:solidFill>
+              </a:rPr>
+              <a:t>dataframe</a:t>
+            </a:r>
+            <a:r>
+              <a:rPr lang="en-US" sz="1200" dirty="0">
+                <a:solidFill>
+                  <a:schemeClr val="tx1"/>
+                </a:solidFill>
+              </a:rPr>
+              <a:t> </a:t>
+            </a:r>
+            <a:r>
+              <a:rPr lang="en-US" sz="1200" dirty="0" err="1">
+                <a:solidFill>
+                  <a:schemeClr val="tx1"/>
+                </a:solidFill>
+              </a:rPr>
+              <a:t>data_cas_si_su</a:t>
+            </a:r>
+            <a:r>
+              <a:rPr lang="en-US" sz="1200" dirty="0">
+                <a:solidFill>
+                  <a:schemeClr val="tx1"/>
+                </a:solidFill>
+              </a:rPr>
+              <a:t>, which is used by </a:t>
+            </a:r>
+            <a:r>
+              <a:rPr lang="en-US" sz="1200" dirty="0" err="1">
+                <a:solidFill>
+                  <a:schemeClr val="tx1"/>
+                </a:solidFill>
+              </a:rPr>
+              <a:t>wrangle_arcgis.R</a:t>
+            </a:r>
+            <a:r>
+              <a:rPr lang="en-US" sz="1200" dirty="0">
+                <a:solidFill>
+                  <a:schemeClr val="tx1"/>
+                </a:solidFill>
+              </a:rPr>
+              <a:t> to create the </a:t>
+            </a:r>
+            <a:r>
+              <a:rPr lang="en-US" sz="1200" dirty="0" err="1">
+                <a:solidFill>
+                  <a:schemeClr val="tx1"/>
+                </a:solidFill>
+              </a:rPr>
+              <a:t>dataframe</a:t>
+            </a:r>
+            <a:r>
+              <a:rPr lang="en-US" sz="1200" dirty="0">
+                <a:solidFill>
+                  <a:schemeClr val="tx1"/>
+                </a:solidFill>
+              </a:rPr>
+              <a:t> </a:t>
+            </a:r>
+            <a:r>
+              <a:rPr lang="en-US" sz="1200" dirty="0" err="1">
+                <a:solidFill>
+                  <a:schemeClr val="tx1"/>
+                </a:solidFill>
+              </a:rPr>
+              <a:t>station_pts</a:t>
+            </a:r>
+            <a:r>
+              <a:rPr lang="en-US" sz="1200" dirty="0">
+                <a:solidFill>
+                  <a:schemeClr val="tx1"/>
+                </a:solidFill>
+              </a:rPr>
+              <a:t>. </a:t>
+            </a:r>
+            <a:r>
+              <a:rPr lang="en-US" sz="1200" dirty="0" err="1">
+                <a:solidFill>
+                  <a:schemeClr val="tx1"/>
+                </a:solidFill>
+              </a:rPr>
+              <a:t>wrangle_arcgis.R</a:t>
+            </a:r>
+            <a:r>
+              <a:rPr lang="en-US" sz="1200" dirty="0">
+                <a:solidFill>
+                  <a:schemeClr val="tx1"/>
+                </a:solidFill>
+              </a:rPr>
+              <a:t> can be run, but it requires the </a:t>
+            </a:r>
+            <a:r>
+              <a:rPr lang="en-US" sz="1200" dirty="0" err="1">
+                <a:solidFill>
+                  <a:schemeClr val="tx1"/>
+                </a:solidFill>
+              </a:rPr>
+              <a:t>wrangle_cas_si_su_data.R</a:t>
+            </a:r>
+            <a:r>
+              <a:rPr lang="en-US" sz="1200" dirty="0">
+                <a:solidFill>
+                  <a:schemeClr val="tx1"/>
+                </a:solidFill>
+              </a:rPr>
+              <a:t> to be run beforehand to generate the </a:t>
+            </a:r>
+            <a:r>
+              <a:rPr lang="en-US" sz="1200" dirty="0" err="1">
+                <a:solidFill>
+                  <a:schemeClr val="tx1"/>
+                </a:solidFill>
+              </a:rPr>
+              <a:t>dataframe</a:t>
+            </a:r>
+            <a:r>
+              <a:rPr lang="en-US" sz="1200" dirty="0">
+                <a:solidFill>
+                  <a:schemeClr val="tx1"/>
+                </a:solidFill>
+              </a:rPr>
+              <a:t> </a:t>
+            </a:r>
+            <a:r>
+              <a:rPr lang="en-US" sz="1200" dirty="0" err="1">
+                <a:solidFill>
+                  <a:schemeClr val="tx1"/>
+                </a:solidFill>
+              </a:rPr>
+              <a:t>data_cas_si_su</a:t>
+            </a:r>
+            <a:r>
+              <a:rPr lang="en-US" sz="1200" dirty="0">
+                <a:solidFill>
+                  <a:schemeClr val="tx1"/>
+                </a:solidFill>
+              </a:rPr>
+              <a:t>.</a:t>
+            </a:r>
+          </a:p>
+        </p:txBody>
+      </p:sp>
+      <p:sp>
+        <p:nvSpPr>
+          <p:cNvPr id="10" name="Rectangle: Rounded Corners 9">
+            <a:extLst>
+              <a:ext uri="{FF2B5EF4-FFF2-40B4-BE49-F238E27FC236}">
+                <a16:creationId xmlns:a16="http://schemas.microsoft.com/office/drawing/2014/main" id="{DF5145F2-C1C0-0B40-1054-045C87D6A0CE}"/>
+              </a:ext>
+            </a:extLst>
+          </p:cNvPr>
+          <p:cNvSpPr/>
+          <p:nvPr/>
+        </p:nvSpPr>
+        <p:spPr>
+          <a:xfrm>
+            <a:off x="5148132" y="1516374"/>
             <a:ext cx="2603500" cy="228600"/>
           </a:xfrm>
           <a:prstGeom prst="roundRect">
@@ -5472,10 +7499,10 @@
       </p:sp>
       <p:sp>
         <p:nvSpPr>
-          <p:cNvPr id="7" name="Rectangle: Rounded Corners 6">
-            <a:extLst>
-              <a:ext uri="{FF2B5EF4-FFF2-40B4-BE49-F238E27FC236}">
-                <a16:creationId xmlns:a16="http://schemas.microsoft.com/office/drawing/2014/main" id="{E6D3A291-0D90-BA73-2F22-A04435859284}"/>
+          <p:cNvPr id="15" name="Rectangle: Rounded Corners 14">
+            <a:extLst>
+              <a:ext uri="{FF2B5EF4-FFF2-40B4-BE49-F238E27FC236}">
+                <a16:creationId xmlns:a16="http://schemas.microsoft.com/office/drawing/2014/main" id="{388C8584-73B2-BE58-F09F-98287BD91FCD}"/>
               </a:ext>
             </a:extLst>
           </p:cNvPr>
@@ -5484,8 +7511,225 @@
         </p:nvSpPr>
         <p:spPr>
           <a:xfrm>
-            <a:off x="5143500" y="9394110"/>
-            <a:ext cx="2603500" cy="228600"/>
+            <a:off x="3287582" y="1516374"/>
+            <a:ext cx="1828800" cy="457200"/>
+          </a:xfrm>
+          <a:prstGeom prst="roundRect">
+            <a:avLst/>
+          </a:prstGeom>
+        </p:spPr>
+        <p:style>
+          <a:lnRef idx="2">
+            <a:schemeClr val="accent1">
+              <a:shade val="50000"/>
+            </a:schemeClr>
+          </a:lnRef>
+          <a:fillRef idx="1">
+            <a:schemeClr val="accent1"/>
+          </a:fillRef>
+          <a:effectRef idx="0">
+            <a:schemeClr val="accent1"/>
+          </a:effectRef>
+          <a:fontRef idx="minor">
+            <a:schemeClr val="lt1"/>
+          </a:fontRef>
+        </p:style>
+        <p:txBody>
+          <a:bodyPr rtlCol="0" anchor="ctr"/>
+          <a:lstStyle/>
+          <a:p>
+            <a:pPr algn="ctr"/>
+            <a:r>
+              <a:rPr lang="en-US" sz="1200" b="1" dirty="0" err="1"/>
+              <a:t>distance_calculations_mpa.R</a:t>
+            </a:r>
+            <a:endParaRPr lang="en-US" sz="1200" b="1" dirty="0"/>
+          </a:p>
+        </p:txBody>
+      </p:sp>
+      <p:sp>
+        <p:nvSpPr>
+          <p:cNvPr id="30" name="Rectangle: Rounded Corners 29">
+            <a:extLst>
+              <a:ext uri="{FF2B5EF4-FFF2-40B4-BE49-F238E27FC236}">
+                <a16:creationId xmlns:a16="http://schemas.microsoft.com/office/drawing/2014/main" id="{6A8813A8-D133-E771-66F1-484DFC20CE33}"/>
+              </a:ext>
+            </a:extLst>
+          </p:cNvPr>
+          <p:cNvSpPr/>
+          <p:nvPr/>
+        </p:nvSpPr>
+        <p:spPr>
+          <a:xfrm>
+            <a:off x="21336" y="1516374"/>
+            <a:ext cx="3225800" cy="228600"/>
+          </a:xfrm>
+          <a:prstGeom prst="roundRect">
+            <a:avLst/>
+          </a:prstGeom>
+        </p:spPr>
+        <p:style>
+          <a:lnRef idx="2">
+            <a:schemeClr val="accent2">
+              <a:shade val="50000"/>
+            </a:schemeClr>
+          </a:lnRef>
+          <a:fillRef idx="1">
+            <a:schemeClr val="accent2"/>
+          </a:fillRef>
+          <a:effectRef idx="0">
+            <a:schemeClr val="accent2"/>
+          </a:effectRef>
+          <a:fontRef idx="minor">
+            <a:schemeClr val="lt1"/>
+          </a:fontRef>
+        </p:style>
+        <p:txBody>
+          <a:bodyPr rtlCol="0" anchor="ctr"/>
+          <a:lstStyle/>
+          <a:p>
+            <a:pPr algn="ctr"/>
+            <a:r>
+              <a:rPr lang="en-US" sz="1200" b="1" dirty="0"/>
+              <a:t>../data/MPA_coordinates_no_deg.xlsx</a:t>
+            </a:r>
+          </a:p>
+        </p:txBody>
+      </p:sp>
+      <p:sp>
+        <p:nvSpPr>
+          <p:cNvPr id="31" name="Rectangle: Rounded Corners 30">
+            <a:extLst>
+              <a:ext uri="{FF2B5EF4-FFF2-40B4-BE49-F238E27FC236}">
+                <a16:creationId xmlns:a16="http://schemas.microsoft.com/office/drawing/2014/main" id="{5BE7274D-1989-0169-FD5B-6D7AF43F7036}"/>
+              </a:ext>
+            </a:extLst>
+          </p:cNvPr>
+          <p:cNvSpPr/>
+          <p:nvPr/>
+        </p:nvSpPr>
+        <p:spPr>
+          <a:xfrm>
+            <a:off x="21336" y="1801636"/>
+            <a:ext cx="3225800" cy="228600"/>
+          </a:xfrm>
+          <a:prstGeom prst="roundRect">
+            <a:avLst/>
+          </a:prstGeom>
+        </p:spPr>
+        <p:style>
+          <a:lnRef idx="2">
+            <a:schemeClr val="accent2">
+              <a:shade val="50000"/>
+            </a:schemeClr>
+          </a:lnRef>
+          <a:fillRef idx="1">
+            <a:schemeClr val="accent2"/>
+          </a:fillRef>
+          <a:effectRef idx="0">
+            <a:schemeClr val="accent2"/>
+          </a:effectRef>
+          <a:fontRef idx="minor">
+            <a:schemeClr val="lt1"/>
+          </a:fontRef>
+        </p:style>
+        <p:txBody>
+          <a:bodyPr rtlCol="0" anchor="ctr"/>
+          <a:lstStyle/>
+          <a:p>
+            <a:pPr algn="ctr"/>
+            <a:r>
+              <a:rPr lang="en-US" sz="1200" b="1" dirty="0" err="1"/>
+              <a:t>data_cas_si_su</a:t>
+            </a:r>
+            <a:r>
+              <a:rPr lang="en-US" sz="1200" b="1" dirty="0"/>
+              <a:t> (</a:t>
+            </a:r>
+            <a:r>
+              <a:rPr lang="en-US" sz="1200" b="1" dirty="0" err="1"/>
+              <a:t>dataframe</a:t>
+            </a:r>
+            <a:r>
+              <a:rPr lang="en-US" sz="1200" b="1" dirty="0"/>
+              <a:t>)</a:t>
+            </a:r>
+          </a:p>
+        </p:txBody>
+      </p:sp>
+      <p:sp>
+        <p:nvSpPr>
+          <p:cNvPr id="6" name="Rectangle: Rounded Corners 5">
+            <a:extLst>
+              <a:ext uri="{FF2B5EF4-FFF2-40B4-BE49-F238E27FC236}">
+                <a16:creationId xmlns:a16="http://schemas.microsoft.com/office/drawing/2014/main" id="{5FD3AD70-AC46-F742-826E-B60024B23D59}"/>
+              </a:ext>
+            </a:extLst>
+          </p:cNvPr>
+          <p:cNvSpPr/>
+          <p:nvPr/>
+        </p:nvSpPr>
+        <p:spPr>
+          <a:xfrm>
+            <a:off x="5114290" y="2838412"/>
+            <a:ext cx="2606040" cy="438912"/>
+          </a:xfrm>
+          <a:prstGeom prst="roundRect">
+            <a:avLst/>
+          </a:prstGeom>
+        </p:spPr>
+        <p:style>
+          <a:lnRef idx="2">
+            <a:schemeClr val="accent4">
+              <a:shade val="15000"/>
+            </a:schemeClr>
+          </a:lnRef>
+          <a:fillRef idx="1">
+            <a:schemeClr val="accent4"/>
+          </a:fillRef>
+          <a:effectRef idx="0">
+            <a:schemeClr val="accent4"/>
+          </a:effectRef>
+          <a:fontRef idx="minor">
+            <a:schemeClr val="lt1"/>
+          </a:fontRef>
+        </p:style>
+        <p:txBody>
+          <a:bodyPr rtlCol="0" anchor="ctr"/>
+          <a:lstStyle/>
+          <a:p>
+            <a:pPr algn="ctr"/>
+            <a:r>
+              <a:rPr lang="en-US" sz="1200" dirty="0"/>
+              <a:t>Density plot: </a:t>
+            </a:r>
+            <a:r>
+              <a:rPr lang="en-US" sz="1200" dirty="0" err="1"/>
+              <a:t>distance_closest_mpa_km</a:t>
+            </a:r>
+            <a:r>
+              <a:rPr lang="en-US" sz="1200" dirty="0"/>
+              <a:t> by count</a:t>
+            </a:r>
+          </a:p>
+        </p:txBody>
+      </p:sp>
+      <p:sp>
+        <p:nvSpPr>
+          <p:cNvPr id="16" name="Rectangle: Rounded Corners 15">
+            <a:extLst>
+              <a:ext uri="{FF2B5EF4-FFF2-40B4-BE49-F238E27FC236}">
+                <a16:creationId xmlns:a16="http://schemas.microsoft.com/office/drawing/2014/main" id="{A08A3703-49CD-64DA-6F23-10B5EFFD3DC4}"/>
+              </a:ext>
+            </a:extLst>
+          </p:cNvPr>
+          <p:cNvSpPr/>
+          <p:nvPr/>
+        </p:nvSpPr>
+        <p:spPr>
+          <a:xfrm>
+            <a:off x="5136896" y="1773587"/>
+            <a:ext cx="2603500" cy="370557"/>
           </a:xfrm>
           <a:prstGeom prst="roundRect">
             <a:avLst/>
@@ -5514,48 +7758,18 @@
             <a:pPr algn="ctr"/>
             <a:r>
               <a:rPr lang="en-US" sz="1200" dirty="0" err="1"/>
-              <a:t>data_cas_si_su_mpa_pop</a:t>
+              <a:t>data_mpa_study_stationcode_distances</a:t>
             </a:r>
             <a:endParaRPr lang="en-US" sz="1200" dirty="0"/>
           </a:p>
         </p:txBody>
       </p:sp>
-    </p:spTree>
-    <p:extLst>
-      <p:ext uri="{BB962C8B-B14F-4D97-AF65-F5344CB8AC3E}">
-        <p14:creationId xmlns:p14="http://schemas.microsoft.com/office/powerpoint/2010/main" val="3585531918"/>
-      </p:ext>
-    </p:extLst>
-  </p:cSld>
-  <p:clrMapOvr>
-    <a:masterClrMapping/>
-  </p:clrMapOvr>
-</p:sld>
-</file>
-
-<file path=ppt/slides/slide5.xml><?xml version="1.0" encoding="utf-8"?>
-<p:sld xmlns:a="http://schemas.openxmlformats.org/drawingml/2006/main" xmlns:r="http://schemas.openxmlformats.org/officeDocument/2006/relationships" xmlns:p="http://schemas.openxmlformats.org/presentationml/2006/main">
-  <p:cSld>
-    <p:spTree>
-      <p:nvGrpSpPr>
-        <p:cNvPr id="1" name=""/>
-        <p:cNvGrpSpPr/>
-        <p:nvPr/>
-      </p:nvGrpSpPr>
-      <p:grpSpPr>
-        <a:xfrm>
-          <a:off x="0" y="0"/>
-          <a:ext cx="0" cy="0"/>
-          <a:chOff x="0" y="0"/>
-          <a:chExt cx="0" cy="0"/>
-        </a:xfrm>
-      </p:grpSpPr>
-      <p:sp>
-        <p:nvSpPr>
-          <p:cNvPr id="10" name="Rectangle: Rounded Corners 9">
-            <a:extLst>
-              <a:ext uri="{FF2B5EF4-FFF2-40B4-BE49-F238E27FC236}">
-                <a16:creationId xmlns:a16="http://schemas.microsoft.com/office/drawing/2014/main" id="{D737E575-F2DD-3F22-BF17-22BAEE3E5AE5}"/>
+      <p:sp>
+        <p:nvSpPr>
+          <p:cNvPr id="3" name="Rectangle: Rounded Corners 2">
+            <a:extLst>
+              <a:ext uri="{FF2B5EF4-FFF2-40B4-BE49-F238E27FC236}">
+                <a16:creationId xmlns:a16="http://schemas.microsoft.com/office/drawing/2014/main" id="{9A55842C-A674-1887-65B2-06497E66D82A}"/>
               </a:ext>
             </a:extLst>
           </p:cNvPr>
@@ -5564,7 +7778,7 @@
         </p:nvSpPr>
         <p:spPr>
           <a:xfrm>
-            <a:off x="3282950" y="9165510"/>
+            <a:off x="3247136" y="6127411"/>
             <a:ext cx="1828800" cy="457200"/>
           </a:xfrm>
           <a:prstGeom prst="roundRect">
@@ -5594,7 +7808,7 @@
             <a:pPr algn="ctr"/>
             <a:r>
               <a:rPr lang="en-US" sz="1200" b="1" dirty="0" err="1"/>
-              <a:t>wrangle_arcgis.R</a:t>
+              <a:t>visualize_pca_mpa_influence.R</a:t>
             </a:r>
             <a:endParaRPr lang="en-US" sz="1200" b="1" dirty="0"/>
           </a:p>
@@ -5602,10 +7816,10 @@
       </p:sp>
       <p:sp>
         <p:nvSpPr>
-          <p:cNvPr id="11" name="Rectangle: Rounded Corners 10">
-            <a:extLst>
-              <a:ext uri="{FF2B5EF4-FFF2-40B4-BE49-F238E27FC236}">
-                <a16:creationId xmlns:a16="http://schemas.microsoft.com/office/drawing/2014/main" id="{111909DF-EE82-E882-21E3-803BF6C62F9A}"/>
+          <p:cNvPr id="8" name="Rectangle: Rounded Corners 7">
+            <a:extLst>
+              <a:ext uri="{FF2B5EF4-FFF2-40B4-BE49-F238E27FC236}">
+                <a16:creationId xmlns:a16="http://schemas.microsoft.com/office/drawing/2014/main" id="{A39EF4B3-012E-E08D-82F7-9ACA4190FD42}"/>
               </a:ext>
             </a:extLst>
           </p:cNvPr>
@@ -5614,7 +7828,7 @@
         </p:nvSpPr>
         <p:spPr>
           <a:xfrm>
-            <a:off x="3282950" y="4567097"/>
+            <a:off x="387918" y="6146562"/>
             <a:ext cx="1828800" cy="457200"/>
           </a:xfrm>
           <a:prstGeom prst="roundRect">
@@ -5644,7 +7858,7 @@
             <a:pPr algn="ctr"/>
             <a:r>
               <a:rPr lang="en-US" sz="1200" b="1" dirty="0" err="1"/>
-              <a:t>wrangle_cas_data.R</a:t>
+              <a:t>distance_calculations_mpa.R</a:t>
             </a:r>
             <a:endParaRPr lang="en-US" sz="1200" b="1" dirty="0"/>
           </a:p>
@@ -5652,36 +7866,127 @@
       </p:sp>
       <p:sp>
         <p:nvSpPr>
-          <p:cNvPr id="12" name="Rectangle: Rounded Corners 11">
-            <a:extLst>
-              <a:ext uri="{FF2B5EF4-FFF2-40B4-BE49-F238E27FC236}">
-                <a16:creationId xmlns:a16="http://schemas.microsoft.com/office/drawing/2014/main" id="{F8233055-3E4B-7D86-0AA2-255CDE3DC270}"/>
-              </a:ext>
-            </a:extLst>
-          </p:cNvPr>
-          <p:cNvSpPr/>
-          <p:nvPr/>
-        </p:nvSpPr>
-        <p:spPr>
-          <a:xfrm>
-            <a:off x="3282950" y="1501487"/>
-            <a:ext cx="1828800" cy="457200"/>
-          </a:xfrm>
-          <a:prstGeom prst="roundRect">
+          <p:cNvPr id="9" name="TextBox 8">
+            <a:extLst>
+              <a:ext uri="{FF2B5EF4-FFF2-40B4-BE49-F238E27FC236}">
+                <a16:creationId xmlns:a16="http://schemas.microsoft.com/office/drawing/2014/main" id="{F9BB49CF-D4D9-46EC-8652-2D4643EC5B1E}"/>
+              </a:ext>
+            </a:extLst>
+          </p:cNvPr>
+          <p:cNvSpPr txBox="1"/>
+          <p:nvPr/>
+        </p:nvSpPr>
+        <p:spPr>
+          <a:xfrm>
+            <a:off x="445516" y="7052764"/>
+            <a:ext cx="4048760" cy="830997"/>
+          </a:xfrm>
+          <a:prstGeom prst="rect">
             <a:avLst/>
           </a:prstGeom>
         </p:spPr>
         <p:style>
           <a:lnRef idx="2">
-            <a:schemeClr val="accent1">
-              <a:shade val="50000"/>
+            <a:schemeClr val="accent1"/>
+          </a:lnRef>
+          <a:fillRef idx="1">
+            <a:schemeClr val="lt1"/>
+          </a:fillRef>
+          <a:effectRef idx="0">
+            <a:schemeClr val="accent1"/>
+          </a:effectRef>
+          <a:fontRef idx="minor">
+            <a:schemeClr val="dk1"/>
+          </a:fontRef>
+        </p:style>
+        <p:txBody>
+          <a:bodyPr wrap="square" rtlCol="0">
+            <a:spAutoFit/>
+          </a:bodyPr>
+          <a:lstStyle/>
+          <a:p>
+            <a:r>
+              <a:rPr lang="en-US" sz="1200" dirty="0"/>
+              <a:t>Requires </a:t>
+            </a:r>
+            <a:r>
+              <a:rPr lang="en-US" sz="1200" dirty="0" err="1"/>
+              <a:t>dataframe</a:t>
+            </a:r>
+            <a:r>
+              <a:rPr lang="en-US" sz="1200" dirty="0"/>
+              <a:t> </a:t>
+            </a:r>
+            <a:r>
+              <a:rPr lang="en-US" sz="1200" dirty="0" err="1"/>
+              <a:t>data_mpa_closest</a:t>
+            </a:r>
+            <a:r>
+              <a:rPr lang="en-US" sz="1200" dirty="0"/>
+              <a:t>, which comes from script </a:t>
+            </a:r>
+            <a:r>
+              <a:rPr lang="en-US" sz="1200" dirty="0" err="1"/>
+              <a:t>distance_calculations_mpa.R</a:t>
+            </a:r>
+            <a:r>
+              <a:rPr lang="en-US" sz="1200" dirty="0"/>
+              <a:t>. </a:t>
+            </a:r>
+          </a:p>
+          <a:p>
+            <a:r>
+              <a:rPr lang="en-US" sz="1200" dirty="0"/>
+              <a:t>Script </a:t>
+            </a:r>
+            <a:r>
+              <a:rPr lang="en-US" sz="1200" dirty="0" err="1"/>
+              <a:t>distance_calculations_mpa.R</a:t>
+            </a:r>
+            <a:r>
+              <a:rPr lang="en-US" sz="1200" dirty="0"/>
+              <a:t> requires </a:t>
+            </a:r>
+            <a:r>
+              <a:rPr lang="en-US" sz="1200" dirty="0" err="1"/>
+              <a:t>wrangle_cas_si_su_data.R</a:t>
+            </a:r>
+            <a:endParaRPr lang="en-US" sz="1200" dirty="0"/>
+          </a:p>
+        </p:txBody>
+      </p:sp>
+      <p:sp>
+        <p:nvSpPr>
+          <p:cNvPr id="11" name="Rectangle: Rounded Corners 10">
+            <a:extLst>
+              <a:ext uri="{FF2B5EF4-FFF2-40B4-BE49-F238E27FC236}">
+                <a16:creationId xmlns:a16="http://schemas.microsoft.com/office/drawing/2014/main" id="{E1997A6F-425B-D4C4-DA1F-6ADB146D807C}"/>
+              </a:ext>
+            </a:extLst>
+          </p:cNvPr>
+          <p:cNvSpPr/>
+          <p:nvPr/>
+        </p:nvSpPr>
+        <p:spPr>
+          <a:xfrm>
+            <a:off x="5098542" y="6146562"/>
+            <a:ext cx="2606040" cy="876098"/>
+          </a:xfrm>
+          <a:prstGeom prst="roundRect">
+            <a:avLst/>
+          </a:prstGeom>
+        </p:spPr>
+        <p:style>
+          <a:lnRef idx="2">
+            <a:schemeClr val="accent4">
+              <a:shade val="15000"/>
             </a:schemeClr>
           </a:lnRef>
           <a:fillRef idx="1">
-            <a:schemeClr val="accent1"/>
+            <a:schemeClr val="accent4"/>
           </a:fillRef>
           <a:effectRef idx="0">
-            <a:schemeClr val="accent1"/>
+            <a:schemeClr val="accent4"/>
           </a:effectRef>
           <a:fontRef idx="minor">
             <a:schemeClr val="lt1"/>
@@ -5691,21 +7996,54 @@
           <a:bodyPr rtlCol="0" anchor="ctr"/>
           <a:lstStyle/>
           <a:p>
-            <a:pPr algn="ctr"/>
-            <a:r>
-              <a:rPr lang="en-US" sz="1200" b="1" dirty="0" err="1"/>
-              <a:t>wrangleStationData_SI.R</a:t>
-            </a:r>
-            <a:endParaRPr lang="en-US" sz="1200" b="1" dirty="0"/>
-          </a:p>
-        </p:txBody>
-      </p:sp>
-      <p:sp>
-        <p:nvSpPr>
-          <p:cNvPr id="13" name="Rectangle: Rounded Corners 12">
-            <a:extLst>
-              <a:ext uri="{FF2B5EF4-FFF2-40B4-BE49-F238E27FC236}">
-                <a16:creationId xmlns:a16="http://schemas.microsoft.com/office/drawing/2014/main" id="{4EAD1516-111C-AE3C-0503-992AE73B9E6E}"/>
+            <a:r>
+              <a:rPr lang="en-US" sz="1200" dirty="0"/>
+              <a:t>PCA: </a:t>
+            </a:r>
+            <a:r>
+              <a:rPr lang="en-US" sz="1200" dirty="0" err="1"/>
+              <a:t>pca_mpa_influence</a:t>
+            </a:r>
+            <a:endParaRPr lang="en-US" sz="1200" dirty="0"/>
+          </a:p>
+          <a:p>
+            <a:pPr marL="228600" indent="-228600">
+              <a:buAutoNum type="arabicPeriod"/>
+            </a:pPr>
+            <a:r>
+              <a:rPr lang="en-US" sz="1200" dirty="0" err="1"/>
+              <a:t>distance_closest_mpa_km</a:t>
+            </a:r>
+            <a:endParaRPr lang="en-US" sz="1200" dirty="0"/>
+          </a:p>
+          <a:p>
+            <a:pPr marL="228600" indent="-228600">
+              <a:buAutoNum type="arabicPeriod"/>
+            </a:pPr>
+            <a:r>
+              <a:rPr lang="en-US" sz="1200" dirty="0" err="1"/>
+              <a:t>area_closest_mpa_ha</a:t>
+            </a:r>
+            <a:endParaRPr lang="en-US" sz="1200" dirty="0"/>
+          </a:p>
+          <a:p>
+            <a:pPr marL="228600" indent="-228600">
+              <a:buAutoNum type="arabicPeriod"/>
+            </a:pPr>
+            <a:r>
+              <a:rPr lang="en-US" sz="1200" dirty="0" err="1"/>
+              <a:t>age_closest_mpa_y</a:t>
+            </a:r>
+            <a:endParaRPr lang="en-US" sz="1200" dirty="0"/>
+          </a:p>
+        </p:txBody>
+      </p:sp>
+      <p:sp>
+        <p:nvSpPr>
+          <p:cNvPr id="12" name="Rectangle: Rounded Corners 11">
+            <a:extLst>
+              <a:ext uri="{FF2B5EF4-FFF2-40B4-BE49-F238E27FC236}">
+                <a16:creationId xmlns:a16="http://schemas.microsoft.com/office/drawing/2014/main" id="{F320CAFF-5D03-74D9-5629-00C6DD078B1B}"/>
               </a:ext>
             </a:extLst>
           </p:cNvPr>
@@ -5714,8 +8052,8 @@
         </p:nvSpPr>
         <p:spPr>
           <a:xfrm>
-            <a:off x="1104900" y="7467"/>
-            <a:ext cx="5372100" cy="1059333"/>
+            <a:off x="5098542" y="7129378"/>
+            <a:ext cx="2606040" cy="1032472"/>
           </a:xfrm>
           <a:prstGeom prst="roundRect">
             <a:avLst/>
@@ -5723,15 +8061,15 @@
         </p:spPr>
         <p:style>
           <a:lnRef idx="2">
-            <a:schemeClr val="accent1">
-              <a:shade val="50000"/>
+            <a:schemeClr val="accent4">
+              <a:shade val="15000"/>
             </a:schemeClr>
           </a:lnRef>
           <a:fillRef idx="1">
-            <a:schemeClr val="accent1"/>
+            <a:schemeClr val="accent4"/>
           </a:fillRef>
           <a:effectRef idx="0">
-            <a:schemeClr val="accent1"/>
+            <a:schemeClr val="accent4"/>
           </a:effectRef>
           <a:fontRef idx="minor">
             <a:schemeClr val="lt1"/>
@@ -5741,12 +8079,55 @@
           <a:bodyPr rtlCol="0" anchor="ctr"/>
           <a:lstStyle/>
           <a:p>
-            <a:pPr algn="ctr"/>
-            <a:r>
-              <a:rPr lang="en-US" sz="3600" b="1" dirty="0" err="1"/>
-              <a:t>wrangle_SU-SI_DuplicatesNewData.R</a:t>
-            </a:r>
-            <a:endParaRPr lang="en-US" sz="3600" b="1" dirty="0"/>
+            <a:r>
+              <a:rPr lang="en-US" sz="1200" dirty="0"/>
+              <a:t>PCA: </a:t>
+            </a:r>
+            <a:r>
+              <a:rPr lang="en-US" sz="1200" dirty="0" err="1"/>
+              <a:t>pca_mpa_influence</a:t>
+            </a:r>
+            <a:endParaRPr lang="en-US" sz="1200" dirty="0"/>
+          </a:p>
+          <a:p>
+            <a:pPr marL="228600" indent="-228600">
+              <a:buAutoNum type="arabicPeriod"/>
+            </a:pPr>
+            <a:r>
+              <a:rPr lang="en-US" sz="1200" dirty="0" err="1"/>
+              <a:t>mpa_area_within_xkm_ha</a:t>
+            </a:r>
+            <a:endParaRPr lang="en-US" sz="1200" dirty="0"/>
+          </a:p>
+          <a:p>
+            <a:pPr marL="228600" indent="-228600">
+              <a:buAutoNum type="arabicPeriod"/>
+            </a:pPr>
+            <a:r>
+              <a:rPr lang="en-US" sz="1200" dirty="0" err="1"/>
+              <a:t>mpa_num_within_xkm</a:t>
+            </a:r>
+            <a:endParaRPr lang="en-US" sz="1200" dirty="0"/>
+          </a:p>
+          <a:p>
+            <a:pPr marL="228600" indent="-228600">
+              <a:buAutoNum type="arabicPeriod"/>
+            </a:pPr>
+            <a:r>
+              <a:rPr lang="en-US" sz="1200" dirty="0" err="1"/>
+              <a:t>mpa_meanage_within_xkm</a:t>
+            </a:r>
+            <a:endParaRPr lang="en-US" sz="1200" dirty="0"/>
+          </a:p>
+          <a:p>
+            <a:pPr marL="228600" indent="-228600">
+              <a:buAutoNum type="arabicPeriod"/>
+            </a:pPr>
+            <a:r>
+              <a:rPr lang="en-US" sz="1200" dirty="0" err="1"/>
+              <a:t>mpa_meandist_within_xkm</a:t>
+            </a:r>
+            <a:endParaRPr lang="en-US" sz="1200" dirty="0"/>
           </a:p>
         </p:txBody>
       </p:sp>
@@ -5755,7 +8136,7 @@
           <p:cNvPr id="14" name="Rectangle: Rounded Corners 13">
             <a:extLst>
               <a:ext uri="{FF2B5EF4-FFF2-40B4-BE49-F238E27FC236}">
-                <a16:creationId xmlns:a16="http://schemas.microsoft.com/office/drawing/2014/main" id="{600BB368-7EFF-8F1A-2975-1356952FE833}"/>
+                <a16:creationId xmlns:a16="http://schemas.microsoft.com/office/drawing/2014/main" id="{39F8A9D7-D174-FF70-4F93-BD2D4EDF1487}"/>
               </a:ext>
             </a:extLst>
           </p:cNvPr>
@@ -5764,8 +8145,8 @@
         </p:nvSpPr>
         <p:spPr>
           <a:xfrm>
-            <a:off x="3282950" y="3034292"/>
-            <a:ext cx="1828800" cy="457200"/>
+            <a:off x="5098542" y="8268568"/>
+            <a:ext cx="2606040" cy="1379182"/>
           </a:xfrm>
           <a:prstGeom prst="roundRect">
             <a:avLst/>
@@ -5773,15 +8154,15 @@
         </p:spPr>
         <p:style>
           <a:lnRef idx="2">
-            <a:schemeClr val="accent1">
-              <a:shade val="50000"/>
+            <a:schemeClr val="accent4">
+              <a:shade val="15000"/>
             </a:schemeClr>
           </a:lnRef>
           <a:fillRef idx="1">
-            <a:schemeClr val="accent1"/>
+            <a:schemeClr val="accent4"/>
           </a:fillRef>
           <a:effectRef idx="0">
-            <a:schemeClr val="accent1"/>
+            <a:schemeClr val="accent4"/>
           </a:effectRef>
           <a:fontRef idx="minor">
             <a:schemeClr val="lt1"/>
@@ -5791,21 +8172,84 @@
           <a:bodyPr rtlCol="0" anchor="ctr"/>
           <a:lstStyle/>
           <a:p>
-            <a:pPr algn="ctr"/>
-            <a:r>
-              <a:rPr lang="en-US" sz="1200" b="1" dirty="0" err="1"/>
-              <a:t>wrangle_SU-SI_DuplicatesNewData.R</a:t>
-            </a:r>
-            <a:endParaRPr lang="en-US" sz="1200" b="1" dirty="0"/>
-          </a:p>
-        </p:txBody>
-      </p:sp>
-      <p:sp>
-        <p:nvSpPr>
-          <p:cNvPr id="15" name="Rectangle: Rounded Corners 14">
-            <a:extLst>
-              <a:ext uri="{FF2B5EF4-FFF2-40B4-BE49-F238E27FC236}">
-                <a16:creationId xmlns:a16="http://schemas.microsoft.com/office/drawing/2014/main" id="{D4E87A1D-6DA3-D7B4-187C-F8D08F6EF6F6}"/>
+            <a:r>
+              <a:rPr lang="en-US" sz="1200" dirty="0"/>
+              <a:t>PCA: </a:t>
+            </a:r>
+            <a:r>
+              <a:rPr lang="en-US" sz="1200" dirty="0" err="1"/>
+              <a:t>pca_mpa_influence</a:t>
+            </a:r>
+            <a:endParaRPr lang="en-US" sz="1200" dirty="0"/>
+          </a:p>
+          <a:p>
+            <a:pPr marL="228600" indent="-228600">
+              <a:buAutoNum type="arabicPeriod"/>
+            </a:pPr>
+            <a:r>
+              <a:rPr lang="en-US" sz="1200" dirty="0" err="1"/>
+              <a:t>distance_closest_mpa_km</a:t>
+            </a:r>
+            <a:endParaRPr lang="en-US" sz="1200" dirty="0"/>
+          </a:p>
+          <a:p>
+            <a:pPr marL="228600" indent="-228600">
+              <a:buAutoNum type="arabicPeriod"/>
+            </a:pPr>
+            <a:r>
+              <a:rPr lang="en-US" sz="1200" dirty="0" err="1"/>
+              <a:t>area_closest_mpa_ha</a:t>
+            </a:r>
+            <a:endParaRPr lang="en-US" sz="1200" dirty="0"/>
+          </a:p>
+          <a:p>
+            <a:pPr marL="228600" indent="-228600">
+              <a:buAutoNum type="arabicPeriod"/>
+            </a:pPr>
+            <a:r>
+              <a:rPr lang="en-US" sz="1200" dirty="0" err="1"/>
+              <a:t>age_closest_mpa_y</a:t>
+            </a:r>
+            <a:endParaRPr lang="en-US" sz="1200" dirty="0"/>
+          </a:p>
+          <a:p>
+            <a:pPr marL="228600" indent="-228600">
+              <a:buAutoNum type="arabicPeriod"/>
+            </a:pPr>
+            <a:r>
+              <a:rPr lang="en-US" sz="1200" dirty="0" err="1"/>
+              <a:t>mpa_area_within_xkm_ha</a:t>
+            </a:r>
+            <a:endParaRPr lang="en-US" sz="1200" dirty="0"/>
+          </a:p>
+          <a:p>
+            <a:pPr marL="228600" indent="-228600">
+              <a:buAutoNum type="arabicPeriod"/>
+            </a:pPr>
+            <a:r>
+              <a:rPr lang="en-US" sz="1200" dirty="0" err="1"/>
+              <a:t>mpa_num_within_xkm</a:t>
+            </a:r>
+            <a:endParaRPr lang="en-US" sz="1200" dirty="0"/>
+          </a:p>
+          <a:p>
+            <a:pPr marL="228600" indent="-228600">
+              <a:buAutoNum type="arabicPeriod"/>
+            </a:pPr>
+            <a:r>
+              <a:rPr lang="en-US" sz="1200" dirty="0" err="1"/>
+              <a:t>mpa_meanage_within_xkm</a:t>
+            </a:r>
+            <a:endParaRPr lang="en-US" sz="1200" dirty="0"/>
+          </a:p>
+        </p:txBody>
+      </p:sp>
+      <p:sp>
+        <p:nvSpPr>
+          <p:cNvPr id="17" name="Rectangle: Rounded Corners 16">
+            <a:extLst>
+              <a:ext uri="{FF2B5EF4-FFF2-40B4-BE49-F238E27FC236}">
+                <a16:creationId xmlns:a16="http://schemas.microsoft.com/office/drawing/2014/main" id="{1AB410EA-9DBE-C8F9-611F-E7CE34035E5D}"/>
               </a:ext>
             </a:extLst>
           </p:cNvPr>
@@ -5814,8 +8258,8 @@
         </p:nvSpPr>
         <p:spPr>
           <a:xfrm>
-            <a:off x="3251200" y="6099902"/>
-            <a:ext cx="1892300" cy="457200"/>
+            <a:off x="5111750" y="3320285"/>
+            <a:ext cx="2606040" cy="438912"/>
           </a:xfrm>
           <a:prstGeom prst="roundRect">
             <a:avLst/>
@@ -5823,15 +8267,15 @@
         </p:spPr>
         <p:style>
           <a:lnRef idx="2">
-            <a:schemeClr val="accent1">
-              <a:shade val="50000"/>
+            <a:schemeClr val="accent4">
+              <a:shade val="15000"/>
             </a:schemeClr>
           </a:lnRef>
           <a:fillRef idx="1">
-            <a:schemeClr val="accent1"/>
+            <a:schemeClr val="accent4"/>
           </a:fillRef>
           <a:effectRef idx="0">
-            <a:schemeClr val="accent1"/>
+            <a:schemeClr val="accent4"/>
           </a:effectRef>
           <a:fontRef idx="minor">
             <a:schemeClr val="lt1"/>
@@ -5843,19 +8287,29 @@
           <a:p>
             <a:pPr algn="ctr"/>
             <a:r>
+              <a:rPr lang="en-US" sz="1200" dirty="0"/>
+              <a:t>Density plot: </a:t>
+            </a:r>
+          </a:p>
+          <a:p>
+            <a:pPr algn="ctr"/>
+            <a:r>
               <a:rPr lang="en-US" sz="1200" dirty="0" err="1"/>
-              <a:t>distance_calculations_mpa.R</a:t>
-            </a:r>
-            <a:endParaRPr lang="en-US" sz="1200" dirty="0"/>
-          </a:p>
-        </p:txBody>
-      </p:sp>
-      <p:sp>
-        <p:nvSpPr>
-          <p:cNvPr id="16" name="Rectangle: Rounded Corners 15">
-            <a:extLst>
-              <a:ext uri="{FF2B5EF4-FFF2-40B4-BE49-F238E27FC236}">
-                <a16:creationId xmlns:a16="http://schemas.microsoft.com/office/drawing/2014/main" id="{E23CA4BF-9220-9927-503F-1EFB97CD8D06}"/>
+              <a:t>mpa_area_ha</a:t>
+            </a:r>
+            <a:r>
+              <a:rPr lang="en-US" sz="1200" dirty="0"/>
+              <a:t> by count</a:t>
+            </a:r>
+          </a:p>
+        </p:txBody>
+      </p:sp>
+      <p:sp>
+        <p:nvSpPr>
+          <p:cNvPr id="18" name="Rectangle: Rounded Corners 17">
+            <a:extLst>
+              <a:ext uri="{FF2B5EF4-FFF2-40B4-BE49-F238E27FC236}">
+                <a16:creationId xmlns:a16="http://schemas.microsoft.com/office/drawing/2014/main" id="{3341F57D-3BEB-89CA-0AAA-D2C0286431E8}"/>
               </a:ext>
             </a:extLst>
           </p:cNvPr>
@@ -5864,8 +8318,8 @@
         </p:nvSpPr>
         <p:spPr>
           <a:xfrm>
-            <a:off x="3282950" y="7632707"/>
-            <a:ext cx="1828800" cy="457200"/>
+            <a:off x="5111750" y="3790706"/>
+            <a:ext cx="2606040" cy="219456"/>
           </a:xfrm>
           <a:prstGeom prst="roundRect">
             <a:avLst/>
@@ -5873,15 +8327,15 @@
         </p:spPr>
         <p:style>
           <a:lnRef idx="2">
-            <a:schemeClr val="accent1">
-              <a:shade val="50000"/>
+            <a:schemeClr val="accent4">
+              <a:shade val="15000"/>
             </a:schemeClr>
           </a:lnRef>
           <a:fillRef idx="1">
-            <a:schemeClr val="accent1"/>
+            <a:schemeClr val="accent4"/>
           </a:fillRef>
           <a:effectRef idx="0">
-            <a:schemeClr val="accent1"/>
+            <a:schemeClr val="accent4"/>
           </a:effectRef>
           <a:fontRef idx="minor">
             <a:schemeClr val="lt1"/>
@@ -5894,7 +8348,15 @@
             <a:pPr algn="ctr"/>
             <a:r>
               <a:rPr lang="en-US" sz="1200" dirty="0" err="1"/>
-              <a:t>visualize_pca_mpa_influence.R</a:t>
+              <a:t>mpa_area_ha</a:t>
+            </a:r>
+            <a:r>
+              <a:rPr lang="en-US" sz="1200" dirty="0"/>
+              <a:t> by </a:t>
+            </a:r>
+            <a:r>
+              <a:rPr lang="en-US" sz="1200" dirty="0" err="1"/>
+              <a:t>mpa_area_ha</a:t>
             </a:r>
             <a:endParaRPr lang="en-US" sz="1200" dirty="0"/>
           </a:p>
@@ -5902,10 +8364,10 @@
       </p:sp>
       <p:sp>
         <p:nvSpPr>
-          <p:cNvPr id="18" name="Rectangle: Rounded Corners 17">
-            <a:extLst>
-              <a:ext uri="{FF2B5EF4-FFF2-40B4-BE49-F238E27FC236}">
-                <a16:creationId xmlns:a16="http://schemas.microsoft.com/office/drawing/2014/main" id="{FABC03AE-12A2-2BAC-2B49-3A95CC3CC8F5}"/>
+          <p:cNvPr id="19" name="Rectangle: Rounded Corners 18">
+            <a:extLst>
+              <a:ext uri="{FF2B5EF4-FFF2-40B4-BE49-F238E27FC236}">
+                <a16:creationId xmlns:a16="http://schemas.microsoft.com/office/drawing/2014/main" id="{BB8D2546-4AC0-B13A-FA16-B566DEA6F287}"/>
               </a:ext>
             </a:extLst>
           </p:cNvPr>
@@ -5914,8 +8376,8 @@
         </p:nvSpPr>
         <p:spPr>
           <a:xfrm>
-            <a:off x="16704" y="1501487"/>
-            <a:ext cx="3225800" cy="228600"/>
+            <a:off x="5122986" y="4048844"/>
+            <a:ext cx="2606040" cy="438912"/>
           </a:xfrm>
           <a:prstGeom prst="roundRect">
             <a:avLst/>
@@ -5923,15 +8385,15 @@
         </p:spPr>
         <p:style>
           <a:lnRef idx="2">
-            <a:schemeClr val="accent2">
-              <a:shade val="50000"/>
+            <a:schemeClr val="accent4">
+              <a:shade val="15000"/>
             </a:schemeClr>
           </a:lnRef>
           <a:fillRef idx="1">
-            <a:schemeClr val="accent2"/>
+            <a:schemeClr val="accent4"/>
           </a:fillRef>
           <a:effectRef idx="0">
-            <a:schemeClr val="accent2"/>
+            <a:schemeClr val="accent4"/>
           </a:effectRef>
           <a:fontRef idx="minor">
             <a:schemeClr val="lt1"/>
@@ -5943,26 +8405,22 @@
           <a:p>
             <a:pPr algn="ctr"/>
             <a:r>
-              <a:rPr lang="en-US" sz="1200" b="1" dirty="0"/>
-              <a:t>../SI/</a:t>
-            </a:r>
-            <a:r>
-              <a:rPr lang="en-US" sz="1200" b="1" dirty="0" err="1"/>
-              <a:t>Collections_Data</a:t>
-            </a:r>
-            <a:r>
-              <a:rPr lang="en-US" sz="1200" b="1" dirty="0"/>
-              <a:t>/*.csv</a:t>
-            </a:r>
-          </a:p>
-        </p:txBody>
-      </p:sp>
-      <p:sp>
-        <p:nvSpPr>
-          <p:cNvPr id="19" name="Rectangle: Rounded Corners 18">
-            <a:extLst>
-              <a:ext uri="{FF2B5EF4-FFF2-40B4-BE49-F238E27FC236}">
-                <a16:creationId xmlns:a16="http://schemas.microsoft.com/office/drawing/2014/main" id="{229E2602-BAB5-0F62-0CAC-E3B6D6634A0A}"/>
+              <a:rPr lang="en-US" sz="1200" dirty="0" err="1"/>
+              <a:t>mpa_area_ha_per_kmfromstation</a:t>
+            </a:r>
+            <a:r>
+              <a:rPr lang="en-US" sz="1200" dirty="0"/>
+              <a:t> by station</a:t>
+            </a:r>
+          </a:p>
+        </p:txBody>
+      </p:sp>
+      <p:sp>
+        <p:nvSpPr>
+          <p:cNvPr id="20" name="Rectangle: Rounded Corners 19">
+            <a:extLst>
+              <a:ext uri="{FF2B5EF4-FFF2-40B4-BE49-F238E27FC236}">
+                <a16:creationId xmlns:a16="http://schemas.microsoft.com/office/drawing/2014/main" id="{5FAB5EE2-6033-9244-DE2C-9DD805E3F6CF}"/>
               </a:ext>
             </a:extLst>
           </p:cNvPr>
@@ -5971,8 +8429,8 @@
         </p:nvSpPr>
         <p:spPr>
           <a:xfrm>
-            <a:off x="16704" y="1854716"/>
-            <a:ext cx="3225800" cy="228600"/>
+            <a:off x="5122986" y="4539430"/>
+            <a:ext cx="2606040" cy="438912"/>
           </a:xfrm>
           <a:prstGeom prst="roundRect">
             <a:avLst/>
@@ -5980,15 +8438,15 @@
         </p:spPr>
         <p:style>
           <a:lnRef idx="2">
-            <a:schemeClr val="accent2">
-              <a:shade val="50000"/>
+            <a:schemeClr val="accent4">
+              <a:shade val="15000"/>
             </a:schemeClr>
           </a:lnRef>
           <a:fillRef idx="1">
-            <a:schemeClr val="accent2"/>
+            <a:schemeClr val="accent4"/>
           </a:fillRef>
           <a:effectRef idx="0">
-            <a:schemeClr val="accent2"/>
+            <a:schemeClr val="accent4"/>
           </a:effectRef>
           <a:fontRef idx="minor">
             <a:schemeClr val="lt1"/>
@@ -6000,18 +8458,22 @@
           <a:p>
             <a:pPr algn="ctr"/>
             <a:r>
-              <a:rPr lang="en-US" sz="1200" b="1"/>
-              <a:t>../SI/Coordinates/Coordinate_Conversions.xlsx</a:t>
-            </a:r>
-          </a:p>
-        </p:txBody>
-      </p:sp>
-      <p:sp>
-        <p:nvSpPr>
-          <p:cNvPr id="20" name="Rectangle: Rounded Corners 19">
-            <a:extLst>
-              <a:ext uri="{FF2B5EF4-FFF2-40B4-BE49-F238E27FC236}">
-                <a16:creationId xmlns:a16="http://schemas.microsoft.com/office/drawing/2014/main" id="{8DA460A6-1004-E5DA-AD23-3EB36320975D}"/>
+              <a:rPr lang="en-US" sz="1200" dirty="0" err="1"/>
+              <a:t>mpa_haXyrs_per_kmfromstation</a:t>
+            </a:r>
+            <a:r>
+              <a:rPr lang="en-US" sz="1200" dirty="0"/>
+              <a:t> by station</a:t>
+            </a:r>
+          </a:p>
+        </p:txBody>
+      </p:sp>
+      <p:sp>
+        <p:nvSpPr>
+          <p:cNvPr id="21" name="Rectangle: Rounded Corners 20">
+            <a:extLst>
+              <a:ext uri="{FF2B5EF4-FFF2-40B4-BE49-F238E27FC236}">
+                <a16:creationId xmlns:a16="http://schemas.microsoft.com/office/drawing/2014/main" id="{D38B1261-3C65-4954-D23E-AAC9D811B5A8}"/>
               </a:ext>
             </a:extLst>
           </p:cNvPr>
@@ -6020,8 +8482,8 @@
         </p:nvSpPr>
         <p:spPr>
           <a:xfrm>
-            <a:off x="16704" y="2207945"/>
-            <a:ext cx="3225800" cy="228600"/>
+            <a:off x="5145592" y="5049461"/>
+            <a:ext cx="2606040" cy="438912"/>
           </a:xfrm>
           <a:prstGeom prst="roundRect">
             <a:avLst/>
@@ -6029,15 +8491,15 @@
         </p:spPr>
         <p:style>
           <a:lnRef idx="2">
-            <a:schemeClr val="accent2">
-              <a:shade val="50000"/>
+            <a:schemeClr val="accent4">
+              <a:shade val="15000"/>
             </a:schemeClr>
           </a:lnRef>
           <a:fillRef idx="1">
-            <a:schemeClr val="accent2"/>
+            <a:schemeClr val="accent4"/>
           </a:fillRef>
           <a:effectRef idx="0">
-            <a:schemeClr val="accent2"/>
+            <a:schemeClr val="accent4"/>
           </a:effectRef>
           <a:fontRef idx="minor">
             <a:schemeClr val="lt1"/>
@@ -6049,18 +8511,22 @@
           <a:p>
             <a:pPr algn="ctr"/>
             <a:r>
-              <a:rPr lang="en-US" sz="1200" b="1" dirty="0"/>
-              <a:t>../data/station_info.xlsx</a:t>
-            </a:r>
-          </a:p>
-        </p:txBody>
-      </p:sp>
-      <p:sp>
-        <p:nvSpPr>
-          <p:cNvPr id="21" name="Rectangle: Rounded Corners 20">
-            <a:extLst>
-              <a:ext uri="{FF2B5EF4-FFF2-40B4-BE49-F238E27FC236}">
-                <a16:creationId xmlns:a16="http://schemas.microsoft.com/office/drawing/2014/main" id="{ECE076C8-C808-017A-8E5D-95DB44CAF9FD}"/>
+              <a:rPr lang="en-US" sz="1200" dirty="0" err="1"/>
+              <a:t>sum_mpa_area_ha_within_x_km</a:t>
+            </a:r>
+            <a:r>
+              <a:rPr lang="en-US" sz="1200" dirty="0"/>
+              <a:t> by station</a:t>
+            </a:r>
+          </a:p>
+        </p:txBody>
+      </p:sp>
+      <p:sp>
+        <p:nvSpPr>
+          <p:cNvPr id="22" name="Rectangle: Rounded Corners 21">
+            <a:extLst>
+              <a:ext uri="{FF2B5EF4-FFF2-40B4-BE49-F238E27FC236}">
+                <a16:creationId xmlns:a16="http://schemas.microsoft.com/office/drawing/2014/main" id="{94008424-07FB-0BB2-AC7A-A194DB0D103A}"/>
               </a:ext>
             </a:extLst>
           </p:cNvPr>
@@ -6069,8 +8535,8 @@
         </p:nvSpPr>
         <p:spPr>
           <a:xfrm>
-            <a:off x="16704" y="2561175"/>
-            <a:ext cx="3225800" cy="228600"/>
+            <a:off x="5134356" y="5549478"/>
+            <a:ext cx="2606040" cy="438912"/>
           </a:xfrm>
           <a:prstGeom prst="roundRect">
             <a:avLst/>
@@ -6078,15 +8544,15 @@
         </p:spPr>
         <p:style>
           <a:lnRef idx="2">
-            <a:schemeClr val="accent2">
-              <a:shade val="50000"/>
+            <a:schemeClr val="accent4">
+              <a:shade val="15000"/>
             </a:schemeClr>
           </a:lnRef>
           <a:fillRef idx="1">
-            <a:schemeClr val="accent2"/>
+            <a:schemeClr val="accent4"/>
           </a:fillRef>
           <a:effectRef idx="0">
-            <a:schemeClr val="accent2"/>
+            <a:schemeClr val="accent4"/>
           </a:effectRef>
           <a:fontRef idx="minor">
             <a:schemeClr val="lt1"/>
@@ -6098,418 +8564,25 @@
           <a:p>
             <a:pPr algn="ctr"/>
             <a:r>
-              <a:rPr lang="en-US" sz="1200" b="1" dirty="0"/>
-              <a:t>../data/All_confirmed_names.xlsx</a:t>
-            </a:r>
-          </a:p>
-        </p:txBody>
-      </p:sp>
-      <p:sp>
-        <p:nvSpPr>
-          <p:cNvPr id="2" name="TextBox 1">
-            <a:extLst>
-              <a:ext uri="{FF2B5EF4-FFF2-40B4-BE49-F238E27FC236}">
-                <a16:creationId xmlns:a16="http://schemas.microsoft.com/office/drawing/2014/main" id="{65889B7A-55FF-80CA-8147-3FEEBCBBD354}"/>
-              </a:ext>
-            </a:extLst>
-          </p:cNvPr>
-          <p:cNvSpPr txBox="1"/>
-          <p:nvPr/>
-        </p:nvSpPr>
-        <p:spPr>
-          <a:xfrm>
-            <a:off x="3643352" y="1087352"/>
-            <a:ext cx="1107996" cy="461665"/>
-          </a:xfrm>
-          <a:prstGeom prst="rect">
-            <a:avLst/>
-          </a:prstGeom>
-          <a:noFill/>
-        </p:spPr>
-        <p:txBody>
-          <a:bodyPr wrap="none" rtlCol="0">
-            <a:spAutoFit/>
-          </a:bodyPr>
-          <a:lstStyle/>
-          <a:p>
-            <a:r>
-              <a:rPr lang="en-US" sz="2400" dirty="0"/>
-              <a:t>SCRIPT	</a:t>
-            </a:r>
-          </a:p>
-        </p:txBody>
-      </p:sp>
-      <p:sp>
-        <p:nvSpPr>
-          <p:cNvPr id="3" name="Rectangle: Rounded Corners 2">
-            <a:extLst>
-              <a:ext uri="{FF2B5EF4-FFF2-40B4-BE49-F238E27FC236}">
-                <a16:creationId xmlns:a16="http://schemas.microsoft.com/office/drawing/2014/main" id="{25890449-4B5F-9803-75FD-1FD83763495C}"/>
-              </a:ext>
-            </a:extLst>
-          </p:cNvPr>
-          <p:cNvSpPr/>
-          <p:nvPr/>
-        </p:nvSpPr>
-        <p:spPr>
-          <a:xfrm>
-            <a:off x="5152196" y="1501487"/>
-            <a:ext cx="2603500" cy="228600"/>
-          </a:xfrm>
-          <a:prstGeom prst="roundRect">
-            <a:avLst/>
-          </a:prstGeom>
-        </p:spPr>
-        <p:style>
-          <a:lnRef idx="2">
-            <a:schemeClr val="accent6">
-              <a:shade val="50000"/>
-            </a:schemeClr>
-          </a:lnRef>
-          <a:fillRef idx="1">
-            <a:schemeClr val="accent6"/>
-          </a:fillRef>
-          <a:effectRef idx="0">
-            <a:schemeClr val="accent6"/>
-          </a:effectRef>
-          <a:fontRef idx="minor">
-            <a:schemeClr val="lt1"/>
-          </a:fontRef>
-        </p:style>
-        <p:txBody>
-          <a:bodyPr rtlCol="0" anchor="ctr"/>
-          <a:lstStyle/>
-          <a:p>
-            <a:pPr algn="ctr"/>
-            <a:r>
               <a:rPr lang="en-US" sz="1200" dirty="0" err="1"/>
-              <a:t>data_cas_si_su</a:t>
+              <a:t>area_closest_mpa_ha</a:t>
+            </a:r>
+            <a:r>
+              <a:rPr lang="en-US" sz="1200" dirty="0"/>
+              <a:t> by </a:t>
+            </a:r>
+            <a:r>
+              <a:rPr lang="en-US" sz="1200" dirty="0" err="1"/>
+              <a:t>distance_closest_mpa_km</a:t>
             </a:r>
             <a:endParaRPr lang="en-US" sz="1200" dirty="0"/>
-          </a:p>
-        </p:txBody>
-      </p:sp>
-      <p:sp>
-        <p:nvSpPr>
-          <p:cNvPr id="4" name="TextBox 3">
-            <a:extLst>
-              <a:ext uri="{FF2B5EF4-FFF2-40B4-BE49-F238E27FC236}">
-                <a16:creationId xmlns:a16="http://schemas.microsoft.com/office/drawing/2014/main" id="{0109E3E0-7269-924F-A5B5-C68C5B80EBE6}"/>
-              </a:ext>
-            </a:extLst>
-          </p:cNvPr>
-          <p:cNvSpPr txBox="1"/>
-          <p:nvPr/>
-        </p:nvSpPr>
-        <p:spPr>
-          <a:xfrm>
-            <a:off x="6057605" y="1087284"/>
-            <a:ext cx="1242648" cy="461665"/>
-          </a:xfrm>
-          <a:prstGeom prst="rect">
-            <a:avLst/>
-          </a:prstGeom>
-          <a:noFill/>
-        </p:spPr>
-        <p:txBody>
-          <a:bodyPr wrap="none" rtlCol="0">
-            <a:spAutoFit/>
-          </a:bodyPr>
-          <a:lstStyle/>
-          <a:p>
-            <a:r>
-              <a:rPr lang="en-US" sz="2400" dirty="0"/>
-              <a:t>OUTPUT</a:t>
-            </a:r>
-          </a:p>
-        </p:txBody>
-      </p:sp>
-      <p:sp>
-        <p:nvSpPr>
-          <p:cNvPr id="5" name="TextBox 4">
-            <a:extLst>
-              <a:ext uri="{FF2B5EF4-FFF2-40B4-BE49-F238E27FC236}">
-                <a16:creationId xmlns:a16="http://schemas.microsoft.com/office/drawing/2014/main" id="{3C7693B8-B001-51BA-D2C7-85B261581FC5}"/>
-              </a:ext>
-            </a:extLst>
-          </p:cNvPr>
-          <p:cNvSpPr txBox="1"/>
-          <p:nvPr/>
-        </p:nvSpPr>
-        <p:spPr>
-          <a:xfrm>
-            <a:off x="922113" y="1083072"/>
-            <a:ext cx="1107996" cy="461665"/>
-          </a:xfrm>
-          <a:prstGeom prst="rect">
-            <a:avLst/>
-          </a:prstGeom>
-          <a:noFill/>
-        </p:spPr>
-        <p:txBody>
-          <a:bodyPr wrap="none" rtlCol="0">
-            <a:spAutoFit/>
-          </a:bodyPr>
-          <a:lstStyle/>
-          <a:p>
-            <a:r>
-              <a:rPr lang="en-US" sz="2400" dirty="0"/>
-              <a:t>INPUT	</a:t>
-            </a:r>
-          </a:p>
-        </p:txBody>
-      </p:sp>
-      <p:sp>
-        <p:nvSpPr>
-          <p:cNvPr id="6" name="Rectangle: Rounded Corners 5">
-            <a:extLst>
-              <a:ext uri="{FF2B5EF4-FFF2-40B4-BE49-F238E27FC236}">
-                <a16:creationId xmlns:a16="http://schemas.microsoft.com/office/drawing/2014/main" id="{1D117679-AF19-B7F6-2C3C-7F01E25307D0}"/>
-              </a:ext>
-            </a:extLst>
-          </p:cNvPr>
-          <p:cNvSpPr/>
-          <p:nvPr/>
-        </p:nvSpPr>
-        <p:spPr>
-          <a:xfrm>
-            <a:off x="5152196" y="5447799"/>
-            <a:ext cx="2603500" cy="228600"/>
-          </a:xfrm>
-          <a:prstGeom prst="roundRect">
-            <a:avLst/>
-          </a:prstGeom>
-        </p:spPr>
-        <p:style>
-          <a:lnRef idx="2">
-            <a:schemeClr val="accent6">
-              <a:shade val="50000"/>
-            </a:schemeClr>
-          </a:lnRef>
-          <a:fillRef idx="1">
-            <a:schemeClr val="accent6"/>
-          </a:fillRef>
-          <a:effectRef idx="0">
-            <a:schemeClr val="accent6"/>
-          </a:effectRef>
-          <a:fontRef idx="minor">
-            <a:schemeClr val="lt1"/>
-          </a:fontRef>
-        </p:style>
-        <p:txBody>
-          <a:bodyPr rtlCol="0" anchor="ctr"/>
-          <a:lstStyle/>
-          <a:p>
-            <a:pPr algn="ctr"/>
-            <a:r>
-              <a:rPr lang="en-US" sz="1200" dirty="0" err="1"/>
-              <a:t>data_cas_si_su_mpa</a:t>
-            </a:r>
-            <a:endParaRPr lang="en-US" sz="1200" dirty="0"/>
-          </a:p>
-        </p:txBody>
-      </p:sp>
-      <p:sp>
-        <p:nvSpPr>
-          <p:cNvPr id="7" name="Rectangle: Rounded Corners 6">
-            <a:extLst>
-              <a:ext uri="{FF2B5EF4-FFF2-40B4-BE49-F238E27FC236}">
-                <a16:creationId xmlns:a16="http://schemas.microsoft.com/office/drawing/2014/main" id="{E6D3A291-0D90-BA73-2F22-A04435859284}"/>
-              </a:ext>
-            </a:extLst>
-          </p:cNvPr>
-          <p:cNvSpPr/>
-          <p:nvPr/>
-        </p:nvSpPr>
-        <p:spPr>
-          <a:xfrm>
-            <a:off x="5143500" y="9394110"/>
-            <a:ext cx="2603500" cy="228600"/>
-          </a:xfrm>
-          <a:prstGeom prst="roundRect">
-            <a:avLst/>
-          </a:prstGeom>
-        </p:spPr>
-        <p:style>
-          <a:lnRef idx="2">
-            <a:schemeClr val="accent6">
-              <a:shade val="50000"/>
-            </a:schemeClr>
-          </a:lnRef>
-          <a:fillRef idx="1">
-            <a:schemeClr val="accent6"/>
-          </a:fillRef>
-          <a:effectRef idx="0">
-            <a:schemeClr val="accent6"/>
-          </a:effectRef>
-          <a:fontRef idx="minor">
-            <a:schemeClr val="lt1"/>
-          </a:fontRef>
-        </p:style>
-        <p:txBody>
-          <a:bodyPr rtlCol="0" anchor="ctr"/>
-          <a:lstStyle/>
-          <a:p>
-            <a:pPr algn="ctr"/>
-            <a:r>
-              <a:rPr lang="en-US" sz="1200" dirty="0" err="1"/>
-              <a:t>data_cas_si_su_mpa_pop</a:t>
-            </a:r>
-            <a:endParaRPr lang="en-US" sz="1200" dirty="0"/>
-          </a:p>
-        </p:txBody>
-      </p:sp>
-      <p:sp>
-        <p:nvSpPr>
-          <p:cNvPr id="8" name="Rectangle: Rounded Corners 7">
-            <a:extLst>
-              <a:ext uri="{FF2B5EF4-FFF2-40B4-BE49-F238E27FC236}">
-                <a16:creationId xmlns:a16="http://schemas.microsoft.com/office/drawing/2014/main" id="{5F537EEE-F86B-B288-A5BC-AC3C9B1ECAEB}"/>
-              </a:ext>
-            </a:extLst>
-          </p:cNvPr>
-          <p:cNvSpPr/>
-          <p:nvPr/>
-        </p:nvSpPr>
-        <p:spPr>
-          <a:xfrm>
-            <a:off x="16704" y="3028699"/>
-            <a:ext cx="3225800" cy="228600"/>
-          </a:xfrm>
-          <a:prstGeom prst="roundRect">
-            <a:avLst/>
-          </a:prstGeom>
-        </p:spPr>
-        <p:style>
-          <a:lnRef idx="2">
-            <a:schemeClr val="accent2">
-              <a:shade val="50000"/>
-            </a:schemeClr>
-          </a:lnRef>
-          <a:fillRef idx="1">
-            <a:schemeClr val="accent2"/>
-          </a:fillRef>
-          <a:effectRef idx="0">
-            <a:schemeClr val="accent2"/>
-          </a:effectRef>
-          <a:fontRef idx="minor">
-            <a:schemeClr val="lt1"/>
-          </a:fontRef>
-        </p:style>
-        <p:txBody>
-          <a:bodyPr rtlCol="0" anchor="ctr"/>
-          <a:lstStyle/>
-          <a:p>
-            <a:pPr algn="ctr"/>
-            <a:r>
-              <a:rPr lang="en-US" sz="1200" b="1" dirty="0"/>
-              <a:t>../data/SU-SI_Duplicates_20220808.xlsx</a:t>
-            </a:r>
-          </a:p>
-        </p:txBody>
-      </p:sp>
-      <p:sp>
-        <p:nvSpPr>
-          <p:cNvPr id="9" name="Rectangle: Rounded Corners 8">
-            <a:extLst>
-              <a:ext uri="{FF2B5EF4-FFF2-40B4-BE49-F238E27FC236}">
-                <a16:creationId xmlns:a16="http://schemas.microsoft.com/office/drawing/2014/main" id="{0BAD4348-312F-5288-3407-A5ABCB5ED92E}"/>
-              </a:ext>
-            </a:extLst>
-          </p:cNvPr>
-          <p:cNvSpPr/>
-          <p:nvPr/>
-        </p:nvSpPr>
-        <p:spPr>
-          <a:xfrm>
-            <a:off x="16704" y="3354751"/>
-            <a:ext cx="3225800" cy="228600"/>
-          </a:xfrm>
-          <a:prstGeom prst="roundRect">
-            <a:avLst/>
-          </a:prstGeom>
-        </p:spPr>
-        <p:style>
-          <a:lnRef idx="2">
-            <a:schemeClr val="accent2">
-              <a:shade val="50000"/>
-            </a:schemeClr>
-          </a:lnRef>
-          <a:fillRef idx="1">
-            <a:schemeClr val="accent2"/>
-          </a:fillRef>
-          <a:effectRef idx="0">
-            <a:schemeClr val="accent2"/>
-          </a:effectRef>
-          <a:fontRef idx="minor">
-            <a:schemeClr val="lt1"/>
-          </a:fontRef>
-        </p:style>
-        <p:txBody>
-          <a:bodyPr rtlCol="0" anchor="ctr"/>
-          <a:lstStyle/>
-          <a:p>
-            <a:pPr algn="ctr"/>
-            <a:r>
-              <a:rPr lang="en-US" sz="1200" b="1" dirty="0"/>
-              <a:t>../data/All_confirmed_names.xlsx</a:t>
-            </a:r>
-          </a:p>
-        </p:txBody>
-      </p:sp>
-      <p:sp>
-        <p:nvSpPr>
-          <p:cNvPr id="17" name="Rectangle: Rounded Corners 16">
-            <a:extLst>
-              <a:ext uri="{FF2B5EF4-FFF2-40B4-BE49-F238E27FC236}">
-                <a16:creationId xmlns:a16="http://schemas.microsoft.com/office/drawing/2014/main" id="{F49F1137-02C7-212B-A3BD-849A13FDD128}"/>
-              </a:ext>
-            </a:extLst>
-          </p:cNvPr>
-          <p:cNvSpPr/>
-          <p:nvPr/>
-        </p:nvSpPr>
-        <p:spPr>
-          <a:xfrm>
-            <a:off x="16704" y="3730416"/>
-            <a:ext cx="3225800" cy="228600"/>
-          </a:xfrm>
-          <a:prstGeom prst="roundRect">
-            <a:avLst/>
-          </a:prstGeom>
-        </p:spPr>
-        <p:style>
-          <a:lnRef idx="2">
-            <a:schemeClr val="accent2">
-              <a:shade val="50000"/>
-            </a:schemeClr>
-          </a:lnRef>
-          <a:fillRef idx="1">
-            <a:schemeClr val="accent2"/>
-          </a:fillRef>
-          <a:effectRef idx="0">
-            <a:schemeClr val="accent2"/>
-          </a:effectRef>
-          <a:fontRef idx="minor">
-            <a:schemeClr val="lt1"/>
-          </a:fontRef>
-        </p:style>
-        <p:txBody>
-          <a:bodyPr rtlCol="0" anchor="ctr"/>
-          <a:lstStyle/>
-          <a:p>
-            <a:pPr algn="ctr"/>
-            <a:r>
-              <a:rPr lang="en-US" sz="1200" b="1" dirty="0"/>
-              <a:t>../data/All_confirmed_names.xlsx</a:t>
-            </a:r>
           </a:p>
         </p:txBody>
       </p:sp>
     </p:spTree>
     <p:extLst>
       <p:ext uri="{BB962C8B-B14F-4D97-AF65-F5344CB8AC3E}">
-        <p14:creationId xmlns:p14="http://schemas.microsoft.com/office/powerpoint/2010/main" val="12947292"/>
+        <p14:creationId xmlns:p14="http://schemas.microsoft.com/office/powerpoint/2010/main" val="1625353637"/>
       </p:ext>
     </p:extLst>
   </p:cSld>
@@ -6538,58 +8611,657 @@
       </p:grpSpPr>
       <p:sp>
         <p:nvSpPr>
-          <p:cNvPr id="2" name="Title 1">
-            <a:extLst>
-              <a:ext uri="{FF2B5EF4-FFF2-40B4-BE49-F238E27FC236}">
-                <a16:creationId xmlns:a16="http://schemas.microsoft.com/office/drawing/2014/main" id="{8C6F8D1B-A9A5-0CAC-6174-A6B8B80D0733}"/>
-              </a:ext>
-            </a:extLst>
-          </p:cNvPr>
-          <p:cNvSpPr>
-            <a:spLocks noGrp="1"/>
-          </p:cNvSpPr>
-          <p:nvPr>
-            <p:ph type="title"/>
-          </p:nvPr>
-        </p:nvSpPr>
-        <p:spPr/>
-        <p:txBody>
-          <a:bodyPr/>
-          <a:lstStyle/>
-          <a:p>
-            <a:endParaRPr lang="en-US"/>
-          </a:p>
-        </p:txBody>
-      </p:sp>
-      <p:sp>
-        <p:nvSpPr>
-          <p:cNvPr id="3" name="Content Placeholder 2">
-            <a:extLst>
-              <a:ext uri="{FF2B5EF4-FFF2-40B4-BE49-F238E27FC236}">
-                <a16:creationId xmlns:a16="http://schemas.microsoft.com/office/drawing/2014/main" id="{41161BE2-73D9-5EE4-73C4-FD0AA3BDAE34}"/>
-              </a:ext>
-            </a:extLst>
-          </p:cNvPr>
-          <p:cNvSpPr>
-            <a:spLocks noGrp="1"/>
-          </p:cNvSpPr>
-          <p:nvPr>
-            <p:ph idx="1"/>
-          </p:nvPr>
-        </p:nvSpPr>
-        <p:spPr/>
-        <p:txBody>
-          <a:bodyPr/>
-          <a:lstStyle/>
-          <a:p>
-            <a:endParaRPr lang="en-US"/>
+          <p:cNvPr id="12" name="Rectangle: Rounded Corners 11">
+            <a:extLst>
+              <a:ext uri="{FF2B5EF4-FFF2-40B4-BE49-F238E27FC236}">
+                <a16:creationId xmlns:a16="http://schemas.microsoft.com/office/drawing/2014/main" id="{F8233055-3E4B-7D86-0AA2-255CDE3DC270}"/>
+              </a:ext>
+            </a:extLst>
+          </p:cNvPr>
+          <p:cNvSpPr/>
+          <p:nvPr/>
+        </p:nvSpPr>
+        <p:spPr>
+          <a:xfrm>
+            <a:off x="3282950" y="1501487"/>
+            <a:ext cx="1828800" cy="457200"/>
+          </a:xfrm>
+          <a:prstGeom prst="roundRect">
+            <a:avLst/>
+          </a:prstGeom>
+        </p:spPr>
+        <p:style>
+          <a:lnRef idx="2">
+            <a:schemeClr val="accent1">
+              <a:shade val="50000"/>
+            </a:schemeClr>
+          </a:lnRef>
+          <a:fillRef idx="1">
+            <a:schemeClr val="accent1"/>
+          </a:fillRef>
+          <a:effectRef idx="0">
+            <a:schemeClr val="accent1"/>
+          </a:effectRef>
+          <a:fontRef idx="minor">
+            <a:schemeClr val="lt1"/>
+          </a:fontRef>
+        </p:style>
+        <p:txBody>
+          <a:bodyPr rtlCol="0" anchor="ctr"/>
+          <a:lstStyle/>
+          <a:p>
+            <a:pPr algn="ctr"/>
+            <a:r>
+              <a:rPr lang="en-US" sz="1200" b="1" dirty="0" err="1"/>
+              <a:t>wrangle_hackathon.R</a:t>
+            </a:r>
+            <a:endParaRPr lang="en-US" sz="1200" b="1" dirty="0"/>
+          </a:p>
+        </p:txBody>
+      </p:sp>
+      <p:sp>
+        <p:nvSpPr>
+          <p:cNvPr id="13" name="Rectangle: Rounded Corners 12">
+            <a:extLst>
+              <a:ext uri="{FF2B5EF4-FFF2-40B4-BE49-F238E27FC236}">
+                <a16:creationId xmlns:a16="http://schemas.microsoft.com/office/drawing/2014/main" id="{4EAD1516-111C-AE3C-0503-992AE73B9E6E}"/>
+              </a:ext>
+            </a:extLst>
+          </p:cNvPr>
+          <p:cNvSpPr/>
+          <p:nvPr/>
+        </p:nvSpPr>
+        <p:spPr>
+          <a:xfrm>
+            <a:off x="1104900" y="215479"/>
+            <a:ext cx="5372100" cy="851321"/>
+          </a:xfrm>
+          <a:prstGeom prst="roundRect">
+            <a:avLst/>
+          </a:prstGeom>
+        </p:spPr>
+        <p:style>
+          <a:lnRef idx="2">
+            <a:schemeClr val="accent1">
+              <a:shade val="50000"/>
+            </a:schemeClr>
+          </a:lnRef>
+          <a:fillRef idx="1">
+            <a:schemeClr val="accent1"/>
+          </a:fillRef>
+          <a:effectRef idx="0">
+            <a:schemeClr val="accent1"/>
+          </a:effectRef>
+          <a:fontRef idx="minor">
+            <a:schemeClr val="lt1"/>
+          </a:fontRef>
+        </p:style>
+        <p:txBody>
+          <a:bodyPr rtlCol="0" anchor="ctr"/>
+          <a:lstStyle/>
+          <a:p>
+            <a:pPr algn="ctr"/>
+            <a:endParaRPr lang="en-US" sz="3600" dirty="0"/>
+          </a:p>
+        </p:txBody>
+      </p:sp>
+      <p:sp>
+        <p:nvSpPr>
+          <p:cNvPr id="2" name="TextBox 1">
+            <a:extLst>
+              <a:ext uri="{FF2B5EF4-FFF2-40B4-BE49-F238E27FC236}">
+                <a16:creationId xmlns:a16="http://schemas.microsoft.com/office/drawing/2014/main" id="{65889B7A-55FF-80CA-8147-3FEEBCBBD354}"/>
+              </a:ext>
+            </a:extLst>
+          </p:cNvPr>
+          <p:cNvSpPr txBox="1"/>
+          <p:nvPr/>
+        </p:nvSpPr>
+        <p:spPr>
+          <a:xfrm>
+            <a:off x="3643352" y="1087352"/>
+            <a:ext cx="1107996" cy="461665"/>
+          </a:xfrm>
+          <a:prstGeom prst="rect">
+            <a:avLst/>
+          </a:prstGeom>
+          <a:noFill/>
+        </p:spPr>
+        <p:txBody>
+          <a:bodyPr wrap="none" rtlCol="0">
+            <a:spAutoFit/>
+          </a:bodyPr>
+          <a:lstStyle/>
+          <a:p>
+            <a:r>
+              <a:rPr lang="en-US" sz="2400" dirty="0"/>
+              <a:t>SCRIPT	</a:t>
+            </a:r>
+          </a:p>
+        </p:txBody>
+      </p:sp>
+      <p:sp>
+        <p:nvSpPr>
+          <p:cNvPr id="4" name="TextBox 3">
+            <a:extLst>
+              <a:ext uri="{FF2B5EF4-FFF2-40B4-BE49-F238E27FC236}">
+                <a16:creationId xmlns:a16="http://schemas.microsoft.com/office/drawing/2014/main" id="{0109E3E0-7269-924F-A5B5-C68C5B80EBE6}"/>
+              </a:ext>
+            </a:extLst>
+          </p:cNvPr>
+          <p:cNvSpPr txBox="1"/>
+          <p:nvPr/>
+        </p:nvSpPr>
+        <p:spPr>
+          <a:xfrm>
+            <a:off x="6057605" y="1087284"/>
+            <a:ext cx="1242648" cy="461665"/>
+          </a:xfrm>
+          <a:prstGeom prst="rect">
+            <a:avLst/>
+          </a:prstGeom>
+          <a:noFill/>
+        </p:spPr>
+        <p:txBody>
+          <a:bodyPr wrap="none" rtlCol="0">
+            <a:spAutoFit/>
+          </a:bodyPr>
+          <a:lstStyle/>
+          <a:p>
+            <a:r>
+              <a:rPr lang="en-US" sz="2400" dirty="0"/>
+              <a:t>OUTPUT</a:t>
+            </a:r>
+          </a:p>
+        </p:txBody>
+      </p:sp>
+      <p:sp>
+        <p:nvSpPr>
+          <p:cNvPr id="5" name="TextBox 4">
+            <a:extLst>
+              <a:ext uri="{FF2B5EF4-FFF2-40B4-BE49-F238E27FC236}">
+                <a16:creationId xmlns:a16="http://schemas.microsoft.com/office/drawing/2014/main" id="{3C7693B8-B001-51BA-D2C7-85B261581FC5}"/>
+              </a:ext>
+            </a:extLst>
+          </p:cNvPr>
+          <p:cNvSpPr txBox="1"/>
+          <p:nvPr/>
+        </p:nvSpPr>
+        <p:spPr>
+          <a:xfrm>
+            <a:off x="922113" y="1083072"/>
+            <a:ext cx="1107996" cy="461665"/>
+          </a:xfrm>
+          <a:prstGeom prst="rect">
+            <a:avLst/>
+          </a:prstGeom>
+          <a:noFill/>
+        </p:spPr>
+        <p:txBody>
+          <a:bodyPr wrap="none" rtlCol="0">
+            <a:spAutoFit/>
+          </a:bodyPr>
+          <a:lstStyle/>
+          <a:p>
+            <a:r>
+              <a:rPr lang="en-US" sz="2400" dirty="0"/>
+              <a:t>INPUT	</a:t>
+            </a:r>
+          </a:p>
+        </p:txBody>
+      </p:sp>
+      <p:sp>
+        <p:nvSpPr>
+          <p:cNvPr id="7" name="Rectangle: Rounded Corners 6">
+            <a:extLst>
+              <a:ext uri="{FF2B5EF4-FFF2-40B4-BE49-F238E27FC236}">
+                <a16:creationId xmlns:a16="http://schemas.microsoft.com/office/drawing/2014/main" id="{E6D3A291-0D90-BA73-2F22-A04435859284}"/>
+              </a:ext>
+            </a:extLst>
+          </p:cNvPr>
+          <p:cNvSpPr/>
+          <p:nvPr/>
+        </p:nvSpPr>
+        <p:spPr>
+          <a:xfrm>
+            <a:off x="5143500" y="9394110"/>
+            <a:ext cx="2603500" cy="228600"/>
+          </a:xfrm>
+          <a:prstGeom prst="roundRect">
+            <a:avLst/>
+          </a:prstGeom>
+        </p:spPr>
+        <p:style>
+          <a:lnRef idx="2">
+            <a:schemeClr val="accent6">
+              <a:shade val="50000"/>
+            </a:schemeClr>
+          </a:lnRef>
+          <a:fillRef idx="1">
+            <a:schemeClr val="accent6"/>
+          </a:fillRef>
+          <a:effectRef idx="0">
+            <a:schemeClr val="accent6"/>
+          </a:effectRef>
+          <a:fontRef idx="minor">
+            <a:schemeClr val="lt1"/>
+          </a:fontRef>
+        </p:style>
+        <p:txBody>
+          <a:bodyPr rtlCol="0" anchor="ctr"/>
+          <a:lstStyle/>
+          <a:p>
+            <a:pPr algn="ctr"/>
+            <a:r>
+              <a:rPr lang="en-US" sz="1200" dirty="0" err="1"/>
+              <a:t>data_cas_si_su_mpa_pop</a:t>
+            </a:r>
+            <a:endParaRPr lang="en-US" sz="1200" dirty="0"/>
+          </a:p>
+        </p:txBody>
+      </p:sp>
+      <p:sp>
+        <p:nvSpPr>
+          <p:cNvPr id="3" name="Rectangle: Rounded Corners 2">
+            <a:extLst>
+              <a:ext uri="{FF2B5EF4-FFF2-40B4-BE49-F238E27FC236}">
+                <a16:creationId xmlns:a16="http://schemas.microsoft.com/office/drawing/2014/main" id="{F3E8FFC5-186E-AFB9-C0E5-AA73FCA65789}"/>
+              </a:ext>
+            </a:extLst>
+          </p:cNvPr>
+          <p:cNvSpPr/>
+          <p:nvPr/>
+        </p:nvSpPr>
+        <p:spPr>
+          <a:xfrm>
+            <a:off x="508295" y="2619400"/>
+            <a:ext cx="1828800" cy="457200"/>
+          </a:xfrm>
+          <a:prstGeom prst="roundRect">
+            <a:avLst/>
+          </a:prstGeom>
+        </p:spPr>
+        <p:style>
+          <a:lnRef idx="2">
+            <a:schemeClr val="accent1">
+              <a:shade val="50000"/>
+            </a:schemeClr>
+          </a:lnRef>
+          <a:fillRef idx="1">
+            <a:schemeClr val="accent1"/>
+          </a:fillRef>
+          <a:effectRef idx="0">
+            <a:schemeClr val="accent1"/>
+          </a:effectRef>
+          <a:fontRef idx="minor">
+            <a:schemeClr val="lt1"/>
+          </a:fontRef>
+        </p:style>
+        <p:txBody>
+          <a:bodyPr rtlCol="0" anchor="ctr"/>
+          <a:lstStyle/>
+          <a:p>
+            <a:pPr algn="ctr"/>
+            <a:r>
+              <a:rPr lang="en-US" sz="1200" b="1" dirty="0" err="1"/>
+              <a:t>wrangle_cas_data.R</a:t>
+            </a:r>
+            <a:endParaRPr lang="en-US" sz="1200" b="1" dirty="0"/>
+          </a:p>
+        </p:txBody>
+      </p:sp>
+      <p:sp>
+        <p:nvSpPr>
+          <p:cNvPr id="6" name="Rectangle: Rounded Corners 5">
+            <a:extLst>
+              <a:ext uri="{FF2B5EF4-FFF2-40B4-BE49-F238E27FC236}">
+                <a16:creationId xmlns:a16="http://schemas.microsoft.com/office/drawing/2014/main" id="{68B44631-6772-BE14-D6D5-B08A029876F7}"/>
+              </a:ext>
+            </a:extLst>
+          </p:cNvPr>
+          <p:cNvSpPr/>
+          <p:nvPr/>
+        </p:nvSpPr>
+        <p:spPr>
+          <a:xfrm>
+            <a:off x="508295" y="1521324"/>
+            <a:ext cx="1828800" cy="457200"/>
+          </a:xfrm>
+          <a:prstGeom prst="roundRect">
+            <a:avLst/>
+          </a:prstGeom>
+        </p:spPr>
+        <p:style>
+          <a:lnRef idx="2">
+            <a:schemeClr val="accent1">
+              <a:shade val="50000"/>
+            </a:schemeClr>
+          </a:lnRef>
+          <a:fillRef idx="1">
+            <a:schemeClr val="accent1"/>
+          </a:fillRef>
+          <a:effectRef idx="0">
+            <a:schemeClr val="accent1"/>
+          </a:effectRef>
+          <a:fontRef idx="minor">
+            <a:schemeClr val="lt1"/>
+          </a:fontRef>
+        </p:style>
+        <p:txBody>
+          <a:bodyPr rtlCol="0" anchor="ctr"/>
+          <a:lstStyle/>
+          <a:p>
+            <a:pPr algn="ctr"/>
+            <a:r>
+              <a:rPr lang="en-US" sz="1200" b="1" dirty="0" err="1"/>
+              <a:t>wrangleStationData_SI.R</a:t>
+            </a:r>
+            <a:endParaRPr lang="en-US" sz="1200" b="1" dirty="0"/>
+          </a:p>
+        </p:txBody>
+      </p:sp>
+      <p:sp>
+        <p:nvSpPr>
+          <p:cNvPr id="8" name="Rectangle: Rounded Corners 7">
+            <a:extLst>
+              <a:ext uri="{FF2B5EF4-FFF2-40B4-BE49-F238E27FC236}">
+                <a16:creationId xmlns:a16="http://schemas.microsoft.com/office/drawing/2014/main" id="{F3C61D9E-3688-3215-D6E9-84019E275F6B}"/>
+              </a:ext>
+            </a:extLst>
+          </p:cNvPr>
+          <p:cNvSpPr/>
+          <p:nvPr/>
+        </p:nvSpPr>
+        <p:spPr>
+          <a:xfrm>
+            <a:off x="508295" y="2070362"/>
+            <a:ext cx="1828800" cy="457200"/>
+          </a:xfrm>
+          <a:prstGeom prst="roundRect">
+            <a:avLst/>
+          </a:prstGeom>
+        </p:spPr>
+        <p:style>
+          <a:lnRef idx="2">
+            <a:schemeClr val="accent1">
+              <a:shade val="50000"/>
+            </a:schemeClr>
+          </a:lnRef>
+          <a:fillRef idx="1">
+            <a:schemeClr val="accent1"/>
+          </a:fillRef>
+          <a:effectRef idx="0">
+            <a:schemeClr val="accent1"/>
+          </a:effectRef>
+          <a:fontRef idx="minor">
+            <a:schemeClr val="lt1"/>
+          </a:fontRef>
+        </p:style>
+        <p:txBody>
+          <a:bodyPr rtlCol="0" anchor="ctr"/>
+          <a:lstStyle/>
+          <a:p>
+            <a:pPr algn="ctr"/>
+            <a:r>
+              <a:rPr lang="en-US" sz="1200" b="1" dirty="0" err="1"/>
+              <a:t>wrangle_SU-SI_DuplicatesNewData.R</a:t>
+            </a:r>
+            <a:endParaRPr lang="en-US" sz="1200" b="1" dirty="0"/>
+          </a:p>
+        </p:txBody>
+      </p:sp>
+      <p:sp>
+        <p:nvSpPr>
+          <p:cNvPr id="9" name="Rectangle: Rounded Corners 8">
+            <a:extLst>
+              <a:ext uri="{FF2B5EF4-FFF2-40B4-BE49-F238E27FC236}">
+                <a16:creationId xmlns:a16="http://schemas.microsoft.com/office/drawing/2014/main" id="{047185A4-7EC0-BC31-748E-C22D7199BB43}"/>
+              </a:ext>
+            </a:extLst>
+          </p:cNvPr>
+          <p:cNvSpPr/>
+          <p:nvPr/>
+        </p:nvSpPr>
+        <p:spPr>
+          <a:xfrm>
+            <a:off x="508295" y="3717476"/>
+            <a:ext cx="1828800" cy="457200"/>
+          </a:xfrm>
+          <a:prstGeom prst="roundRect">
+            <a:avLst/>
+          </a:prstGeom>
+        </p:spPr>
+        <p:style>
+          <a:lnRef idx="2">
+            <a:schemeClr val="accent1">
+              <a:shade val="50000"/>
+            </a:schemeClr>
+          </a:lnRef>
+          <a:fillRef idx="1">
+            <a:schemeClr val="accent1"/>
+          </a:fillRef>
+          <a:effectRef idx="0">
+            <a:schemeClr val="accent1"/>
+          </a:effectRef>
+          <a:fontRef idx="minor">
+            <a:schemeClr val="lt1"/>
+          </a:fontRef>
+        </p:style>
+        <p:txBody>
+          <a:bodyPr rtlCol="0" anchor="ctr"/>
+          <a:lstStyle/>
+          <a:p>
+            <a:pPr algn="ctr"/>
+            <a:r>
+              <a:rPr lang="en-US" sz="1200" b="1" dirty="0" err="1"/>
+              <a:t>distance_calculations_mpa.R</a:t>
+            </a:r>
+            <a:endParaRPr lang="en-US" sz="1200" b="1" dirty="0"/>
+          </a:p>
+        </p:txBody>
+      </p:sp>
+      <p:sp>
+        <p:nvSpPr>
+          <p:cNvPr id="15" name="Rectangle: Rounded Corners 14">
+            <a:extLst>
+              <a:ext uri="{FF2B5EF4-FFF2-40B4-BE49-F238E27FC236}">
+                <a16:creationId xmlns:a16="http://schemas.microsoft.com/office/drawing/2014/main" id="{3D201F7E-56B8-1C80-7509-2D828921D16F}"/>
+              </a:ext>
+            </a:extLst>
+          </p:cNvPr>
+          <p:cNvSpPr/>
+          <p:nvPr/>
+        </p:nvSpPr>
+        <p:spPr>
+          <a:xfrm>
+            <a:off x="508295" y="4283912"/>
+            <a:ext cx="1828800" cy="457200"/>
+          </a:xfrm>
+          <a:prstGeom prst="roundRect">
+            <a:avLst/>
+          </a:prstGeom>
+        </p:spPr>
+        <p:style>
+          <a:lnRef idx="2">
+            <a:schemeClr val="accent1">
+              <a:shade val="50000"/>
+            </a:schemeClr>
+          </a:lnRef>
+          <a:fillRef idx="1">
+            <a:schemeClr val="accent1"/>
+          </a:fillRef>
+          <a:effectRef idx="0">
+            <a:schemeClr val="accent1"/>
+          </a:effectRef>
+          <a:fontRef idx="minor">
+            <a:schemeClr val="lt1"/>
+          </a:fontRef>
+        </p:style>
+        <p:txBody>
+          <a:bodyPr rtlCol="0" anchor="ctr"/>
+          <a:lstStyle/>
+          <a:p>
+            <a:pPr algn="ctr"/>
+            <a:r>
+              <a:rPr lang="en-US" sz="1200" b="1" dirty="0" err="1"/>
+              <a:t>visualize_pca_mpa_influence.R</a:t>
+            </a:r>
+            <a:endParaRPr lang="en-US" sz="1200" b="1" dirty="0"/>
+          </a:p>
+        </p:txBody>
+      </p:sp>
+      <p:sp>
+        <p:nvSpPr>
+          <p:cNvPr id="17" name="Rectangle: Rounded Corners 16">
+            <a:extLst>
+              <a:ext uri="{FF2B5EF4-FFF2-40B4-BE49-F238E27FC236}">
+                <a16:creationId xmlns:a16="http://schemas.microsoft.com/office/drawing/2014/main" id="{B76815CC-7205-6DB2-D0E5-06C851867421}"/>
+              </a:ext>
+            </a:extLst>
+          </p:cNvPr>
+          <p:cNvSpPr/>
+          <p:nvPr/>
+        </p:nvSpPr>
+        <p:spPr>
+          <a:xfrm>
+            <a:off x="508295" y="3168438"/>
+            <a:ext cx="1828800" cy="457200"/>
+          </a:xfrm>
+          <a:prstGeom prst="roundRect">
+            <a:avLst/>
+          </a:prstGeom>
+        </p:spPr>
+        <p:style>
+          <a:lnRef idx="2">
+            <a:schemeClr val="accent1">
+              <a:shade val="50000"/>
+            </a:schemeClr>
+          </a:lnRef>
+          <a:fillRef idx="1">
+            <a:schemeClr val="accent1"/>
+          </a:fillRef>
+          <a:effectRef idx="0">
+            <a:schemeClr val="accent1"/>
+          </a:effectRef>
+          <a:fontRef idx="minor">
+            <a:schemeClr val="lt1"/>
+          </a:fontRef>
+        </p:style>
+        <p:txBody>
+          <a:bodyPr rtlCol="0" anchor="ctr"/>
+          <a:lstStyle/>
+          <a:p>
+            <a:pPr algn="ctr"/>
+            <a:r>
+              <a:rPr lang="en-US" sz="1200" b="1" dirty="0" err="1"/>
+              <a:t>wrangle_arcgis.R</a:t>
+            </a:r>
+            <a:endParaRPr lang="en-US" sz="1200" b="1" dirty="0"/>
+          </a:p>
+        </p:txBody>
+      </p:sp>
+      <p:sp>
+        <p:nvSpPr>
+          <p:cNvPr id="18" name="Rectangle: Rounded Corners 17">
+            <a:extLst>
+              <a:ext uri="{FF2B5EF4-FFF2-40B4-BE49-F238E27FC236}">
+                <a16:creationId xmlns:a16="http://schemas.microsoft.com/office/drawing/2014/main" id="{131C8687-04F7-DD54-4529-E718CA0A5E6F}"/>
+              </a:ext>
+            </a:extLst>
+          </p:cNvPr>
+          <p:cNvSpPr/>
+          <p:nvPr/>
+        </p:nvSpPr>
+        <p:spPr>
+          <a:xfrm>
+            <a:off x="508295" y="4800600"/>
+            <a:ext cx="1828800" cy="457200"/>
+          </a:xfrm>
+          <a:prstGeom prst="roundRect">
+            <a:avLst/>
+          </a:prstGeom>
+        </p:spPr>
+        <p:style>
+          <a:lnRef idx="2">
+            <a:schemeClr val="accent1">
+              <a:shade val="50000"/>
+            </a:schemeClr>
+          </a:lnRef>
+          <a:fillRef idx="1">
+            <a:schemeClr val="accent1"/>
+          </a:fillRef>
+          <a:effectRef idx="0">
+            <a:schemeClr val="accent1"/>
+          </a:effectRef>
+          <a:fontRef idx="minor">
+            <a:schemeClr val="lt1"/>
+          </a:fontRef>
+        </p:style>
+        <p:txBody>
+          <a:bodyPr rtlCol="0" anchor="ctr"/>
+          <a:lstStyle/>
+          <a:p>
+            <a:pPr algn="ctr"/>
+            <a:r>
+              <a:rPr lang="en-US" sz="1200" b="1" dirty="0" err="1"/>
+              <a:t>EstimateR.R</a:t>
+            </a:r>
+            <a:endParaRPr lang="en-US" sz="1200" b="1" dirty="0"/>
+          </a:p>
+        </p:txBody>
+      </p:sp>
+      <p:sp>
+        <p:nvSpPr>
+          <p:cNvPr id="19" name="TextBox 18">
+            <a:extLst>
+              <a:ext uri="{FF2B5EF4-FFF2-40B4-BE49-F238E27FC236}">
+                <a16:creationId xmlns:a16="http://schemas.microsoft.com/office/drawing/2014/main" id="{33E0B5CB-CF29-CE15-43C2-17120757B87F}"/>
+              </a:ext>
+            </a:extLst>
+          </p:cNvPr>
+          <p:cNvSpPr txBox="1"/>
+          <p:nvPr/>
+        </p:nvSpPr>
+        <p:spPr>
+          <a:xfrm>
+            <a:off x="611439" y="5518602"/>
+            <a:ext cx="4048760" cy="276999"/>
+          </a:xfrm>
+          <a:prstGeom prst="rect">
+            <a:avLst/>
+          </a:prstGeom>
+        </p:spPr>
+        <p:style>
+          <a:lnRef idx="2">
+            <a:schemeClr val="accent1"/>
+          </a:lnRef>
+          <a:fillRef idx="1">
+            <a:schemeClr val="lt1"/>
+          </a:fillRef>
+          <a:effectRef idx="0">
+            <a:schemeClr val="accent1"/>
+          </a:effectRef>
+          <a:fontRef idx="minor">
+            <a:schemeClr val="dk1"/>
+          </a:fontRef>
+        </p:style>
+        <p:txBody>
+          <a:bodyPr wrap="square" rtlCol="0">
+            <a:spAutoFit/>
+          </a:bodyPr>
+          <a:lstStyle/>
+          <a:p>
+            <a:r>
+              <a:rPr lang="en-US" sz="1200" dirty="0"/>
+              <a:t>Issue with veganizing data function</a:t>
+            </a:r>
           </a:p>
         </p:txBody>
       </p:sp>
     </p:spTree>
     <p:extLst>
       <p:ext uri="{BB962C8B-B14F-4D97-AF65-F5344CB8AC3E}">
-        <p14:creationId xmlns:p14="http://schemas.microsoft.com/office/powerpoint/2010/main" val="185540593"/>
+        <p14:creationId xmlns:p14="http://schemas.microsoft.com/office/powerpoint/2010/main" val="3585531918"/>
       </p:ext>
     </p:extLst>
   </p:cSld>
@@ -6600,6 +9272,910 @@
 </file>
 
 <file path=ppt/slides/slide7.xml><?xml version="1.0" encoding="utf-8"?>
+<p:sld xmlns:a="http://schemas.openxmlformats.org/drawingml/2006/main" xmlns:r="http://schemas.openxmlformats.org/officeDocument/2006/relationships" xmlns:p="http://schemas.openxmlformats.org/presentationml/2006/main">
+  <p:cSld>
+    <p:spTree>
+      <p:nvGrpSpPr>
+        <p:cNvPr id="1" name="">
+          <a:extLst>
+            <a:ext uri="{FF2B5EF4-FFF2-40B4-BE49-F238E27FC236}">
+              <a16:creationId xmlns:a16="http://schemas.microsoft.com/office/drawing/2014/main" id="{875B1A31-9188-043E-0743-08D79FFE6951}"/>
+            </a:ext>
+          </a:extLst>
+        </p:cNvPr>
+        <p:cNvGrpSpPr/>
+        <p:nvPr/>
+      </p:nvGrpSpPr>
+      <p:grpSpPr>
+        <a:xfrm>
+          <a:off x="0" y="0"/>
+          <a:ext cx="0" cy="0"/>
+          <a:chOff x="0" y="0"/>
+          <a:chExt cx="0" cy="0"/>
+        </a:xfrm>
+      </p:grpSpPr>
+      <p:sp>
+        <p:nvSpPr>
+          <p:cNvPr id="13" name="Rectangle: Rounded Corners 12">
+            <a:extLst>
+              <a:ext uri="{FF2B5EF4-FFF2-40B4-BE49-F238E27FC236}">
+                <a16:creationId xmlns:a16="http://schemas.microsoft.com/office/drawing/2014/main" id="{E523EAF9-BE6E-CD93-24C9-A4B54C0A0EB6}"/>
+              </a:ext>
+            </a:extLst>
+          </p:cNvPr>
+          <p:cNvSpPr/>
+          <p:nvPr/>
+        </p:nvSpPr>
+        <p:spPr>
+          <a:xfrm>
+            <a:off x="1104900" y="215479"/>
+            <a:ext cx="5372100" cy="851321"/>
+          </a:xfrm>
+          <a:prstGeom prst="roundRect">
+            <a:avLst/>
+          </a:prstGeom>
+        </p:spPr>
+        <p:style>
+          <a:lnRef idx="2">
+            <a:schemeClr val="accent1">
+              <a:shade val="50000"/>
+            </a:schemeClr>
+          </a:lnRef>
+          <a:fillRef idx="1">
+            <a:schemeClr val="accent1"/>
+          </a:fillRef>
+          <a:effectRef idx="0">
+            <a:schemeClr val="accent1"/>
+          </a:effectRef>
+          <a:fontRef idx="minor">
+            <a:schemeClr val="lt1"/>
+          </a:fontRef>
+        </p:style>
+        <p:txBody>
+          <a:bodyPr rtlCol="0" anchor="ctr"/>
+          <a:lstStyle/>
+          <a:p>
+            <a:pPr algn="ctr"/>
+            <a:endParaRPr lang="en-US" sz="3600" dirty="0"/>
+          </a:p>
+        </p:txBody>
+      </p:sp>
+      <p:sp>
+        <p:nvSpPr>
+          <p:cNvPr id="2" name="TextBox 1">
+            <a:extLst>
+              <a:ext uri="{FF2B5EF4-FFF2-40B4-BE49-F238E27FC236}">
+                <a16:creationId xmlns:a16="http://schemas.microsoft.com/office/drawing/2014/main" id="{7F17D5B2-0AA6-ADB1-BF19-9AA81D620879}"/>
+              </a:ext>
+            </a:extLst>
+          </p:cNvPr>
+          <p:cNvSpPr txBox="1"/>
+          <p:nvPr/>
+        </p:nvSpPr>
+        <p:spPr>
+          <a:xfrm>
+            <a:off x="3643352" y="1087352"/>
+            <a:ext cx="1107996" cy="461665"/>
+          </a:xfrm>
+          <a:prstGeom prst="rect">
+            <a:avLst/>
+          </a:prstGeom>
+          <a:noFill/>
+        </p:spPr>
+        <p:txBody>
+          <a:bodyPr wrap="none" rtlCol="0">
+            <a:spAutoFit/>
+          </a:bodyPr>
+          <a:lstStyle/>
+          <a:p>
+            <a:r>
+              <a:rPr lang="en-US" sz="2400" dirty="0"/>
+              <a:t>SCRIPT	</a:t>
+            </a:r>
+          </a:p>
+        </p:txBody>
+      </p:sp>
+      <p:sp>
+        <p:nvSpPr>
+          <p:cNvPr id="4" name="TextBox 3">
+            <a:extLst>
+              <a:ext uri="{FF2B5EF4-FFF2-40B4-BE49-F238E27FC236}">
+                <a16:creationId xmlns:a16="http://schemas.microsoft.com/office/drawing/2014/main" id="{03F57BAB-5FF9-CD2D-5B1A-5D45F06B34DE}"/>
+              </a:ext>
+            </a:extLst>
+          </p:cNvPr>
+          <p:cNvSpPr txBox="1"/>
+          <p:nvPr/>
+        </p:nvSpPr>
+        <p:spPr>
+          <a:xfrm>
+            <a:off x="6057605" y="1087284"/>
+            <a:ext cx="1242648" cy="461665"/>
+          </a:xfrm>
+          <a:prstGeom prst="rect">
+            <a:avLst/>
+          </a:prstGeom>
+          <a:noFill/>
+        </p:spPr>
+        <p:txBody>
+          <a:bodyPr wrap="none" rtlCol="0">
+            <a:spAutoFit/>
+          </a:bodyPr>
+          <a:lstStyle/>
+          <a:p>
+            <a:r>
+              <a:rPr lang="en-US" sz="2400" dirty="0"/>
+              <a:t>OUTPUT</a:t>
+            </a:r>
+          </a:p>
+        </p:txBody>
+      </p:sp>
+      <p:sp>
+        <p:nvSpPr>
+          <p:cNvPr id="5" name="TextBox 4">
+            <a:extLst>
+              <a:ext uri="{FF2B5EF4-FFF2-40B4-BE49-F238E27FC236}">
+                <a16:creationId xmlns:a16="http://schemas.microsoft.com/office/drawing/2014/main" id="{04048F62-47D6-0AE3-82A5-76E943235FCA}"/>
+              </a:ext>
+            </a:extLst>
+          </p:cNvPr>
+          <p:cNvSpPr txBox="1"/>
+          <p:nvPr/>
+        </p:nvSpPr>
+        <p:spPr>
+          <a:xfrm>
+            <a:off x="922113" y="1083072"/>
+            <a:ext cx="1107996" cy="461665"/>
+          </a:xfrm>
+          <a:prstGeom prst="rect">
+            <a:avLst/>
+          </a:prstGeom>
+          <a:noFill/>
+        </p:spPr>
+        <p:txBody>
+          <a:bodyPr wrap="none" rtlCol="0">
+            <a:spAutoFit/>
+          </a:bodyPr>
+          <a:lstStyle/>
+          <a:p>
+            <a:r>
+              <a:rPr lang="en-US" sz="2400" dirty="0"/>
+              <a:t>INPUT	</a:t>
+            </a:r>
+          </a:p>
+        </p:txBody>
+      </p:sp>
+      <p:sp>
+        <p:nvSpPr>
+          <p:cNvPr id="18" name="Rectangle: Rounded Corners 17">
+            <a:extLst>
+              <a:ext uri="{FF2B5EF4-FFF2-40B4-BE49-F238E27FC236}">
+                <a16:creationId xmlns:a16="http://schemas.microsoft.com/office/drawing/2014/main" id="{64316183-C411-8980-1015-BCF4D1D9BC60}"/>
+              </a:ext>
+            </a:extLst>
+          </p:cNvPr>
+          <p:cNvSpPr/>
+          <p:nvPr/>
+        </p:nvSpPr>
+        <p:spPr>
+          <a:xfrm>
+            <a:off x="3282950" y="1511293"/>
+            <a:ext cx="1828800" cy="457200"/>
+          </a:xfrm>
+          <a:prstGeom prst="roundRect">
+            <a:avLst/>
+          </a:prstGeom>
+        </p:spPr>
+        <p:style>
+          <a:lnRef idx="2">
+            <a:schemeClr val="accent1">
+              <a:shade val="50000"/>
+            </a:schemeClr>
+          </a:lnRef>
+          <a:fillRef idx="1">
+            <a:schemeClr val="accent1"/>
+          </a:fillRef>
+          <a:effectRef idx="0">
+            <a:schemeClr val="accent1"/>
+          </a:effectRef>
+          <a:fontRef idx="minor">
+            <a:schemeClr val="lt1"/>
+          </a:fontRef>
+        </p:style>
+        <p:txBody>
+          <a:bodyPr rtlCol="0" anchor="ctr"/>
+          <a:lstStyle/>
+          <a:p>
+            <a:pPr algn="ctr"/>
+            <a:r>
+              <a:rPr lang="en-US" sz="1200" b="1" dirty="0" err="1"/>
+              <a:t>EstimateR.R</a:t>
+            </a:r>
+            <a:endParaRPr lang="en-US" sz="1200" b="1" dirty="0"/>
+          </a:p>
+        </p:txBody>
+      </p:sp>
+      <p:sp>
+        <p:nvSpPr>
+          <p:cNvPr id="11" name="Rectangle: Rounded Corners 10">
+            <a:extLst>
+              <a:ext uri="{FF2B5EF4-FFF2-40B4-BE49-F238E27FC236}">
+                <a16:creationId xmlns:a16="http://schemas.microsoft.com/office/drawing/2014/main" id="{C6845EAD-8A3D-5956-9A89-724ED110DC79}"/>
+              </a:ext>
+            </a:extLst>
+          </p:cNvPr>
+          <p:cNvSpPr/>
+          <p:nvPr/>
+        </p:nvSpPr>
+        <p:spPr>
+          <a:xfrm>
+            <a:off x="397933" y="1511293"/>
+            <a:ext cx="2125134" cy="457200"/>
+          </a:xfrm>
+          <a:prstGeom prst="roundRect">
+            <a:avLst/>
+          </a:prstGeom>
+        </p:spPr>
+        <p:style>
+          <a:lnRef idx="2">
+            <a:schemeClr val="accent1">
+              <a:shade val="50000"/>
+            </a:schemeClr>
+          </a:lnRef>
+          <a:fillRef idx="1">
+            <a:schemeClr val="accent1"/>
+          </a:fillRef>
+          <a:effectRef idx="0">
+            <a:schemeClr val="accent1"/>
+          </a:effectRef>
+          <a:fontRef idx="minor">
+            <a:schemeClr val="lt1"/>
+          </a:fontRef>
+        </p:style>
+        <p:txBody>
+          <a:bodyPr rtlCol="0" anchor="ctr"/>
+          <a:lstStyle/>
+          <a:p>
+            <a:pPr algn="ctr"/>
+            <a:r>
+              <a:rPr lang="en-US" sz="1200" b="1" dirty="0" err="1"/>
+              <a:t>wrangle_cas_si_su_data.R</a:t>
+            </a:r>
+            <a:endParaRPr lang="en-US" sz="1200" b="1" dirty="0"/>
+          </a:p>
+        </p:txBody>
+      </p:sp>
+      <p:sp>
+        <p:nvSpPr>
+          <p:cNvPr id="14" name="Rectangle: Rounded Corners 13">
+            <a:extLst>
+              <a:ext uri="{FF2B5EF4-FFF2-40B4-BE49-F238E27FC236}">
+                <a16:creationId xmlns:a16="http://schemas.microsoft.com/office/drawing/2014/main" id="{738DC456-CF4E-00EE-0C4D-4451730F013D}"/>
+              </a:ext>
+            </a:extLst>
+          </p:cNvPr>
+          <p:cNvSpPr/>
+          <p:nvPr/>
+        </p:nvSpPr>
+        <p:spPr>
+          <a:xfrm>
+            <a:off x="397933" y="2006090"/>
+            <a:ext cx="2125134" cy="457200"/>
+          </a:xfrm>
+          <a:prstGeom prst="roundRect">
+            <a:avLst/>
+          </a:prstGeom>
+        </p:spPr>
+        <p:style>
+          <a:lnRef idx="2">
+            <a:schemeClr val="accent1">
+              <a:shade val="50000"/>
+            </a:schemeClr>
+          </a:lnRef>
+          <a:fillRef idx="1">
+            <a:schemeClr val="accent1"/>
+          </a:fillRef>
+          <a:effectRef idx="0">
+            <a:schemeClr val="accent1"/>
+          </a:effectRef>
+          <a:fontRef idx="minor">
+            <a:schemeClr val="lt1"/>
+          </a:fontRef>
+        </p:style>
+        <p:txBody>
+          <a:bodyPr rtlCol="0" anchor="ctr"/>
+          <a:lstStyle/>
+          <a:p>
+            <a:pPr algn="ctr"/>
+            <a:r>
+              <a:rPr lang="en-US" sz="1200" b="1" dirty="0" err="1"/>
+              <a:t>distance_calculations_mpa.R</a:t>
+            </a:r>
+            <a:endParaRPr lang="en-US" sz="1200" b="1" dirty="0"/>
+          </a:p>
+        </p:txBody>
+      </p:sp>
+      <p:sp>
+        <p:nvSpPr>
+          <p:cNvPr id="20" name="Rectangle: Rounded Corners 19">
+            <a:extLst>
+              <a:ext uri="{FF2B5EF4-FFF2-40B4-BE49-F238E27FC236}">
+                <a16:creationId xmlns:a16="http://schemas.microsoft.com/office/drawing/2014/main" id="{3DC9768C-26E5-131E-811D-1FC9E08FE230}"/>
+              </a:ext>
+            </a:extLst>
+          </p:cNvPr>
+          <p:cNvSpPr/>
+          <p:nvPr/>
+        </p:nvSpPr>
+        <p:spPr>
+          <a:xfrm>
+            <a:off x="397933" y="2523154"/>
+            <a:ext cx="2125134" cy="457200"/>
+          </a:xfrm>
+          <a:prstGeom prst="roundRect">
+            <a:avLst/>
+          </a:prstGeom>
+        </p:spPr>
+        <p:style>
+          <a:lnRef idx="2">
+            <a:schemeClr val="accent1">
+              <a:shade val="50000"/>
+            </a:schemeClr>
+          </a:lnRef>
+          <a:fillRef idx="1">
+            <a:schemeClr val="accent1"/>
+          </a:fillRef>
+          <a:effectRef idx="0">
+            <a:schemeClr val="accent1"/>
+          </a:effectRef>
+          <a:fontRef idx="minor">
+            <a:schemeClr val="lt1"/>
+          </a:fontRef>
+        </p:style>
+        <p:txBody>
+          <a:bodyPr rtlCol="0" anchor="ctr"/>
+          <a:lstStyle/>
+          <a:p>
+            <a:pPr algn="ctr"/>
+            <a:r>
+              <a:rPr lang="en-US" sz="1200" b="1" dirty="0" err="1"/>
+              <a:t>veganize_data.R</a:t>
+            </a:r>
+            <a:endParaRPr lang="en-US" sz="1200" b="1" dirty="0"/>
+          </a:p>
+        </p:txBody>
+      </p:sp>
+      <p:sp>
+        <p:nvSpPr>
+          <p:cNvPr id="22" name="Rectangle: Rounded Corners 21">
+            <a:extLst>
+              <a:ext uri="{FF2B5EF4-FFF2-40B4-BE49-F238E27FC236}">
+                <a16:creationId xmlns:a16="http://schemas.microsoft.com/office/drawing/2014/main" id="{65902175-DFD5-5C59-F6B3-E6AFADBEF4B3}"/>
+              </a:ext>
+            </a:extLst>
+          </p:cNvPr>
+          <p:cNvSpPr/>
+          <p:nvPr/>
+        </p:nvSpPr>
+        <p:spPr>
+          <a:xfrm>
+            <a:off x="5168900" y="1511292"/>
+            <a:ext cx="2603500" cy="1469061"/>
+          </a:xfrm>
+          <a:prstGeom prst="roundRect">
+            <a:avLst/>
+          </a:prstGeom>
+        </p:spPr>
+        <p:style>
+          <a:lnRef idx="2">
+            <a:schemeClr val="accent6">
+              <a:shade val="50000"/>
+            </a:schemeClr>
+          </a:lnRef>
+          <a:fillRef idx="1">
+            <a:schemeClr val="accent6"/>
+          </a:fillRef>
+          <a:effectRef idx="0">
+            <a:schemeClr val="accent6"/>
+          </a:effectRef>
+          <a:fontRef idx="minor">
+            <a:schemeClr val="lt1"/>
+          </a:fontRef>
+        </p:style>
+        <p:txBody>
+          <a:bodyPr rtlCol="0" anchor="ctr"/>
+          <a:lstStyle/>
+          <a:p>
+            <a:r>
+              <a:rPr lang="en-US" sz="1200" dirty="0" err="1"/>
+              <a:t>data_cas_si_su_vegan</a:t>
+            </a:r>
+            <a:endParaRPr lang="en-US" sz="1200" dirty="0"/>
+          </a:p>
+          <a:p>
+            <a:r>
+              <a:rPr lang="en-US" sz="1200" dirty="0" err="1"/>
+              <a:t>data_cas_si_su_vegan.env</a:t>
+            </a:r>
+            <a:endParaRPr lang="en-US" sz="1200" dirty="0"/>
+          </a:p>
+          <a:p>
+            <a:r>
+              <a:rPr lang="en-US" sz="1200" dirty="0" err="1"/>
+              <a:t>data_vegan</a:t>
+            </a:r>
+            <a:endParaRPr lang="en-US" sz="1200" dirty="0"/>
+          </a:p>
+          <a:p>
+            <a:r>
+              <a:rPr lang="en-US" sz="1200" dirty="0" err="1"/>
+              <a:t>data_vegan.env</a:t>
+            </a:r>
+            <a:endParaRPr lang="en-US" sz="1200" dirty="0"/>
+          </a:p>
+          <a:p>
+            <a:r>
+              <a:rPr lang="en-US" sz="1200" dirty="0" err="1"/>
+              <a:t>est_S</a:t>
+            </a:r>
+            <a:endParaRPr lang="en-US" sz="1200" dirty="0"/>
+          </a:p>
+        </p:txBody>
+      </p:sp>
+    </p:spTree>
+    <p:extLst>
+      <p:ext uri="{BB962C8B-B14F-4D97-AF65-F5344CB8AC3E}">
+        <p14:creationId xmlns:p14="http://schemas.microsoft.com/office/powerpoint/2010/main" val="3558256162"/>
+      </p:ext>
+    </p:extLst>
+  </p:cSld>
+  <p:clrMapOvr>
+    <a:masterClrMapping/>
+  </p:clrMapOvr>
+</p:sld>
+</file>
+
+<file path=ppt/slides/slide8.xml><?xml version="1.0" encoding="utf-8"?>
+<p:sld xmlns:a="http://schemas.openxmlformats.org/drawingml/2006/main" xmlns:r="http://schemas.openxmlformats.org/officeDocument/2006/relationships" xmlns:p="http://schemas.openxmlformats.org/presentationml/2006/main">
+  <p:cSld>
+    <p:spTree>
+      <p:nvGrpSpPr>
+        <p:cNvPr id="1" name="">
+          <a:extLst>
+            <a:ext uri="{FF2B5EF4-FFF2-40B4-BE49-F238E27FC236}">
+              <a16:creationId xmlns:a16="http://schemas.microsoft.com/office/drawing/2014/main" id="{1B3DDD4C-6EB9-B81D-DE5C-1BA56F0931AF}"/>
+            </a:ext>
+          </a:extLst>
+        </p:cNvPr>
+        <p:cNvGrpSpPr/>
+        <p:nvPr/>
+      </p:nvGrpSpPr>
+      <p:grpSpPr>
+        <a:xfrm>
+          <a:off x="0" y="0"/>
+          <a:ext cx="0" cy="0"/>
+          <a:chOff x="0" y="0"/>
+          <a:chExt cx="0" cy="0"/>
+        </a:xfrm>
+      </p:grpSpPr>
+      <p:sp>
+        <p:nvSpPr>
+          <p:cNvPr id="11" name="Rectangle: Rounded Corners 10">
+            <a:extLst>
+              <a:ext uri="{FF2B5EF4-FFF2-40B4-BE49-F238E27FC236}">
+                <a16:creationId xmlns:a16="http://schemas.microsoft.com/office/drawing/2014/main" id="{456D1570-C0A9-5008-A5C3-D365D30B97BF}"/>
+              </a:ext>
+            </a:extLst>
+          </p:cNvPr>
+          <p:cNvSpPr/>
+          <p:nvPr/>
+        </p:nvSpPr>
+        <p:spPr>
+          <a:xfrm>
+            <a:off x="3282950" y="4567097"/>
+            <a:ext cx="1828800" cy="457200"/>
+          </a:xfrm>
+          <a:prstGeom prst="roundRect">
+            <a:avLst/>
+          </a:prstGeom>
+        </p:spPr>
+        <p:style>
+          <a:lnRef idx="2">
+            <a:schemeClr val="accent1">
+              <a:shade val="50000"/>
+            </a:schemeClr>
+          </a:lnRef>
+          <a:fillRef idx="1">
+            <a:schemeClr val="accent1"/>
+          </a:fillRef>
+          <a:effectRef idx="0">
+            <a:schemeClr val="accent1"/>
+          </a:effectRef>
+          <a:fontRef idx="minor">
+            <a:schemeClr val="lt1"/>
+          </a:fontRef>
+        </p:style>
+        <p:txBody>
+          <a:bodyPr rtlCol="0" anchor="ctr"/>
+          <a:lstStyle/>
+          <a:p>
+            <a:pPr algn="ctr"/>
+            <a:r>
+              <a:rPr lang="en-US" sz="1200" b="1" dirty="0" err="1"/>
+              <a:t>visualize_pca_mpa_influence.R</a:t>
+            </a:r>
+            <a:endParaRPr lang="en-US" sz="1200" b="1" dirty="0"/>
+          </a:p>
+        </p:txBody>
+      </p:sp>
+      <p:sp>
+        <p:nvSpPr>
+          <p:cNvPr id="12" name="Rectangle: Rounded Corners 11">
+            <a:extLst>
+              <a:ext uri="{FF2B5EF4-FFF2-40B4-BE49-F238E27FC236}">
+                <a16:creationId xmlns:a16="http://schemas.microsoft.com/office/drawing/2014/main" id="{596E988F-0A14-70F4-E1B8-F5288DF8DF96}"/>
+              </a:ext>
+            </a:extLst>
+          </p:cNvPr>
+          <p:cNvSpPr/>
+          <p:nvPr/>
+        </p:nvSpPr>
+        <p:spPr>
+          <a:xfrm>
+            <a:off x="3282950" y="1501487"/>
+            <a:ext cx="1828800" cy="457200"/>
+          </a:xfrm>
+          <a:prstGeom prst="roundRect">
+            <a:avLst/>
+          </a:prstGeom>
+        </p:spPr>
+        <p:style>
+          <a:lnRef idx="2">
+            <a:schemeClr val="accent1">
+              <a:shade val="50000"/>
+            </a:schemeClr>
+          </a:lnRef>
+          <a:fillRef idx="1">
+            <a:schemeClr val="accent1"/>
+          </a:fillRef>
+          <a:effectRef idx="0">
+            <a:schemeClr val="accent1"/>
+          </a:effectRef>
+          <a:fontRef idx="minor">
+            <a:schemeClr val="lt1"/>
+          </a:fontRef>
+        </p:style>
+        <p:txBody>
+          <a:bodyPr rtlCol="0" anchor="ctr"/>
+          <a:lstStyle/>
+          <a:p>
+            <a:pPr algn="ctr"/>
+            <a:r>
+              <a:rPr lang="en-US" sz="1200" b="1" dirty="0" err="1"/>
+              <a:t>visualize_data.R</a:t>
+            </a:r>
+            <a:endParaRPr lang="en-US" sz="1200" b="1" dirty="0"/>
+          </a:p>
+        </p:txBody>
+      </p:sp>
+      <p:sp>
+        <p:nvSpPr>
+          <p:cNvPr id="13" name="Rectangle: Rounded Corners 12">
+            <a:extLst>
+              <a:ext uri="{FF2B5EF4-FFF2-40B4-BE49-F238E27FC236}">
+                <a16:creationId xmlns:a16="http://schemas.microsoft.com/office/drawing/2014/main" id="{E69328A0-32C5-48B0-65DC-BDF066022FC5}"/>
+              </a:ext>
+            </a:extLst>
+          </p:cNvPr>
+          <p:cNvSpPr/>
+          <p:nvPr/>
+        </p:nvSpPr>
+        <p:spPr>
+          <a:xfrm>
+            <a:off x="1104900" y="215479"/>
+            <a:ext cx="5372100" cy="851321"/>
+          </a:xfrm>
+          <a:prstGeom prst="roundRect">
+            <a:avLst/>
+          </a:prstGeom>
+        </p:spPr>
+        <p:style>
+          <a:lnRef idx="2">
+            <a:schemeClr val="accent1">
+              <a:shade val="50000"/>
+            </a:schemeClr>
+          </a:lnRef>
+          <a:fillRef idx="1">
+            <a:schemeClr val="accent1"/>
+          </a:fillRef>
+          <a:effectRef idx="0">
+            <a:schemeClr val="accent1"/>
+          </a:effectRef>
+          <a:fontRef idx="minor">
+            <a:schemeClr val="lt1"/>
+          </a:fontRef>
+        </p:style>
+        <p:txBody>
+          <a:bodyPr rtlCol="0" anchor="ctr"/>
+          <a:lstStyle/>
+          <a:p>
+            <a:pPr algn="ctr"/>
+            <a:r>
+              <a:rPr lang="en-US" sz="3600" dirty="0"/>
+              <a:t>visualize_*.R</a:t>
+            </a:r>
+          </a:p>
+        </p:txBody>
+      </p:sp>
+      <p:sp>
+        <p:nvSpPr>
+          <p:cNvPr id="14" name="Rectangle: Rounded Corners 13">
+            <a:extLst>
+              <a:ext uri="{FF2B5EF4-FFF2-40B4-BE49-F238E27FC236}">
+                <a16:creationId xmlns:a16="http://schemas.microsoft.com/office/drawing/2014/main" id="{33645578-7EA3-5529-FA01-08B156C222B0}"/>
+              </a:ext>
+            </a:extLst>
+          </p:cNvPr>
+          <p:cNvSpPr/>
+          <p:nvPr/>
+        </p:nvSpPr>
+        <p:spPr>
+          <a:xfrm>
+            <a:off x="3282950" y="3034292"/>
+            <a:ext cx="1828800" cy="457200"/>
+          </a:xfrm>
+          <a:prstGeom prst="roundRect">
+            <a:avLst/>
+          </a:prstGeom>
+        </p:spPr>
+        <p:style>
+          <a:lnRef idx="2">
+            <a:schemeClr val="accent1">
+              <a:shade val="50000"/>
+            </a:schemeClr>
+          </a:lnRef>
+          <a:fillRef idx="1">
+            <a:schemeClr val="accent1"/>
+          </a:fillRef>
+          <a:effectRef idx="0">
+            <a:schemeClr val="accent1"/>
+          </a:effectRef>
+          <a:fontRef idx="minor">
+            <a:schemeClr val="lt1"/>
+          </a:fontRef>
+        </p:style>
+        <p:txBody>
+          <a:bodyPr rtlCol="0" anchor="ctr"/>
+          <a:lstStyle/>
+          <a:p>
+            <a:pPr algn="ctr"/>
+            <a:r>
+              <a:rPr lang="en-US" sz="1200" b="1" dirty="0" err="1"/>
+              <a:t>visualize_arcgis_pop.R</a:t>
+            </a:r>
+            <a:endParaRPr lang="en-US" sz="1200" b="1" dirty="0"/>
+          </a:p>
+        </p:txBody>
+      </p:sp>
+      <p:sp>
+        <p:nvSpPr>
+          <p:cNvPr id="2" name="TextBox 1">
+            <a:extLst>
+              <a:ext uri="{FF2B5EF4-FFF2-40B4-BE49-F238E27FC236}">
+                <a16:creationId xmlns:a16="http://schemas.microsoft.com/office/drawing/2014/main" id="{55558E87-B9D8-B030-A2BE-5AEDAF593F01}"/>
+              </a:ext>
+            </a:extLst>
+          </p:cNvPr>
+          <p:cNvSpPr txBox="1"/>
+          <p:nvPr/>
+        </p:nvSpPr>
+        <p:spPr>
+          <a:xfrm>
+            <a:off x="3643352" y="1087352"/>
+            <a:ext cx="1107996" cy="461665"/>
+          </a:xfrm>
+          <a:prstGeom prst="rect">
+            <a:avLst/>
+          </a:prstGeom>
+          <a:noFill/>
+        </p:spPr>
+        <p:txBody>
+          <a:bodyPr wrap="none" rtlCol="0">
+            <a:spAutoFit/>
+          </a:bodyPr>
+          <a:lstStyle/>
+          <a:p>
+            <a:r>
+              <a:rPr lang="en-US" sz="2400" dirty="0"/>
+              <a:t>SCRIPT	</a:t>
+            </a:r>
+          </a:p>
+        </p:txBody>
+      </p:sp>
+      <p:sp>
+        <p:nvSpPr>
+          <p:cNvPr id="4" name="TextBox 3">
+            <a:extLst>
+              <a:ext uri="{FF2B5EF4-FFF2-40B4-BE49-F238E27FC236}">
+                <a16:creationId xmlns:a16="http://schemas.microsoft.com/office/drawing/2014/main" id="{869DBA2B-560B-21B0-3333-E8EA05166FAF}"/>
+              </a:ext>
+            </a:extLst>
+          </p:cNvPr>
+          <p:cNvSpPr txBox="1"/>
+          <p:nvPr/>
+        </p:nvSpPr>
+        <p:spPr>
+          <a:xfrm>
+            <a:off x="6057605" y="1087284"/>
+            <a:ext cx="1242648" cy="461665"/>
+          </a:xfrm>
+          <a:prstGeom prst="rect">
+            <a:avLst/>
+          </a:prstGeom>
+          <a:noFill/>
+        </p:spPr>
+        <p:txBody>
+          <a:bodyPr wrap="none" rtlCol="0">
+            <a:spAutoFit/>
+          </a:bodyPr>
+          <a:lstStyle/>
+          <a:p>
+            <a:r>
+              <a:rPr lang="en-US" sz="2400" dirty="0"/>
+              <a:t>OUTPUT</a:t>
+            </a:r>
+          </a:p>
+        </p:txBody>
+      </p:sp>
+      <p:sp>
+        <p:nvSpPr>
+          <p:cNvPr id="5" name="TextBox 4">
+            <a:extLst>
+              <a:ext uri="{FF2B5EF4-FFF2-40B4-BE49-F238E27FC236}">
+                <a16:creationId xmlns:a16="http://schemas.microsoft.com/office/drawing/2014/main" id="{58D3EAC7-9B23-D21D-308D-EA63415487CC}"/>
+              </a:ext>
+            </a:extLst>
+          </p:cNvPr>
+          <p:cNvSpPr txBox="1"/>
+          <p:nvPr/>
+        </p:nvSpPr>
+        <p:spPr>
+          <a:xfrm>
+            <a:off x="922113" y="1083072"/>
+            <a:ext cx="1107996" cy="461665"/>
+          </a:xfrm>
+          <a:prstGeom prst="rect">
+            <a:avLst/>
+          </a:prstGeom>
+          <a:noFill/>
+        </p:spPr>
+        <p:txBody>
+          <a:bodyPr wrap="none" rtlCol="0">
+            <a:spAutoFit/>
+          </a:bodyPr>
+          <a:lstStyle/>
+          <a:p>
+            <a:r>
+              <a:rPr lang="en-US" sz="2400" dirty="0"/>
+              <a:t>INPUT	</a:t>
+            </a:r>
+          </a:p>
+        </p:txBody>
+      </p:sp>
+      <p:sp>
+        <p:nvSpPr>
+          <p:cNvPr id="3" name="Rectangle: Rounded Corners 2">
+            <a:extLst>
+              <a:ext uri="{FF2B5EF4-FFF2-40B4-BE49-F238E27FC236}">
+                <a16:creationId xmlns:a16="http://schemas.microsoft.com/office/drawing/2014/main" id="{341BF870-4531-81B8-DB5F-0487B1ABEF55}"/>
+              </a:ext>
+            </a:extLst>
+          </p:cNvPr>
+          <p:cNvSpPr/>
+          <p:nvPr/>
+        </p:nvSpPr>
+        <p:spPr>
+          <a:xfrm>
+            <a:off x="475742" y="3034292"/>
+            <a:ext cx="1828800" cy="457200"/>
+          </a:xfrm>
+          <a:prstGeom prst="roundRect">
+            <a:avLst/>
+          </a:prstGeom>
+        </p:spPr>
+        <p:style>
+          <a:lnRef idx="2">
+            <a:schemeClr val="accent1">
+              <a:shade val="50000"/>
+            </a:schemeClr>
+          </a:lnRef>
+          <a:fillRef idx="1">
+            <a:schemeClr val="accent1"/>
+          </a:fillRef>
+          <a:effectRef idx="0">
+            <a:schemeClr val="accent1"/>
+          </a:effectRef>
+          <a:fontRef idx="minor">
+            <a:schemeClr val="lt1"/>
+          </a:fontRef>
+        </p:style>
+        <p:txBody>
+          <a:bodyPr rtlCol="0" anchor="ctr"/>
+          <a:lstStyle/>
+          <a:p>
+            <a:pPr algn="ctr"/>
+            <a:r>
+              <a:rPr lang="en-US" sz="1200" b="1" dirty="0" err="1"/>
+              <a:t>wrangle_arcgis.R</a:t>
+            </a:r>
+            <a:endParaRPr lang="en-US" sz="1200" b="1" dirty="0"/>
+          </a:p>
+        </p:txBody>
+      </p:sp>
+      <p:sp>
+        <p:nvSpPr>
+          <p:cNvPr id="8" name="Rectangle: Rounded Corners 7">
+            <a:extLst>
+              <a:ext uri="{FF2B5EF4-FFF2-40B4-BE49-F238E27FC236}">
+                <a16:creationId xmlns:a16="http://schemas.microsoft.com/office/drawing/2014/main" id="{D5650688-B203-62C1-334C-C9B5E3761C96}"/>
+              </a:ext>
+            </a:extLst>
+          </p:cNvPr>
+          <p:cNvSpPr/>
+          <p:nvPr/>
+        </p:nvSpPr>
+        <p:spPr>
+          <a:xfrm>
+            <a:off x="475742" y="3572285"/>
+            <a:ext cx="1828800" cy="457200"/>
+          </a:xfrm>
+          <a:prstGeom prst="roundRect">
+            <a:avLst/>
+          </a:prstGeom>
+        </p:spPr>
+        <p:style>
+          <a:lnRef idx="2">
+            <a:schemeClr val="accent1">
+              <a:shade val="50000"/>
+            </a:schemeClr>
+          </a:lnRef>
+          <a:fillRef idx="1">
+            <a:schemeClr val="accent1"/>
+          </a:fillRef>
+          <a:effectRef idx="0">
+            <a:schemeClr val="accent1"/>
+          </a:effectRef>
+          <a:fontRef idx="minor">
+            <a:schemeClr val="lt1"/>
+          </a:fontRef>
+        </p:style>
+        <p:txBody>
+          <a:bodyPr rtlCol="0" anchor="ctr"/>
+          <a:lstStyle/>
+          <a:p>
+            <a:pPr algn="ctr"/>
+            <a:r>
+              <a:rPr lang="en-US" sz="1200" b="1" dirty="0" err="1"/>
+              <a:t>distance_calculations_mpa.R</a:t>
+            </a:r>
+            <a:endParaRPr lang="en-US" sz="1200" b="1" dirty="0"/>
+          </a:p>
+        </p:txBody>
+      </p:sp>
+    </p:spTree>
+    <p:extLst>
+      <p:ext uri="{BB962C8B-B14F-4D97-AF65-F5344CB8AC3E}">
+        <p14:creationId xmlns:p14="http://schemas.microsoft.com/office/powerpoint/2010/main" val="3884306834"/>
+      </p:ext>
+    </p:extLst>
+  </p:cSld>
+  <p:clrMapOvr>
+    <a:masterClrMapping/>
+  </p:clrMapOvr>
+</p:sld>
+</file>
+
+<file path=ppt/slides/slide9.xml><?xml version="1.0" encoding="utf-8"?>
 <p:sld xmlns:a="http://schemas.openxmlformats.org/drawingml/2006/main" xmlns:r="http://schemas.openxmlformats.org/officeDocument/2006/relationships" xmlns:p="http://schemas.openxmlformats.org/presentationml/2006/main">
   <p:cSld>
     <p:spTree>
@@ -6621,7 +10197,7 @@
           <p:cNvPr id="2" name="Title 1">
             <a:extLst>
               <a:ext uri="{FF2B5EF4-FFF2-40B4-BE49-F238E27FC236}">
-                <a16:creationId xmlns:a16="http://schemas.microsoft.com/office/drawing/2014/main" id="{0D917AAE-D2A4-0A4A-E78C-316D167473D5}"/>
+                <a16:creationId xmlns:a16="http://schemas.microsoft.com/office/drawing/2014/main" id="{8C6F8D1B-A9A5-0CAC-6174-A6B8B80D0733}"/>
               </a:ext>
             </a:extLst>
           </p:cNvPr>
@@ -6646,7 +10222,7 @@
           <p:cNvPr id="3" name="Content Placeholder 2">
             <a:extLst>
               <a:ext uri="{FF2B5EF4-FFF2-40B4-BE49-F238E27FC236}">
-                <a16:creationId xmlns:a16="http://schemas.microsoft.com/office/drawing/2014/main" id="{962E2BFF-6E89-CAB3-EF8D-28142CFA455C}"/>
+                <a16:creationId xmlns:a16="http://schemas.microsoft.com/office/drawing/2014/main" id="{41161BE2-73D9-5EE4-73C4-FD0AA3BDAE34}"/>
               </a:ext>
             </a:extLst>
           </p:cNvPr>
@@ -6669,7 +10245,7 @@
     </p:spTree>
     <p:extLst>
       <p:ext uri="{BB962C8B-B14F-4D97-AF65-F5344CB8AC3E}">
-        <p14:creationId xmlns:p14="http://schemas.microsoft.com/office/powerpoint/2010/main" val="3200785684"/>
+        <p14:creationId xmlns:p14="http://schemas.microsoft.com/office/powerpoint/2010/main" val="185540593"/>
       </p:ext>
     </p:extLst>
   </p:cSld>
